--- a/kits/kit01-tpt/Kit01_PresentationDeck.pptx
+++ b/kits/kit01-tpt/Kit01_PresentationDeck.pptx
@@ -1587,7 +1587,7 @@
           <a:p>
             <a:r>
               <a:rPr lang="en-US" dirty="0"/>
-              <a:t>Say: this is the moment the session exists for; everything so far was preparation for you actually typing. Nothing has to be good, it's a sandbox, and we practice like we play: zero student information. Announce the tool by name. Energy up; pairs formed inside two minutes.</a:t>
+              <a:t>Say: this is the moment the session exists for; everything so far was preparation for you actually typing. Nothing has to be good, it's a sandbox, and we practice like we play: zero student information. Ms. Rivera builds ONE artifact all the way through this lab on screen: her family newsletter blurb, option A, from typed prompt to reviewed result. Tell the room: if you ever feel lost, copy her structure. Announce the tool by name. Energy up; pairs formed inside two minutes.</a:t>
             </a:r>
             <a:endParaRPr lang="en-US" dirty="0"/>
           </a:p>
@@ -1675,7 +1675,7 @@
           <a:p>
             <a:r>
               <a:rPr lang="en-US" dirty="0"/>
-              <a:t>Circulate. Stuck pairs → option A, it works for every role. Deputize power users to float. Option D comes from a real carpentry classroom; invite electives staff to swap in their station or lab.</a:t>
+              <a:t>Say: pick whichever prompt is closest to your real job, type it, and read what comes back. On screen, Ms. Rivera's window: option A filled in with her fall book fair, and the first draft back. It's beige, and one detail in it will matter in task 2; don't spoil it yet. Circulate. Stuck pairs → option A, it works for every role. Deputize power users to float. Option D comes from a real carpentry classroom; invite electives staff to swap in their station or lab.</a:t>
             </a:r>
             <a:endParaRPr lang="en-US" dirty="0"/>
           </a:p>
@@ -1763,7 +1763,7 @@
           <a:p>
             <a:r>
               <a:rPr lang="en-US" dirty="0"/>
-              <a:t>Say: each of these is a real reply Ms. Rivera types into the chat after the first draft comes back; short and blunt is fine, the tool has no feelings. Push back at least twice on your own draft, the same way. 45-minute version: skip this task, go straight to the debrief. This is the move that separates people who get real value from people who quit in a week.</a:t>
+              <a:t>Say: don't accept the first draft; tell it what's wrong, like you would an intern, short and blunt, the tool has no feelings. On screen, Ms. Rivera's same newsletter blurb after two pushbacks: it finally sounds like her, and her read-through caught the intern inventing "all week, 8:00 to 3:00"; she never typed a schedule. Push back at least twice on your own draft, the same way. 45-minute version: skip this task, go straight to the debrief. This is the move that separates people who get real value from people who quit in a week.</a:t>
             </a:r>
             <a:endParaRPr lang="en-US" dirty="0"/>
           </a:p>
@@ -1851,7 +1851,7 @@
           <a:p>
             <a:r>
               <a:rPr lang="en-US" dirty="0"/>
-              <a:t>If the room saw an AI mistake, spotlight it warmly; it’s the best possible outcome of the lab. Take 3–4 voices, a minute each.</a:t>
+              <a:t>If the room saw an AI mistake, spotlight it warmly; it’s the best possible outcome of the lab. If nobody caught one, point back at Ms. Rivera’s invented book-fair hours from task 2; the read-through is where errors surface. Take 3–4 voices, a minute each.</a:t>
             </a:r>
             <a:endParaRPr lang="en-US" dirty="0"/>
           </a:p>
@@ -12208,7 +12208,7 @@
                 <a:ea typeface="Inter" pitchFamily="34" charset="-122"/>
                 <a:cs typeface="Inter" pitchFamily="34" charset="-120"/>
               </a:rPr>
-              <a:t>Her lab plan: one real task, zero student info, nothing has to be good.</a:t>
+              <a:t>Her lab pick, one artifact all the way through: the family newsletter blurb.</a:t>
             </a:r>
             <a:endParaRPr lang="en-US" sz="1000" dirty="0"/>
           </a:p>
@@ -12989,7 +12989,7 @@
                 <a:ea typeface="Inter" pitchFamily="34" charset="-122"/>
                 <a:cs typeface="Inter" pitchFamily="34" charset="-120"/>
               </a:rPr>
-              <a:t>On her screen: option A, the family newsletter blurb, typed and running.</a:t>
+              <a:t>Her newsletter blurb, v1: option A typed, draft back. Beige, sounds like nobody.</a:t>
             </a:r>
             <a:endParaRPr lang="en-US" sz="1000" dirty="0"/>
           </a:p>
@@ -13043,7 +13043,7 @@
         <p:spPr>
           <a:xfrm>
             <a:off x="548640" y="384048"/>
-            <a:ext cx="11091672" cy="777240"/>
+            <a:ext cx="7955280" cy="777240"/>
           </a:xfrm>
           <a:prstGeom prst="rect">
             <a:avLst/>
@@ -13082,11 +13082,11 @@
         <p:spPr>
           <a:xfrm>
             <a:off x="640080" y="1298448"/>
-            <a:ext cx="10972800" cy="987552"/>
+            <a:ext cx="5074920" cy="1024128"/>
           </a:xfrm>
           <a:prstGeom prst="roundRect">
             <a:avLst>
-              <a:gd name="adj" fmla="val 8333"/>
+              <a:gd name="adj" fmla="val 8036"/>
             </a:avLst>
           </a:prstGeom>
           <a:solidFill>
@@ -13108,8 +13108,8 @@
         </p:nvSpPr>
         <p:spPr>
           <a:xfrm>
-            <a:off x="914400" y="1490472"/>
-            <a:ext cx="603504" cy="603504"/>
+            <a:off x="841248" y="1609344"/>
+            <a:ext cx="402336" cy="402336"/>
           </a:xfrm>
           <a:prstGeom prst="ellipse">
             <a:avLst/>
@@ -13133,8 +13133,8 @@
         </p:nvSpPr>
         <p:spPr>
           <a:xfrm>
-            <a:off x="914400" y="1490472"/>
-            <a:ext cx="603504" cy="603504"/>
+            <a:off x="841248" y="1609344"/>
+            <a:ext cx="402336" cy="402336"/>
           </a:xfrm>
           <a:prstGeom prst="rect">
             <a:avLst/>
@@ -13150,7 +13150,7 @@
               <a:buNone/>
             </a:pPr>
             <a:r>
-              <a:rPr lang="en-US" sz="2100" b="1" dirty="0">
+              <a:rPr lang="en-US" sz="1600" b="1" dirty="0">
                 <a:solidFill>
                   <a:srgbClr val="FFFFFF"/>
                 </a:solidFill>
@@ -13160,7 +13160,7 @@
               </a:rPr>
               <a:t>A</a:t>
             </a:r>
-            <a:endParaRPr lang="en-US" sz="2100" dirty="0"/>
+            <a:endParaRPr lang="en-US" sz="1600" dirty="0"/>
           </a:p>
         </p:txBody>
       </p:sp>
@@ -13172,24 +13172,24 @@
         </p:nvSpPr>
         <p:spPr>
           <a:xfrm>
-            <a:off x="1783080" y="1389888"/>
-            <a:ext cx="3657600" cy="274320"/>
-          </a:xfrm>
-          <a:prstGeom prst="rect">
-            <a:avLst/>
-          </a:prstGeom>
-          <a:noFill/>
-          <a:ln/>
-        </p:spPr>
-        <p:txBody>
-          <a:bodyPr wrap="square" lIns="0" tIns="0" rIns="0" bIns="0" rtlCol="0" anchor="ctr"/>
-          <a:lstStyle/>
-          <a:p>
-            <a:pPr indent="0" marL="0">
-              <a:buNone/>
-            </a:pPr>
-            <a:r>
-              <a:rPr lang="en-US" sz="1100" b="1" spc="150" kern="0" dirty="0">
+            <a:off x="1389888" y="1380744"/>
+            <a:ext cx="4206240" cy="237744"/>
+          </a:xfrm>
+          <a:prstGeom prst="rect">
+            <a:avLst/>
+          </a:prstGeom>
+          <a:noFill/>
+          <a:ln/>
+        </p:spPr>
+        <p:txBody>
+          <a:bodyPr wrap="square" lIns="0" tIns="0" rIns="0" bIns="0" rtlCol="0" anchor="ctr"/>
+          <a:lstStyle/>
+          <a:p>
+            <a:pPr indent="0" marL="0">
+              <a:buNone/>
+            </a:pPr>
+            <a:r>
+              <a:rPr lang="en-US" sz="950" b="1" spc="150" kern="0" dirty="0">
                 <a:solidFill>
                   <a:srgbClr val="2A9D8F"/>
                 </a:solidFill>
@@ -13199,7 +13199,7 @@
               </a:rPr>
               <a:t>FAMILIES</a:t>
             </a:r>
-            <a:endParaRPr lang="en-US" sz="1100" dirty="0"/>
+            <a:endParaRPr lang="en-US" sz="950" dirty="0"/>
           </a:p>
         </p:txBody>
       </p:sp>
@@ -13211,8 +13211,8 @@
         </p:nvSpPr>
         <p:spPr>
           <a:xfrm>
-            <a:off x="1783080" y="1645920"/>
-            <a:ext cx="9509760" cy="603504"/>
+            <a:off x="1389888" y="1618488"/>
+            <a:ext cx="4224528" cy="658368"/>
           </a:xfrm>
           <a:prstGeom prst="rect">
             <a:avLst/>
@@ -13228,7 +13228,7 @@
               <a:buNone/>
             </a:pPr>
             <a:r>
-              <a:rPr lang="en-US" sz="1450" dirty="0">
+              <a:rPr lang="en-US" sz="1200" dirty="0">
                 <a:solidFill>
                   <a:srgbClr val="1B1F24"/>
                 </a:solidFill>
@@ -13238,7 +13238,7 @@
               </a:rPr>
               <a:t>“Write a warm, professional newsletter blurb for families about [any upcoming school event], under 120 words.”</a:t>
             </a:r>
-            <a:endParaRPr lang="en-US" sz="1450" dirty="0"/>
+            <a:endParaRPr lang="en-US" sz="1200" dirty="0"/>
           </a:p>
         </p:txBody>
       </p:sp>
@@ -13250,12 +13250,12 @@
         </p:nvSpPr>
         <p:spPr>
           <a:xfrm>
-            <a:off x="640080" y="2414016"/>
-            <a:ext cx="10972800" cy="987552"/>
+            <a:off x="640080" y="2395728"/>
+            <a:ext cx="5074920" cy="1024128"/>
           </a:xfrm>
           <a:prstGeom prst="roundRect">
             <a:avLst>
-              <a:gd name="adj" fmla="val 8333"/>
+              <a:gd name="adj" fmla="val 8036"/>
             </a:avLst>
           </a:prstGeom>
           <a:solidFill>
@@ -13277,8 +13277,8 @@
         </p:nvSpPr>
         <p:spPr>
           <a:xfrm>
-            <a:off x="914400" y="2606040"/>
-            <a:ext cx="603504" cy="603504"/>
+            <a:off x="841248" y="2706624"/>
+            <a:ext cx="402336" cy="402336"/>
           </a:xfrm>
           <a:prstGeom prst="ellipse">
             <a:avLst/>
@@ -13302,8 +13302,8 @@
         </p:nvSpPr>
         <p:spPr>
           <a:xfrm>
-            <a:off x="914400" y="2606040"/>
-            <a:ext cx="603504" cy="603504"/>
+            <a:off x="841248" y="2706624"/>
+            <a:ext cx="402336" cy="402336"/>
           </a:xfrm>
           <a:prstGeom prst="rect">
             <a:avLst/>
@@ -13319,7 +13319,7 @@
               <a:buNone/>
             </a:pPr>
             <a:r>
-              <a:rPr lang="en-US" sz="2100" b="1" dirty="0">
+              <a:rPr lang="en-US" sz="1600" b="1" dirty="0">
                 <a:solidFill>
                   <a:srgbClr val="FFFFFF"/>
                 </a:solidFill>
@@ -13329,7 +13329,7 @@
               </a:rPr>
               <a:t>B</a:t>
             </a:r>
-            <a:endParaRPr lang="en-US" sz="2100" dirty="0"/>
+            <a:endParaRPr lang="en-US" sz="1600" dirty="0"/>
           </a:p>
         </p:txBody>
       </p:sp>
@@ -13341,24 +13341,24 @@
         </p:nvSpPr>
         <p:spPr>
           <a:xfrm>
-            <a:off x="1783080" y="2505456"/>
-            <a:ext cx="3657600" cy="274320"/>
-          </a:xfrm>
-          <a:prstGeom prst="rect">
-            <a:avLst/>
-          </a:prstGeom>
-          <a:noFill/>
-          <a:ln/>
-        </p:spPr>
-        <p:txBody>
-          <a:bodyPr wrap="square" lIns="0" tIns="0" rIns="0" bIns="0" rtlCol="0" anchor="ctr"/>
-          <a:lstStyle/>
-          <a:p>
-            <a:pPr indent="0" marL="0">
-              <a:buNone/>
-            </a:pPr>
-            <a:r>
-              <a:rPr lang="en-US" sz="1100" b="1" spc="150" kern="0" dirty="0">
+            <a:off x="1389888" y="2478024"/>
+            <a:ext cx="4206240" cy="237744"/>
+          </a:xfrm>
+          <a:prstGeom prst="rect">
+            <a:avLst/>
+          </a:prstGeom>
+          <a:noFill/>
+          <a:ln/>
+        </p:spPr>
+        <p:txBody>
+          <a:bodyPr wrap="square" lIns="0" tIns="0" rIns="0" bIns="0" rtlCol="0" anchor="ctr"/>
+          <a:lstStyle/>
+          <a:p>
+            <a:pPr indent="0" marL="0">
+              <a:buNone/>
+            </a:pPr>
+            <a:r>
+              <a:rPr lang="en-US" sz="950" b="1" spc="150" kern="0" dirty="0">
                 <a:solidFill>
                   <a:srgbClr val="2A9D8F"/>
                 </a:solidFill>
@@ -13368,7 +13368,7 @@
               </a:rPr>
               <a:t>ASSESSMENT</a:t>
             </a:r>
-            <a:endParaRPr lang="en-US" sz="1100" dirty="0"/>
+            <a:endParaRPr lang="en-US" sz="950" dirty="0"/>
           </a:p>
         </p:txBody>
       </p:sp>
@@ -13380,8 +13380,8 @@
         </p:nvSpPr>
         <p:spPr>
           <a:xfrm>
-            <a:off x="1783080" y="2761488"/>
-            <a:ext cx="9509760" cy="603504"/>
+            <a:off x="1389888" y="2715768"/>
+            <a:ext cx="4224528" cy="658368"/>
           </a:xfrm>
           <a:prstGeom prst="rect">
             <a:avLst/>
@@ -13397,7 +13397,7 @@
               <a:buNone/>
             </a:pPr>
             <a:r>
-              <a:rPr lang="en-US" sz="1450" dirty="0">
+              <a:rPr lang="en-US" sz="1200" dirty="0">
                 <a:solidFill>
                   <a:srgbClr val="1B1F24"/>
                 </a:solidFill>
@@ -13407,7 +13407,7 @@
               </a:rPr>
               <a:t>“Create a five-question review quiz on [any topic you teach], mixed difficulty, with an answer key.”</a:t>
             </a:r>
-            <a:endParaRPr lang="en-US" sz="1450" dirty="0"/>
+            <a:endParaRPr lang="en-US" sz="1200" dirty="0"/>
           </a:p>
         </p:txBody>
       </p:sp>
@@ -13419,12 +13419,12 @@
         </p:nvSpPr>
         <p:spPr>
           <a:xfrm>
-            <a:off x="640080" y="3529584"/>
-            <a:ext cx="10972800" cy="987552"/>
+            <a:off x="640080" y="3493008"/>
+            <a:ext cx="5074920" cy="1024128"/>
           </a:xfrm>
           <a:prstGeom prst="roundRect">
             <a:avLst>
-              <a:gd name="adj" fmla="val 8333"/>
+              <a:gd name="adj" fmla="val 8036"/>
             </a:avLst>
           </a:prstGeom>
           <a:solidFill>
@@ -13446,8 +13446,8 @@
         </p:nvSpPr>
         <p:spPr>
           <a:xfrm>
-            <a:off x="914400" y="3721608"/>
-            <a:ext cx="603504" cy="603504"/>
+            <a:off x="841248" y="3803904"/>
+            <a:ext cx="402336" cy="402336"/>
           </a:xfrm>
           <a:prstGeom prst="ellipse">
             <a:avLst/>
@@ -13471,8 +13471,8 @@
         </p:nvSpPr>
         <p:spPr>
           <a:xfrm>
-            <a:off x="914400" y="3721608"/>
-            <a:ext cx="603504" cy="603504"/>
+            <a:off x="841248" y="3803904"/>
+            <a:ext cx="402336" cy="402336"/>
           </a:xfrm>
           <a:prstGeom prst="rect">
             <a:avLst/>
@@ -13488,7 +13488,7 @@
               <a:buNone/>
             </a:pPr>
             <a:r>
-              <a:rPr lang="en-US" sz="2100" b="1" dirty="0">
+              <a:rPr lang="en-US" sz="1600" b="1" dirty="0">
                 <a:solidFill>
                   <a:srgbClr val="FFFFFF"/>
                 </a:solidFill>
@@ -13498,7 +13498,7 @@
               </a:rPr>
               <a:t>C</a:t>
             </a:r>
-            <a:endParaRPr lang="en-US" sz="2100" dirty="0"/>
+            <a:endParaRPr lang="en-US" sz="1600" dirty="0"/>
           </a:p>
         </p:txBody>
       </p:sp>
@@ -13510,24 +13510,24 @@
         </p:nvSpPr>
         <p:spPr>
           <a:xfrm>
-            <a:off x="1783080" y="3621024"/>
-            <a:ext cx="3657600" cy="274320"/>
-          </a:xfrm>
-          <a:prstGeom prst="rect">
-            <a:avLst/>
-          </a:prstGeom>
-          <a:noFill/>
-          <a:ln/>
-        </p:spPr>
-        <p:txBody>
-          <a:bodyPr wrap="square" lIns="0" tIns="0" rIns="0" bIns="0" rtlCol="0" anchor="ctr"/>
-          <a:lstStyle/>
-          <a:p>
-            <a:pPr indent="0" marL="0">
-              <a:buNone/>
-            </a:pPr>
-            <a:r>
-              <a:rPr lang="en-US" sz="1100" b="1" spc="150" kern="0" dirty="0">
+            <a:off x="1389888" y="3575304"/>
+            <a:ext cx="4206240" cy="237744"/>
+          </a:xfrm>
+          <a:prstGeom prst="rect">
+            <a:avLst/>
+          </a:prstGeom>
+          <a:noFill/>
+          <a:ln/>
+        </p:spPr>
+        <p:txBody>
+          <a:bodyPr wrap="square" lIns="0" tIns="0" rIns="0" bIns="0" rtlCol="0" anchor="ctr"/>
+          <a:lstStyle/>
+          <a:p>
+            <a:pPr indent="0" marL="0">
+              <a:buNone/>
+            </a:pPr>
+            <a:r>
+              <a:rPr lang="en-US" sz="950" b="1" spc="150" kern="0" dirty="0">
                 <a:solidFill>
                   <a:srgbClr val="2A9D8F"/>
                 </a:solidFill>
@@ -13537,7 +13537,7 @@
               </a:rPr>
               <a:t>DIFFERENTIATION</a:t>
             </a:r>
-            <a:endParaRPr lang="en-US" sz="1100" dirty="0"/>
+            <a:endParaRPr lang="en-US" sz="950" dirty="0"/>
           </a:p>
         </p:txBody>
       </p:sp>
@@ -13549,8 +13549,8 @@
         </p:nvSpPr>
         <p:spPr>
           <a:xfrm>
-            <a:off x="1783080" y="3877056"/>
-            <a:ext cx="9509760" cy="603504"/>
+            <a:off x="1389888" y="3813048"/>
+            <a:ext cx="4224528" cy="658368"/>
           </a:xfrm>
           <a:prstGeom prst="rect">
             <a:avLst/>
@@ -13566,7 +13566,7 @@
               <a:buNone/>
             </a:pPr>
             <a:r>
-              <a:rPr lang="en-US" sz="1450" dirty="0">
+              <a:rPr lang="en-US" sz="1200" dirty="0">
                 <a:solidFill>
                   <a:srgbClr val="1B1F24"/>
                 </a:solidFill>
@@ -13576,7 +13576,7 @@
               </a:rPr>
               <a:t>“Rewrite this paragraph at three different reading levels.” Then paste any paragraph you already have.</a:t>
             </a:r>
-            <a:endParaRPr lang="en-US" sz="1450" dirty="0"/>
+            <a:endParaRPr lang="en-US" sz="1200" dirty="0"/>
           </a:p>
         </p:txBody>
       </p:sp>
@@ -13588,12 +13588,12 @@
         </p:nvSpPr>
         <p:spPr>
           <a:xfrm>
-            <a:off x="640080" y="4645152"/>
-            <a:ext cx="10972800" cy="987552"/>
+            <a:off x="640080" y="4590288"/>
+            <a:ext cx="5074920" cy="1024128"/>
           </a:xfrm>
           <a:prstGeom prst="roundRect">
             <a:avLst>
-              <a:gd name="adj" fmla="val 8333"/>
+              <a:gd name="adj" fmla="val 8036"/>
             </a:avLst>
           </a:prstGeom>
           <a:solidFill>
@@ -13615,8 +13615,8 @@
         </p:nvSpPr>
         <p:spPr>
           <a:xfrm>
-            <a:off x="914400" y="4837176"/>
-            <a:ext cx="603504" cy="603504"/>
+            <a:off x="841248" y="4901184"/>
+            <a:ext cx="402336" cy="402336"/>
           </a:xfrm>
           <a:prstGeom prst="ellipse">
             <a:avLst/>
@@ -13640,8 +13640,8 @@
         </p:nvSpPr>
         <p:spPr>
           <a:xfrm>
-            <a:off x="914400" y="4837176"/>
-            <a:ext cx="603504" cy="603504"/>
+            <a:off x="841248" y="4901184"/>
+            <a:ext cx="402336" cy="402336"/>
           </a:xfrm>
           <a:prstGeom prst="rect">
             <a:avLst/>
@@ -13657,7 +13657,7 @@
               <a:buNone/>
             </a:pPr>
             <a:r>
-              <a:rPr lang="en-US" sz="2100" b="1" dirty="0">
+              <a:rPr lang="en-US" sz="1600" b="1" dirty="0">
                 <a:solidFill>
                   <a:srgbClr val="FFFFFF"/>
                 </a:solidFill>
@@ -13667,7 +13667,7 @@
               </a:rPr>
               <a:t>D</a:t>
             </a:r>
-            <a:endParaRPr lang="en-US" sz="2100" dirty="0"/>
+            <a:endParaRPr lang="en-US" sz="1600" dirty="0"/>
           </a:p>
         </p:txBody>
       </p:sp>
@@ -13679,24 +13679,24 @@
         </p:nvSpPr>
         <p:spPr>
           <a:xfrm>
-            <a:off x="1783080" y="4736592"/>
-            <a:ext cx="3657600" cy="274320"/>
-          </a:xfrm>
-          <a:prstGeom prst="rect">
-            <a:avLst/>
-          </a:prstGeom>
-          <a:noFill/>
-          <a:ln/>
-        </p:spPr>
-        <p:txBody>
-          <a:bodyPr wrap="square" lIns="0" tIns="0" rIns="0" bIns="0" rtlCol="0" anchor="ctr"/>
-          <a:lstStyle/>
-          <a:p>
-            <a:pPr indent="0" marL="0">
-              <a:buNone/>
-            </a:pPr>
-            <a:r>
-              <a:rPr lang="en-US" sz="1100" b="1" spc="150" kern="0" dirty="0">
+            <a:off x="1389888" y="4672584"/>
+            <a:ext cx="4206240" cy="237744"/>
+          </a:xfrm>
+          <a:prstGeom prst="rect">
+            <a:avLst/>
+          </a:prstGeom>
+          <a:noFill/>
+          <a:ln/>
+        </p:spPr>
+        <p:txBody>
+          <a:bodyPr wrap="square" lIns="0" tIns="0" rIns="0" bIns="0" rtlCol="0" anchor="ctr"/>
+          <a:lstStyle/>
+          <a:p>
+            <a:pPr indent="0" marL="0">
+              <a:buNone/>
+            </a:pPr>
+            <a:r>
+              <a:rPr lang="en-US" sz="950" b="1" spc="150" kern="0" dirty="0">
                 <a:solidFill>
                   <a:srgbClr val="2A9D8F"/>
                 </a:solidFill>
@@ -13706,20 +13706,266 @@
               </a:rPr>
               <a:t>CTE &amp; ELECTIVES</a:t>
             </a:r>
+            <a:endParaRPr lang="en-US" sz="950" dirty="0"/>
+          </a:p>
+        </p:txBody>
+      </p:sp>
+      <p:sp>
+        <p:nvSpPr>
+          <p:cNvPr id="33" name="Text 30"/>
+          <p:cNvSpPr/>
+          <p:nvPr/>
+        </p:nvSpPr>
+        <p:spPr>
+          <a:xfrm>
+            <a:off x="1389888" y="4910328"/>
+            <a:ext cx="4224528" cy="658368"/>
+          </a:xfrm>
+          <a:prstGeom prst="rect">
+            <a:avLst/>
+          </a:prstGeom>
+          <a:noFill/>
+          <a:ln/>
+        </p:spPr>
+        <p:txBody>
+          <a:bodyPr wrap="square" lIns="0" tIns="0" rIns="0" bIns="0" rtlCol="0" anchor="t"/>
+          <a:lstStyle/>
+          <a:p>
+            <a:pPr indent="0" marL="0">
+              <a:buNone/>
+            </a:pPr>
+            <a:r>
+              <a:rPr lang="en-US" sz="1200" dirty="0">
+                <a:solidFill>
+                  <a:srgbClr val="1B1F24"/>
+                </a:solidFill>
+                <a:latin typeface="Inter" pitchFamily="34" charset="0"/>
+                <a:ea typeface="Inter" pitchFamily="34" charset="-122"/>
+                <a:cs typeface="Inter" pitchFamily="34" charset="-120"/>
+              </a:rPr>
+              <a:t>“Create a five-question tool safety check for the miter saw station, mixed question formats, with an answer key.” Swap in any station, lab, kitchen, or instrument.</a:t>
+            </a:r>
+            <a:endParaRPr lang="en-US" sz="1200" dirty="0"/>
+          </a:p>
+        </p:txBody>
+      </p:sp>
+      <p:sp>
+        <p:nvSpPr>
+          <p:cNvPr id="34" name="Shape 31"/>
+          <p:cNvSpPr/>
+          <p:nvPr/>
+        </p:nvSpPr>
+        <p:spPr>
+          <a:xfrm>
+            <a:off x="5897880" y="1298448"/>
+            <a:ext cx="5715000" cy="4315968"/>
+          </a:xfrm>
+          <a:prstGeom prst="roundRect">
+            <a:avLst>
+              <a:gd name="adj" fmla="val 2119"/>
+            </a:avLst>
+          </a:prstGeom>
+          <a:solidFill>
+            <a:srgbClr val="FFFFFF"/>
+          </a:solidFill>
+          <a:ln w="19050">
+            <a:solidFill>
+              <a:srgbClr val="DCE3EA"/>
+            </a:solidFill>
+            <a:prstDash val="solid"/>
+          </a:ln>
+        </p:spPr>
+      </p:sp>
+      <p:sp>
+        <p:nvSpPr>
+          <p:cNvPr id="35" name="Shape 32"/>
+          <p:cNvSpPr/>
+          <p:nvPr/>
+        </p:nvSpPr>
+        <p:spPr>
+          <a:xfrm>
+            <a:off x="5897880" y="1298448"/>
+            <a:ext cx="5715000" cy="384048"/>
+          </a:xfrm>
+          <a:prstGeom prst="roundRect">
+            <a:avLst>
+              <a:gd name="adj" fmla="val 23810"/>
+            </a:avLst>
+          </a:prstGeom>
+          <a:solidFill>
+            <a:srgbClr val="13293D"/>
+          </a:solidFill>
+          <a:ln w="12700">
+            <a:solidFill>
+              <a:srgbClr val="13293D"/>
+            </a:solidFill>
+            <a:prstDash val="solid"/>
+          </a:ln>
+        </p:spPr>
+      </p:sp>
+      <p:sp>
+        <p:nvSpPr>
+          <p:cNvPr id="36" name="Shape 33"/>
+          <p:cNvSpPr/>
+          <p:nvPr/>
+        </p:nvSpPr>
+        <p:spPr>
+          <a:xfrm>
+            <a:off x="6099048" y="1417320"/>
+            <a:ext cx="146304" cy="146304"/>
+          </a:xfrm>
+          <a:prstGeom prst="ellipse">
+            <a:avLst/>
+          </a:prstGeom>
+          <a:solidFill>
+            <a:srgbClr val="E8837A"/>
+          </a:solidFill>
+          <a:ln w="12700">
+            <a:solidFill>
+              <a:srgbClr val="E8837A"/>
+            </a:solidFill>
+            <a:prstDash val="solid"/>
+          </a:ln>
+        </p:spPr>
+      </p:sp>
+      <p:sp>
+        <p:nvSpPr>
+          <p:cNvPr id="37" name="Shape 34"/>
+          <p:cNvSpPr/>
+          <p:nvPr/>
+        </p:nvSpPr>
+        <p:spPr>
+          <a:xfrm>
+            <a:off x="6345936" y="1417320"/>
+            <a:ext cx="146304" cy="146304"/>
+          </a:xfrm>
+          <a:prstGeom prst="ellipse">
+            <a:avLst/>
+          </a:prstGeom>
+          <a:solidFill>
+            <a:srgbClr val="F4A825"/>
+          </a:solidFill>
+          <a:ln w="12700">
+            <a:solidFill>
+              <a:srgbClr val="F4A825"/>
+            </a:solidFill>
+            <a:prstDash val="solid"/>
+          </a:ln>
+        </p:spPr>
+      </p:sp>
+      <p:sp>
+        <p:nvSpPr>
+          <p:cNvPr id="38" name="Shape 35"/>
+          <p:cNvSpPr/>
+          <p:nvPr/>
+        </p:nvSpPr>
+        <p:spPr>
+          <a:xfrm>
+            <a:off x="6592824" y="1417320"/>
+            <a:ext cx="146304" cy="146304"/>
+          </a:xfrm>
+          <a:prstGeom prst="ellipse">
+            <a:avLst/>
+          </a:prstGeom>
+          <a:solidFill>
+            <a:srgbClr val="2E7D5B"/>
+          </a:solidFill>
+          <a:ln w="12700">
+            <a:solidFill>
+              <a:srgbClr val="2E7D5B"/>
+            </a:solidFill>
+            <a:prstDash val="solid"/>
+          </a:ln>
+        </p:spPr>
+      </p:sp>
+      <p:sp>
+        <p:nvSpPr>
+          <p:cNvPr id="39" name="Text 36"/>
+          <p:cNvSpPr/>
+          <p:nvPr/>
+        </p:nvSpPr>
+        <p:spPr>
+          <a:xfrm>
+            <a:off x="6949440" y="1298448"/>
+            <a:ext cx="4526280" cy="384048"/>
+          </a:xfrm>
+          <a:prstGeom prst="rect">
+            <a:avLst/>
+          </a:prstGeom>
+          <a:noFill/>
+          <a:ln/>
+        </p:spPr>
+        <p:txBody>
+          <a:bodyPr wrap="square" lIns="0" tIns="0" rIns="0" bIns="0" rtlCol="0" anchor="ctr"/>
+          <a:lstStyle/>
+          <a:p>
+            <a:pPr indent="0" marL="0">
+              <a:buNone/>
+            </a:pPr>
+            <a:r>
+              <a:rPr lang="en-US" sz="1100" dirty="0">
+                <a:solidFill>
+                  <a:srgbClr val="9FB2C2"/>
+                </a:solidFill>
+                <a:latin typeface="Inter" pitchFamily="34" charset="0"/>
+                <a:ea typeface="Inter" pitchFamily="34" charset="-122"/>
+                <a:cs typeface="Inter" pitchFamily="34" charset="-120"/>
+              </a:rPr>
+              <a:t>Ms. Rivera’s newsletter blurb · task 1 · option A, typed</a:t>
+            </a:r>
             <a:endParaRPr lang="en-US" sz="1100" dirty="0"/>
           </a:p>
         </p:txBody>
       </p:sp>
       <p:sp>
         <p:nvSpPr>
-          <p:cNvPr id="33" name="Text 30"/>
-          <p:cNvSpPr/>
-          <p:nvPr/>
-        </p:nvSpPr>
-        <p:spPr>
-          <a:xfrm>
-            <a:off x="1783080" y="4992624"/>
-            <a:ext cx="9509760" cy="603504"/>
+          <p:cNvPr id="40" name="Text 37"/>
+          <p:cNvSpPr/>
+          <p:nvPr/>
+        </p:nvSpPr>
+        <p:spPr>
+          <a:xfrm>
+            <a:off x="6172200" y="1810512"/>
+            <a:ext cx="5166360" cy="256032"/>
+          </a:xfrm>
+          <a:prstGeom prst="rect">
+            <a:avLst/>
+          </a:prstGeom>
+          <a:noFill/>
+          <a:ln/>
+        </p:spPr>
+        <p:txBody>
+          <a:bodyPr wrap="square" lIns="0" tIns="0" rIns="0" bIns="0" rtlCol="0" anchor="ctr"/>
+          <a:lstStyle/>
+          <a:p>
+            <a:pPr indent="0" marL="0">
+              <a:buNone/>
+            </a:pPr>
+            <a:r>
+              <a:rPr lang="en-US" sz="1000" b="1" spc="150" kern="0" dirty="0">
+                <a:solidFill>
+                  <a:srgbClr val="2A9D8F"/>
+                </a:solidFill>
+                <a:latin typeface="Inter" pitchFamily="34" charset="0"/>
+                <a:ea typeface="Inter" pitchFamily="34" charset="-122"/>
+                <a:cs typeface="Inter" pitchFamily="34" charset="-120"/>
+              </a:rPr>
+              <a:t>SHE TYPES · OPTION A, FILLED IN</a:t>
+            </a:r>
+            <a:endParaRPr lang="en-US" sz="1000" dirty="0"/>
+          </a:p>
+        </p:txBody>
+      </p:sp>
+      <p:sp>
+        <p:nvSpPr>
+          <p:cNvPr id="41" name="Text 38"/>
+          <p:cNvSpPr/>
+          <p:nvPr/>
+        </p:nvSpPr>
+        <p:spPr>
+          <a:xfrm>
+            <a:off x="6172200" y="2084832"/>
+            <a:ext cx="5166360" cy="777240"/>
           </a:xfrm>
           <a:prstGeom prst="rect">
             <a:avLst/>
@@ -13732,10 +13978,94 @@
           <a:lstStyle/>
           <a:p>
             <a:pPr indent="0" marL="0">
-              <a:buNone/>
-            </a:pPr>
-            <a:r>
-              <a:rPr lang="en-US" sz="1450" dirty="0">
+              <a:lnSpc>
+                <a:spcPct val="112000"/>
+              </a:lnSpc>
+              <a:buNone/>
+            </a:pPr>
+            <a:r>
+              <a:rPr lang="en-US" sz="1450" i="1" dirty="0">
+                <a:solidFill>
+                  <a:srgbClr val="13293D"/>
+                </a:solidFill>
+                <a:latin typeface="Inter" pitchFamily="34" charset="0"/>
+                <a:ea typeface="Inter" pitchFamily="34" charset="-122"/>
+                <a:cs typeface="Inter" pitchFamily="34" charset="-120"/>
+              </a:rPr>
+              <a:t>“Write a warm, professional newsletter blurb for families about our fall book fair, under 120 words.”</a:t>
+            </a:r>
+            <a:endParaRPr lang="en-US" sz="1450" dirty="0"/>
+          </a:p>
+        </p:txBody>
+      </p:sp>
+      <p:sp>
+        <p:nvSpPr>
+          <p:cNvPr id="42" name="Text 39"/>
+          <p:cNvSpPr/>
+          <p:nvPr/>
+        </p:nvSpPr>
+        <p:spPr>
+          <a:xfrm>
+            <a:off x="6172200" y="3017520"/>
+            <a:ext cx="5166360" cy="256032"/>
+          </a:xfrm>
+          <a:prstGeom prst="rect">
+            <a:avLst/>
+          </a:prstGeom>
+          <a:noFill/>
+          <a:ln/>
+        </p:spPr>
+        <p:txBody>
+          <a:bodyPr wrap="square" lIns="0" tIns="0" rIns="0" bIns="0" rtlCol="0" anchor="ctr"/>
+          <a:lstStyle/>
+          <a:p>
+            <a:pPr indent="0" marL="0">
+              <a:buNone/>
+            </a:pPr>
+            <a:r>
+              <a:rPr lang="en-US" sz="1000" b="1" spc="150" kern="0" dirty="0">
+                <a:solidFill>
+                  <a:srgbClr val="5B6B7A"/>
+                </a:solidFill>
+                <a:latin typeface="Inter" pitchFamily="34" charset="0"/>
+                <a:ea typeface="Inter" pitchFamily="34" charset="-122"/>
+                <a:cs typeface="Inter" pitchFamily="34" charset="-120"/>
+              </a:rPr>
+              <a:t>THE FIRST DRAFT COMES BACK</a:t>
+            </a:r>
+            <a:endParaRPr lang="en-US" sz="1000" dirty="0"/>
+          </a:p>
+        </p:txBody>
+      </p:sp>
+      <p:sp>
+        <p:nvSpPr>
+          <p:cNvPr id="43" name="Text 40"/>
+          <p:cNvSpPr/>
+          <p:nvPr/>
+        </p:nvSpPr>
+        <p:spPr>
+          <a:xfrm>
+            <a:off x="6172200" y="3291840"/>
+            <a:ext cx="5166360" cy="1417320"/>
+          </a:xfrm>
+          <a:prstGeom prst="rect">
+            <a:avLst/>
+          </a:prstGeom>
+          <a:noFill/>
+          <a:ln/>
+        </p:spPr>
+        <p:txBody>
+          <a:bodyPr wrap="square" lIns="0" tIns="0" rIns="0" bIns="0" rtlCol="0" anchor="t"/>
+          <a:lstStyle/>
+          <a:p>
+            <a:pPr indent="0" marL="0">
+              <a:lnSpc>
+                <a:spcPct val="112000"/>
+              </a:lnSpc>
+              <a:buNone/>
+            </a:pPr>
+            <a:r>
+              <a:rPr lang="en-US" sz="1400" dirty="0">
                 <a:solidFill>
                   <a:srgbClr val="1B1F24"/>
                 </a:solidFill>
@@ -13743,15 +14073,54 @@
                 <a:ea typeface="Inter" pitchFamily="34" charset="-122"/>
                 <a:cs typeface="Inter" pitchFamily="34" charset="-120"/>
               </a:rPr>
-              <a:t>“Create a five-question tool safety check for the miter saw station, mixed question formats, with an answer key.” Swap in any station, lab, kitchen, or instrument.</a:t>
-            </a:r>
-            <a:endParaRPr lang="en-US" sz="1450" dirty="0"/>
-          </a:p>
-        </p:txBody>
-      </p:sp>
-      <p:sp>
-        <p:nvSpPr>
-          <p:cNvPr id="34" name="Text 31"/>
+              <a:t>“Dear families, we are thrilled to announce our upcoming Book Fair! This wonderful event promises something for every reader. The fair runs all week, 8:00 to 3:00. We sincerely appreciate your continued support!”</a:t>
+            </a:r>
+            <a:endParaRPr lang="en-US" sz="1400" dirty="0"/>
+          </a:p>
+        </p:txBody>
+      </p:sp>
+      <p:sp>
+        <p:nvSpPr>
+          <p:cNvPr id="44" name="Text 41"/>
+          <p:cNvSpPr/>
+          <p:nvPr/>
+        </p:nvSpPr>
+        <p:spPr>
+          <a:xfrm>
+            <a:off x="6172200" y="4937760"/>
+            <a:ext cx="5166360" cy="548640"/>
+          </a:xfrm>
+          <a:prstGeom prst="rect">
+            <a:avLst/>
+          </a:prstGeom>
+          <a:noFill/>
+          <a:ln/>
+        </p:spPr>
+        <p:txBody>
+          <a:bodyPr wrap="square" lIns="0" tIns="0" rIns="0" bIns="0" rtlCol="0" anchor="t"/>
+          <a:lstStyle/>
+          <a:p>
+            <a:pPr indent="0" marL="0">
+              <a:buNone/>
+            </a:pPr>
+            <a:r>
+              <a:rPr lang="en-US" sz="1150" i="1" dirty="0">
+                <a:solidFill>
+                  <a:srgbClr val="5B6B7A"/>
+                </a:solidFill>
+                <a:latin typeface="Inter" pitchFamily="34" charset="0"/>
+                <a:ea typeface="Inter" pitchFamily="34" charset="-122"/>
+                <a:cs typeface="Inter" pitchFamily="34" charset="-120"/>
+              </a:rPr>
+              <a:t>Beige, and it sounds like nobody. Keep yours on screen; task 2 works on this exact draft.</a:t>
+            </a:r>
+            <a:endParaRPr lang="en-US" sz="1150" dirty="0"/>
+          </a:p>
+        </p:txBody>
+      </p:sp>
+      <p:sp>
+        <p:nvSpPr>
+          <p:cNvPr id="45" name="Text 42"/>
           <p:cNvSpPr/>
           <p:nvPr/>
         </p:nvSpPr>
@@ -13938,7 +14307,214 @@
       </p:sp>
       <p:sp>
         <p:nvSpPr>
-          <p:cNvPr id="5" name="Text 2"/>
+          <p:cNvPr id="5" name="Shape 2"/>
+          <p:cNvSpPr/>
+          <p:nvPr/>
+        </p:nvSpPr>
+        <p:spPr>
+          <a:xfrm>
+            <a:off x="8732520" y="109728"/>
+            <a:ext cx="2926080" cy="896112"/>
+          </a:xfrm>
+          <a:prstGeom prst="roundRect">
+            <a:avLst>
+              <a:gd name="adj" fmla="val 7143"/>
+            </a:avLst>
+          </a:prstGeom>
+          <a:solidFill>
+            <a:srgbClr val="F7F5F0"/>
+          </a:solidFill>
+          <a:ln w="12700">
+            <a:solidFill>
+              <a:srgbClr val="DCE3EA"/>
+            </a:solidFill>
+            <a:prstDash val="solid"/>
+          </a:ln>
+        </p:spPr>
+      </p:sp>
+      <p:sp>
+        <p:nvSpPr>
+          <p:cNvPr id="6" name="Shape 3"/>
+          <p:cNvSpPr/>
+          <p:nvPr/>
+        </p:nvSpPr>
+        <p:spPr>
+          <a:xfrm>
+            <a:off x="8732520" y="109728"/>
+            <a:ext cx="2926080" cy="237744"/>
+          </a:xfrm>
+          <a:prstGeom prst="roundRect">
+            <a:avLst>
+              <a:gd name="adj" fmla="val 26923"/>
+            </a:avLst>
+          </a:prstGeom>
+          <a:solidFill>
+            <a:srgbClr val="0D1E2E"/>
+          </a:solidFill>
+          <a:ln w="12700">
+            <a:solidFill>
+              <a:srgbClr val="0D1E2E"/>
+            </a:solidFill>
+            <a:prstDash val="solid"/>
+          </a:ln>
+        </p:spPr>
+      </p:sp>
+      <p:sp>
+        <p:nvSpPr>
+          <p:cNvPr id="7" name="Shape 4"/>
+          <p:cNvSpPr/>
+          <p:nvPr/>
+        </p:nvSpPr>
+        <p:spPr>
+          <a:xfrm>
+            <a:off x="8823960" y="182880"/>
+            <a:ext cx="91440" cy="91440"/>
+          </a:xfrm>
+          <a:prstGeom prst="ellipse">
+            <a:avLst/>
+          </a:prstGeom>
+          <a:solidFill>
+            <a:srgbClr val="E8837A"/>
+          </a:solidFill>
+          <a:ln w="12700">
+            <a:solidFill>
+              <a:srgbClr val="E8837A"/>
+            </a:solidFill>
+            <a:prstDash val="solid"/>
+          </a:ln>
+        </p:spPr>
+      </p:sp>
+      <p:sp>
+        <p:nvSpPr>
+          <p:cNvPr id="8" name="Shape 5"/>
+          <p:cNvSpPr/>
+          <p:nvPr/>
+        </p:nvSpPr>
+        <p:spPr>
+          <a:xfrm>
+            <a:off x="8970264" y="182880"/>
+            <a:ext cx="91440" cy="91440"/>
+          </a:xfrm>
+          <a:prstGeom prst="ellipse">
+            <a:avLst/>
+          </a:prstGeom>
+          <a:solidFill>
+            <a:srgbClr val="F4A825"/>
+          </a:solidFill>
+          <a:ln w="12700">
+            <a:solidFill>
+              <a:srgbClr val="F4A825"/>
+            </a:solidFill>
+            <a:prstDash val="solid"/>
+          </a:ln>
+        </p:spPr>
+      </p:sp>
+      <p:sp>
+        <p:nvSpPr>
+          <p:cNvPr id="9" name="Shape 6"/>
+          <p:cNvSpPr/>
+          <p:nvPr/>
+        </p:nvSpPr>
+        <p:spPr>
+          <a:xfrm>
+            <a:off x="9116568" y="182880"/>
+            <a:ext cx="91440" cy="91440"/>
+          </a:xfrm>
+          <a:prstGeom prst="ellipse">
+            <a:avLst/>
+          </a:prstGeom>
+          <a:solidFill>
+            <a:srgbClr val="2E7D5B"/>
+          </a:solidFill>
+          <a:ln w="12700">
+            <a:solidFill>
+              <a:srgbClr val="2E7D5B"/>
+            </a:solidFill>
+            <a:prstDash val="solid"/>
+          </a:ln>
+        </p:spPr>
+      </p:sp>
+      <p:sp>
+        <p:nvSpPr>
+          <p:cNvPr id="10" name="Text 7"/>
+          <p:cNvSpPr/>
+          <p:nvPr/>
+        </p:nvSpPr>
+        <p:spPr>
+          <a:xfrm>
+            <a:off x="9299448" y="109728"/>
+            <a:ext cx="2286000" cy="237744"/>
+          </a:xfrm>
+          <a:prstGeom prst="rect">
+            <a:avLst/>
+          </a:prstGeom>
+          <a:noFill/>
+          <a:ln/>
+        </p:spPr>
+        <p:txBody>
+          <a:bodyPr wrap="square" lIns="0" tIns="0" rIns="0" bIns="0" rtlCol="0" anchor="ctr"/>
+          <a:lstStyle/>
+          <a:p>
+            <a:pPr indent="0" marL="0">
+              <a:buNone/>
+            </a:pPr>
+            <a:r>
+              <a:rPr lang="en-US" sz="800" b="1" spc="100" kern="0" dirty="0">
+                <a:solidFill>
+                  <a:srgbClr val="9FB2C2"/>
+                </a:solidFill>
+                <a:latin typeface="Inter" pitchFamily="34" charset="0"/>
+                <a:ea typeface="Inter" pitchFamily="34" charset="-122"/>
+                <a:cs typeface="Inter" pitchFamily="34" charset="-120"/>
+              </a:rPr>
+              <a:t>MS. RIVERA'S SCREEN · SO FAR</a:t>
+            </a:r>
+            <a:endParaRPr lang="en-US" sz="800" dirty="0"/>
+          </a:p>
+        </p:txBody>
+      </p:sp>
+      <p:sp>
+        <p:nvSpPr>
+          <p:cNvPr id="11" name="Text 8"/>
+          <p:cNvSpPr/>
+          <p:nvPr/>
+        </p:nvSpPr>
+        <p:spPr>
+          <a:xfrm>
+            <a:off x="8860536" y="365760"/>
+            <a:ext cx="2670048" cy="566928"/>
+          </a:xfrm>
+          <a:prstGeom prst="rect">
+            <a:avLst/>
+          </a:prstGeom>
+          <a:noFill/>
+          <a:ln/>
+        </p:spPr>
+        <p:txBody>
+          <a:bodyPr wrap="square" lIns="0" tIns="0" rIns="0" bIns="0" rtlCol="0" anchor="ctr"/>
+          <a:lstStyle/>
+          <a:p>
+            <a:pPr indent="0" marL="0">
+              <a:buNone/>
+            </a:pPr>
+            <a:r>
+              <a:rPr lang="en-US" sz="1000" dirty="0">
+                <a:solidFill>
+                  <a:srgbClr val="1B1F24"/>
+                </a:solidFill>
+                <a:latin typeface="Inter" pitchFamily="34" charset="0"/>
+                <a:ea typeface="Inter" pitchFamily="34" charset="-122"/>
+                <a:cs typeface="Inter" pitchFamily="34" charset="-120"/>
+              </a:rPr>
+              <a:t>Her newsletter blurb, v3: two pushbacks later, hers. One invented detail caught.</a:t>
+            </a:r>
+            <a:endParaRPr lang="en-US" sz="1000" dirty="0"/>
+          </a:p>
+        </p:txBody>
+      </p:sp>
+      <p:sp>
+        <p:nvSpPr>
+          <p:cNvPr id="12" name="Text 9"/>
           <p:cNvSpPr/>
           <p:nvPr/>
         </p:nvSpPr>
@@ -13977,14 +14553,14 @@
       </p:sp>
       <p:sp>
         <p:nvSpPr>
-          <p:cNvPr id="6" name="Text 3"/>
+          <p:cNvPr id="13" name="Text 10"/>
           <p:cNvSpPr/>
           <p:nvPr/>
         </p:nvSpPr>
         <p:spPr>
           <a:xfrm>
             <a:off x="548640" y="384048"/>
-            <a:ext cx="11091672" cy="777240"/>
+            <a:ext cx="7955280" cy="777240"/>
           </a:xfrm>
           <a:prstGeom prst="rect">
             <a:avLst/>
@@ -14016,30 +14592,30 @@
       </p:sp>
       <p:sp>
         <p:nvSpPr>
-          <p:cNvPr id="7" name="Text 4"/>
-          <p:cNvSpPr/>
-          <p:nvPr/>
-        </p:nvSpPr>
-        <p:spPr>
-          <a:xfrm>
-            <a:off x="640080" y="1371600"/>
-            <a:ext cx="10972800" cy="502920"/>
-          </a:xfrm>
-          <a:prstGeom prst="rect">
-            <a:avLst/>
-          </a:prstGeom>
-          <a:noFill/>
-          <a:ln/>
-        </p:spPr>
-        <p:txBody>
-          <a:bodyPr wrap="square" lIns="0" tIns="0" rIns="0" bIns="0" rtlCol="0" anchor="ctr"/>
-          <a:lstStyle/>
-          <a:p>
-            <a:pPr indent="0" marL="0">
-              <a:buNone/>
-            </a:pPr>
-            <a:r>
-              <a:rPr lang="en-US" sz="2000" dirty="0">
+          <p:cNvPr id="14" name="Text 11"/>
+          <p:cNvSpPr/>
+          <p:nvPr/>
+        </p:nvSpPr>
+        <p:spPr>
+          <a:xfrm>
+            <a:off x="640080" y="1335024"/>
+            <a:ext cx="5074920" cy="640080"/>
+          </a:xfrm>
+          <a:prstGeom prst="rect">
+            <a:avLst/>
+          </a:prstGeom>
+          <a:noFill/>
+          <a:ln/>
+        </p:spPr>
+        <p:txBody>
+          <a:bodyPr wrap="square" lIns="0" tIns="0" rIns="0" bIns="0" rtlCol="0" anchor="t"/>
+          <a:lstStyle/>
+          <a:p>
+            <a:pPr indent="0" marL="0">
+              <a:buNone/>
+            </a:pPr>
+            <a:r>
+              <a:rPr lang="en-US" sz="1550" dirty="0">
                 <a:solidFill>
                   <a:srgbClr val="1B1F24"/>
                 </a:solidFill>
@@ -14047,26 +14623,26 @@
                 <a:ea typeface="Inter" pitchFamily="34" charset="-122"/>
                 <a:cs typeface="Inter" pitchFamily="34" charset="-120"/>
               </a:rPr>
-              <a:t>Don’t accept the first draft. Tell it what’s wrong, like you would an intern. Ms. Rivera’s replies, one at a time:</a:t>
-            </a:r>
-            <a:endParaRPr lang="en-US" sz="2000" dirty="0"/>
-          </a:p>
-        </p:txBody>
-      </p:sp>
-      <p:sp>
-        <p:nvSpPr>
-          <p:cNvPr id="8" name="Shape 5"/>
-          <p:cNvSpPr/>
-          <p:nvPr/>
-        </p:nvSpPr>
-        <p:spPr>
-          <a:xfrm>
-            <a:off x="3291840" y="2103120"/>
-            <a:ext cx="7863840" cy="713232"/>
+              <a:t>Don’t accept the first draft. Tell it what’s wrong, like you would an intern:</a:t>
+            </a:r>
+            <a:endParaRPr lang="en-US" sz="1550" dirty="0"/>
+          </a:p>
+        </p:txBody>
+      </p:sp>
+      <p:sp>
+        <p:nvSpPr>
+          <p:cNvPr id="15" name="Shape 12"/>
+          <p:cNvSpPr/>
+          <p:nvPr/>
+        </p:nvSpPr>
+        <p:spPr>
+          <a:xfrm>
+            <a:off x="640080" y="2011680"/>
+            <a:ext cx="5074920" cy="768096"/>
           </a:xfrm>
           <a:prstGeom prst="roundRect">
             <a:avLst>
-              <a:gd name="adj" fmla="val 15385"/>
+              <a:gd name="adj" fmla="val 14286"/>
             </a:avLst>
           </a:prstGeom>
           <a:solidFill>
@@ -14082,30 +14658,30 @@
       </p:sp>
       <p:sp>
         <p:nvSpPr>
-          <p:cNvPr id="9" name="Text 6"/>
-          <p:cNvSpPr/>
-          <p:nvPr/>
-        </p:nvSpPr>
-        <p:spPr>
-          <a:xfrm>
-            <a:off x="3611880" y="2148840"/>
-            <a:ext cx="7315200" cy="621792"/>
-          </a:xfrm>
-          <a:prstGeom prst="rect">
-            <a:avLst/>
-          </a:prstGeom>
-          <a:noFill/>
-          <a:ln/>
-        </p:spPr>
-        <p:txBody>
-          <a:bodyPr wrap="square" lIns="0" tIns="0" rIns="0" bIns="0" rtlCol="0" anchor="ctr"/>
-          <a:lstStyle/>
-          <a:p>
-            <a:pPr indent="0" marL="0">
-              <a:buNone/>
-            </a:pPr>
-            <a:r>
-              <a:rPr lang="en-US" sz="1900" b="1" dirty="0">
+          <p:cNvPr id="16" name="Text 13"/>
+          <p:cNvSpPr/>
+          <p:nvPr/>
+        </p:nvSpPr>
+        <p:spPr>
+          <a:xfrm>
+            <a:off x="896112" y="2057400"/>
+            <a:ext cx="4572000" cy="676656"/>
+          </a:xfrm>
+          <a:prstGeom prst="rect">
+            <a:avLst/>
+          </a:prstGeom>
+          <a:noFill/>
+          <a:ln/>
+        </p:spPr>
+        <p:txBody>
+          <a:bodyPr wrap="square" lIns="0" tIns="0" rIns="0" bIns="0" rtlCol="0" anchor="ctr"/>
+          <a:lstStyle/>
+          <a:p>
+            <a:pPr indent="0" marL="0">
+              <a:buNone/>
+            </a:pPr>
+            <a:r>
+              <a:rPr lang="en-US" sz="1500" b="1" dirty="0">
                 <a:solidFill>
                   <a:srgbClr val="13293D"/>
                 </a:solidFill>
@@ -14115,63 +14691,24 @@
               </a:rPr>
               <a:t>“Warmer.”</a:t>
             </a:r>
-            <a:endParaRPr lang="en-US" sz="1900" dirty="0"/>
-          </a:p>
-        </p:txBody>
-      </p:sp>
-      <p:sp>
-        <p:nvSpPr>
-          <p:cNvPr id="10" name="Text 7"/>
-          <p:cNvSpPr/>
-          <p:nvPr/>
-        </p:nvSpPr>
-        <p:spPr>
-          <a:xfrm>
-            <a:off x="1965960" y="2148840"/>
-            <a:ext cx="1234440" cy="621792"/>
-          </a:xfrm>
-          <a:prstGeom prst="rect">
-            <a:avLst/>
-          </a:prstGeom>
-          <a:noFill/>
-          <a:ln/>
-        </p:spPr>
-        <p:txBody>
-          <a:bodyPr wrap="square" lIns="0" tIns="0" rIns="0" bIns="0" rtlCol="0" anchor="ctr"/>
-          <a:lstStyle/>
-          <a:p>
-            <a:pPr algn="r" indent="0" marL="0">
-              <a:buNone/>
-            </a:pPr>
-            <a:r>
-              <a:rPr lang="en-US" sz="1200" i="1" dirty="0">
-                <a:solidFill>
-                  <a:srgbClr val="5B6B7A"/>
-                </a:solidFill>
-                <a:latin typeface="Inter" pitchFamily="34" charset="0"/>
-                <a:ea typeface="Inter" pitchFamily="34" charset="-122"/>
-                <a:cs typeface="Inter" pitchFamily="34" charset="-120"/>
-              </a:rPr>
-              <a:t>she types →</a:t>
-            </a:r>
-            <a:endParaRPr lang="en-US" sz="1200" dirty="0"/>
-          </a:p>
-        </p:txBody>
-      </p:sp>
-      <p:sp>
-        <p:nvSpPr>
-          <p:cNvPr id="11" name="Shape 8"/>
-          <p:cNvSpPr/>
-          <p:nvPr/>
-        </p:nvSpPr>
-        <p:spPr>
-          <a:xfrm>
-            <a:off x="3291840" y="2971800"/>
-            <a:ext cx="7863840" cy="713232"/>
+            <a:endParaRPr lang="en-US" sz="1500" dirty="0"/>
+          </a:p>
+        </p:txBody>
+      </p:sp>
+      <p:sp>
+        <p:nvSpPr>
+          <p:cNvPr id="17" name="Shape 14"/>
+          <p:cNvSpPr/>
+          <p:nvPr/>
+        </p:nvSpPr>
+        <p:spPr>
+          <a:xfrm>
+            <a:off x="640080" y="2907792"/>
+            <a:ext cx="5074920" cy="768096"/>
           </a:xfrm>
           <a:prstGeom prst="roundRect">
             <a:avLst>
-              <a:gd name="adj" fmla="val 15385"/>
+              <a:gd name="adj" fmla="val 14286"/>
             </a:avLst>
           </a:prstGeom>
           <a:solidFill>
@@ -14187,30 +14724,30 @@
       </p:sp>
       <p:sp>
         <p:nvSpPr>
-          <p:cNvPr id="12" name="Text 9"/>
-          <p:cNvSpPr/>
-          <p:nvPr/>
-        </p:nvSpPr>
-        <p:spPr>
-          <a:xfrm>
-            <a:off x="3611880" y="3017520"/>
-            <a:ext cx="7315200" cy="621792"/>
-          </a:xfrm>
-          <a:prstGeom prst="rect">
-            <a:avLst/>
-          </a:prstGeom>
-          <a:noFill/>
-          <a:ln/>
-        </p:spPr>
-        <p:txBody>
-          <a:bodyPr wrap="square" lIns="0" tIns="0" rIns="0" bIns="0" rtlCol="0" anchor="ctr"/>
-          <a:lstStyle/>
-          <a:p>
-            <a:pPr indent="0" marL="0">
-              <a:buNone/>
-            </a:pPr>
-            <a:r>
-              <a:rPr lang="en-US" sz="1900" b="1" dirty="0">
+          <p:cNvPr id="18" name="Text 15"/>
+          <p:cNvSpPr/>
+          <p:nvPr/>
+        </p:nvSpPr>
+        <p:spPr>
+          <a:xfrm>
+            <a:off x="896112" y="2953512"/>
+            <a:ext cx="4572000" cy="676656"/>
+          </a:xfrm>
+          <a:prstGeom prst="rect">
+            <a:avLst/>
+          </a:prstGeom>
+          <a:noFill/>
+          <a:ln/>
+        </p:spPr>
+        <p:txBody>
+          <a:bodyPr wrap="square" lIns="0" tIns="0" rIns="0" bIns="0" rtlCol="0" anchor="ctr"/>
+          <a:lstStyle/>
+          <a:p>
+            <a:pPr indent="0" marL="0">
+              <a:buNone/>
+            </a:pPr>
+            <a:r>
+              <a:rPr lang="en-US" sz="1500" b="1" dirty="0">
                 <a:solidFill>
                   <a:srgbClr val="13293D"/>
                 </a:solidFill>
@@ -14220,63 +14757,24 @@
               </a:rPr>
               <a:t>“Shorter.”</a:t>
             </a:r>
-            <a:endParaRPr lang="en-US" sz="1900" dirty="0"/>
-          </a:p>
-        </p:txBody>
-      </p:sp>
-      <p:sp>
-        <p:nvSpPr>
-          <p:cNvPr id="13" name="Text 10"/>
-          <p:cNvSpPr/>
-          <p:nvPr/>
-        </p:nvSpPr>
-        <p:spPr>
-          <a:xfrm>
-            <a:off x="1965960" y="3017520"/>
-            <a:ext cx="1234440" cy="621792"/>
-          </a:xfrm>
-          <a:prstGeom prst="rect">
-            <a:avLst/>
-          </a:prstGeom>
-          <a:noFill/>
-          <a:ln/>
-        </p:spPr>
-        <p:txBody>
-          <a:bodyPr wrap="square" lIns="0" tIns="0" rIns="0" bIns="0" rtlCol="0" anchor="ctr"/>
-          <a:lstStyle/>
-          <a:p>
-            <a:pPr algn="r" indent="0" marL="0">
-              <a:buNone/>
-            </a:pPr>
-            <a:r>
-              <a:rPr lang="en-US" sz="1200" i="1" dirty="0">
-                <a:solidFill>
-                  <a:srgbClr val="5B6B7A"/>
-                </a:solidFill>
-                <a:latin typeface="Inter" pitchFamily="34" charset="0"/>
-                <a:ea typeface="Inter" pitchFamily="34" charset="-122"/>
-                <a:cs typeface="Inter" pitchFamily="34" charset="-120"/>
-              </a:rPr>
-              <a:t>she types →</a:t>
-            </a:r>
-            <a:endParaRPr lang="en-US" sz="1200" dirty="0"/>
-          </a:p>
-        </p:txBody>
-      </p:sp>
-      <p:sp>
-        <p:nvSpPr>
-          <p:cNvPr id="14" name="Shape 11"/>
-          <p:cNvSpPr/>
-          <p:nvPr/>
-        </p:nvSpPr>
-        <p:spPr>
-          <a:xfrm>
-            <a:off x="3291840" y="3840480"/>
-            <a:ext cx="7863840" cy="713232"/>
+            <a:endParaRPr lang="en-US" sz="1500" dirty="0"/>
+          </a:p>
+        </p:txBody>
+      </p:sp>
+      <p:sp>
+        <p:nvSpPr>
+          <p:cNvPr id="19" name="Shape 16"/>
+          <p:cNvSpPr/>
+          <p:nvPr/>
+        </p:nvSpPr>
+        <p:spPr>
+          <a:xfrm>
+            <a:off x="640080" y="3803904"/>
+            <a:ext cx="5074920" cy="768096"/>
           </a:xfrm>
           <a:prstGeom prst="roundRect">
             <a:avLst>
-              <a:gd name="adj" fmla="val 15385"/>
+              <a:gd name="adj" fmla="val 14286"/>
             </a:avLst>
           </a:prstGeom>
           <a:solidFill>
@@ -14292,30 +14790,30 @@
       </p:sp>
       <p:sp>
         <p:nvSpPr>
-          <p:cNvPr id="15" name="Text 12"/>
-          <p:cNvSpPr/>
-          <p:nvPr/>
-        </p:nvSpPr>
-        <p:spPr>
-          <a:xfrm>
-            <a:off x="3611880" y="3886200"/>
-            <a:ext cx="7315200" cy="621792"/>
-          </a:xfrm>
-          <a:prstGeom prst="rect">
-            <a:avLst/>
-          </a:prstGeom>
-          <a:noFill/>
-          <a:ln/>
-        </p:spPr>
-        <p:txBody>
-          <a:bodyPr wrap="square" lIns="0" tIns="0" rIns="0" bIns="0" rtlCol="0" anchor="ctr"/>
-          <a:lstStyle/>
-          <a:p>
-            <a:pPr indent="0" marL="0">
-              <a:buNone/>
-            </a:pPr>
-            <a:r>
-              <a:rPr lang="en-US" sz="1900" b="1" dirty="0">
+          <p:cNvPr id="20" name="Text 17"/>
+          <p:cNvSpPr/>
+          <p:nvPr/>
+        </p:nvSpPr>
+        <p:spPr>
+          <a:xfrm>
+            <a:off x="896112" y="3849624"/>
+            <a:ext cx="4572000" cy="676656"/>
+          </a:xfrm>
+          <a:prstGeom prst="rect">
+            <a:avLst/>
+          </a:prstGeom>
+          <a:noFill/>
+          <a:ln/>
+        </p:spPr>
+        <p:txBody>
+          <a:bodyPr wrap="square" lIns="0" tIns="0" rIns="0" bIns="0" rtlCol="0" anchor="ctr"/>
+          <a:lstStyle/>
+          <a:p>
+            <a:pPr indent="0" marL="0">
+              <a:buNone/>
+            </a:pPr>
+            <a:r>
+              <a:rPr lang="en-US" sz="1500" b="1" dirty="0">
                 <a:solidFill>
                   <a:srgbClr val="13293D"/>
                 </a:solidFill>
@@ -14325,63 +14823,24 @@
               </a:rPr>
               <a:t>“A 5th grader wouldn’t know three of these words. Fix that.”</a:t>
             </a:r>
-            <a:endParaRPr lang="en-US" sz="1900" dirty="0"/>
-          </a:p>
-        </p:txBody>
-      </p:sp>
-      <p:sp>
-        <p:nvSpPr>
-          <p:cNvPr id="16" name="Text 13"/>
-          <p:cNvSpPr/>
-          <p:nvPr/>
-        </p:nvSpPr>
-        <p:spPr>
-          <a:xfrm>
-            <a:off x="1965960" y="3886200"/>
-            <a:ext cx="1234440" cy="621792"/>
-          </a:xfrm>
-          <a:prstGeom prst="rect">
-            <a:avLst/>
-          </a:prstGeom>
-          <a:noFill/>
-          <a:ln/>
-        </p:spPr>
-        <p:txBody>
-          <a:bodyPr wrap="square" lIns="0" tIns="0" rIns="0" bIns="0" rtlCol="0" anchor="ctr"/>
-          <a:lstStyle/>
-          <a:p>
-            <a:pPr algn="r" indent="0" marL="0">
-              <a:buNone/>
-            </a:pPr>
-            <a:r>
-              <a:rPr lang="en-US" sz="1200" i="1" dirty="0">
-                <a:solidFill>
-                  <a:srgbClr val="5B6B7A"/>
-                </a:solidFill>
-                <a:latin typeface="Inter" pitchFamily="34" charset="0"/>
-                <a:ea typeface="Inter" pitchFamily="34" charset="-122"/>
-                <a:cs typeface="Inter" pitchFamily="34" charset="-120"/>
-              </a:rPr>
-              <a:t>she types →</a:t>
-            </a:r>
-            <a:endParaRPr lang="en-US" sz="1200" dirty="0"/>
-          </a:p>
-        </p:txBody>
-      </p:sp>
-      <p:sp>
-        <p:nvSpPr>
-          <p:cNvPr id="17" name="Shape 14"/>
-          <p:cNvSpPr/>
-          <p:nvPr/>
-        </p:nvSpPr>
-        <p:spPr>
-          <a:xfrm>
-            <a:off x="3291840" y="4709160"/>
-            <a:ext cx="7863840" cy="713232"/>
+            <a:endParaRPr lang="en-US" sz="1500" dirty="0"/>
+          </a:p>
+        </p:txBody>
+      </p:sp>
+      <p:sp>
+        <p:nvSpPr>
+          <p:cNvPr id="21" name="Shape 18"/>
+          <p:cNvSpPr/>
+          <p:nvPr/>
+        </p:nvSpPr>
+        <p:spPr>
+          <a:xfrm>
+            <a:off x="640080" y="4700016"/>
+            <a:ext cx="5074920" cy="768096"/>
           </a:xfrm>
           <a:prstGeom prst="roundRect">
             <a:avLst>
-              <a:gd name="adj" fmla="val 15385"/>
+              <a:gd name="adj" fmla="val 14286"/>
             </a:avLst>
           </a:prstGeom>
           <a:solidFill>
@@ -14397,30 +14856,30 @@
       </p:sp>
       <p:sp>
         <p:nvSpPr>
-          <p:cNvPr id="18" name="Text 15"/>
-          <p:cNvSpPr/>
-          <p:nvPr/>
-        </p:nvSpPr>
-        <p:spPr>
-          <a:xfrm>
-            <a:off x="3611880" y="4754880"/>
-            <a:ext cx="7315200" cy="621792"/>
-          </a:xfrm>
-          <a:prstGeom prst="rect">
-            <a:avLst/>
-          </a:prstGeom>
-          <a:noFill/>
-          <a:ln/>
-        </p:spPr>
-        <p:txBody>
-          <a:bodyPr wrap="square" lIns="0" tIns="0" rIns="0" bIns="0" rtlCol="0" anchor="ctr"/>
-          <a:lstStyle/>
-          <a:p>
-            <a:pPr indent="0" marL="0">
-              <a:buNone/>
-            </a:pPr>
-            <a:r>
-              <a:rPr lang="en-US" sz="1900" b="1" dirty="0">
+          <p:cNvPr id="22" name="Text 19"/>
+          <p:cNvSpPr/>
+          <p:nvPr/>
+        </p:nvSpPr>
+        <p:spPr>
+          <a:xfrm>
+            <a:off x="896112" y="4745736"/>
+            <a:ext cx="4572000" cy="676656"/>
+          </a:xfrm>
+          <a:prstGeom prst="rect">
+            <a:avLst/>
+          </a:prstGeom>
+          <a:noFill/>
+          <a:ln/>
+        </p:spPr>
+        <p:txBody>
+          <a:bodyPr wrap="square" lIns="0" tIns="0" rIns="0" bIns="0" rtlCol="0" anchor="ctr"/>
+          <a:lstStyle/>
+          <a:p>
+            <a:pPr indent="0" marL="0">
+              <a:buNone/>
+            </a:pPr>
+            <a:r>
+              <a:rPr lang="en-US" sz="1500" b="1" dirty="0">
                 <a:solidFill>
                   <a:srgbClr val="13293D"/>
                 </a:solidFill>
@@ -14430,36 +14889,282 @@
               </a:rPr>
               <a:t>“Make question four harder and add a diagram question.”</a:t>
             </a:r>
-            <a:endParaRPr lang="en-US" sz="1900" dirty="0"/>
-          </a:p>
-        </p:txBody>
-      </p:sp>
-      <p:sp>
-        <p:nvSpPr>
-          <p:cNvPr id="19" name="Text 16"/>
-          <p:cNvSpPr/>
-          <p:nvPr/>
-        </p:nvSpPr>
-        <p:spPr>
-          <a:xfrm>
-            <a:off x="1965960" y="4754880"/>
-            <a:ext cx="1234440" cy="621792"/>
-          </a:xfrm>
-          <a:prstGeom prst="rect">
-            <a:avLst/>
-          </a:prstGeom>
-          <a:noFill/>
-          <a:ln/>
-        </p:spPr>
-        <p:txBody>
-          <a:bodyPr wrap="square" lIns="0" tIns="0" rIns="0" bIns="0" rtlCol="0" anchor="ctr"/>
-          <a:lstStyle/>
-          <a:p>
-            <a:pPr algn="r" indent="0" marL="0">
-              <a:buNone/>
-            </a:pPr>
-            <a:r>
-              <a:rPr lang="en-US" sz="1200" i="1" dirty="0">
+            <a:endParaRPr lang="en-US" sz="1500" dirty="0"/>
+          </a:p>
+        </p:txBody>
+      </p:sp>
+      <p:sp>
+        <p:nvSpPr>
+          <p:cNvPr id="23" name="Shape 20"/>
+          <p:cNvSpPr/>
+          <p:nvPr/>
+        </p:nvSpPr>
+        <p:spPr>
+          <a:xfrm>
+            <a:off x="5897880" y="1298448"/>
+            <a:ext cx="5715000" cy="4315968"/>
+          </a:xfrm>
+          <a:prstGeom prst="roundRect">
+            <a:avLst>
+              <a:gd name="adj" fmla="val 2119"/>
+            </a:avLst>
+          </a:prstGeom>
+          <a:solidFill>
+            <a:srgbClr val="FFFFFF"/>
+          </a:solidFill>
+          <a:ln w="19050">
+            <a:solidFill>
+              <a:srgbClr val="DCE3EA"/>
+            </a:solidFill>
+            <a:prstDash val="solid"/>
+          </a:ln>
+        </p:spPr>
+      </p:sp>
+      <p:sp>
+        <p:nvSpPr>
+          <p:cNvPr id="24" name="Shape 21"/>
+          <p:cNvSpPr/>
+          <p:nvPr/>
+        </p:nvSpPr>
+        <p:spPr>
+          <a:xfrm>
+            <a:off x="5897880" y="1298448"/>
+            <a:ext cx="5715000" cy="384048"/>
+          </a:xfrm>
+          <a:prstGeom prst="roundRect">
+            <a:avLst>
+              <a:gd name="adj" fmla="val 23810"/>
+            </a:avLst>
+          </a:prstGeom>
+          <a:solidFill>
+            <a:srgbClr val="13293D"/>
+          </a:solidFill>
+          <a:ln w="12700">
+            <a:solidFill>
+              <a:srgbClr val="13293D"/>
+            </a:solidFill>
+            <a:prstDash val="solid"/>
+          </a:ln>
+        </p:spPr>
+      </p:sp>
+      <p:sp>
+        <p:nvSpPr>
+          <p:cNvPr id="25" name="Shape 22"/>
+          <p:cNvSpPr/>
+          <p:nvPr/>
+        </p:nvSpPr>
+        <p:spPr>
+          <a:xfrm>
+            <a:off x="6099048" y="1417320"/>
+            <a:ext cx="146304" cy="146304"/>
+          </a:xfrm>
+          <a:prstGeom prst="ellipse">
+            <a:avLst/>
+          </a:prstGeom>
+          <a:solidFill>
+            <a:srgbClr val="E8837A"/>
+          </a:solidFill>
+          <a:ln w="12700">
+            <a:solidFill>
+              <a:srgbClr val="E8837A"/>
+            </a:solidFill>
+            <a:prstDash val="solid"/>
+          </a:ln>
+        </p:spPr>
+      </p:sp>
+      <p:sp>
+        <p:nvSpPr>
+          <p:cNvPr id="26" name="Shape 23"/>
+          <p:cNvSpPr/>
+          <p:nvPr/>
+        </p:nvSpPr>
+        <p:spPr>
+          <a:xfrm>
+            <a:off x="6345936" y="1417320"/>
+            <a:ext cx="146304" cy="146304"/>
+          </a:xfrm>
+          <a:prstGeom prst="ellipse">
+            <a:avLst/>
+          </a:prstGeom>
+          <a:solidFill>
+            <a:srgbClr val="F4A825"/>
+          </a:solidFill>
+          <a:ln w="12700">
+            <a:solidFill>
+              <a:srgbClr val="F4A825"/>
+            </a:solidFill>
+            <a:prstDash val="solid"/>
+          </a:ln>
+        </p:spPr>
+      </p:sp>
+      <p:sp>
+        <p:nvSpPr>
+          <p:cNvPr id="27" name="Shape 24"/>
+          <p:cNvSpPr/>
+          <p:nvPr/>
+        </p:nvSpPr>
+        <p:spPr>
+          <a:xfrm>
+            <a:off x="6592824" y="1417320"/>
+            <a:ext cx="146304" cy="146304"/>
+          </a:xfrm>
+          <a:prstGeom prst="ellipse">
+            <a:avLst/>
+          </a:prstGeom>
+          <a:solidFill>
+            <a:srgbClr val="2E7D5B"/>
+          </a:solidFill>
+          <a:ln w="12700">
+            <a:solidFill>
+              <a:srgbClr val="2E7D5B"/>
+            </a:solidFill>
+            <a:prstDash val="solid"/>
+          </a:ln>
+        </p:spPr>
+      </p:sp>
+      <p:sp>
+        <p:nvSpPr>
+          <p:cNvPr id="28" name="Text 25"/>
+          <p:cNvSpPr/>
+          <p:nvPr/>
+        </p:nvSpPr>
+        <p:spPr>
+          <a:xfrm>
+            <a:off x="6949440" y="1298448"/>
+            <a:ext cx="4526280" cy="384048"/>
+          </a:xfrm>
+          <a:prstGeom prst="rect">
+            <a:avLst/>
+          </a:prstGeom>
+          <a:noFill/>
+          <a:ln/>
+        </p:spPr>
+        <p:txBody>
+          <a:bodyPr wrap="square" lIns="0" tIns="0" rIns="0" bIns="0" rtlCol="0" anchor="ctr"/>
+          <a:lstStyle/>
+          <a:p>
+            <a:pPr indent="0" marL="0">
+              <a:buNone/>
+            </a:pPr>
+            <a:r>
+              <a:rPr lang="en-US" sz="1100" dirty="0">
+                <a:solidFill>
+                  <a:srgbClr val="9FB2C2"/>
+                </a:solidFill>
+                <a:latin typeface="Inter" pitchFamily="34" charset="0"/>
+                <a:ea typeface="Inter" pitchFamily="34" charset="-122"/>
+                <a:cs typeface="Inter" pitchFamily="34" charset="-120"/>
+              </a:rPr>
+              <a:t>Ms. Rivera’s newsletter blurb · task 2 · two pushbacks later</a:t>
+            </a:r>
+            <a:endParaRPr lang="en-US" sz="1100" dirty="0"/>
+          </a:p>
+        </p:txBody>
+      </p:sp>
+      <p:sp>
+        <p:nvSpPr>
+          <p:cNvPr id="29" name="Text 26"/>
+          <p:cNvSpPr/>
+          <p:nvPr/>
+        </p:nvSpPr>
+        <p:spPr>
+          <a:xfrm>
+            <a:off x="6172200" y="1792224"/>
+            <a:ext cx="5166360" cy="256032"/>
+          </a:xfrm>
+          <a:prstGeom prst="rect">
+            <a:avLst/>
+          </a:prstGeom>
+          <a:noFill/>
+          <a:ln/>
+        </p:spPr>
+        <p:txBody>
+          <a:bodyPr wrap="square" lIns="0" tIns="0" rIns="0" bIns="0" rtlCol="0" anchor="ctr"/>
+          <a:lstStyle/>
+          <a:p>
+            <a:pPr indent="0" marL="0">
+              <a:buNone/>
+            </a:pPr>
+            <a:r>
+              <a:rPr lang="en-US" sz="1000" b="1" spc="150" kern="0" dirty="0">
+                <a:solidFill>
+                  <a:srgbClr val="2A9D8F"/>
+                </a:solidFill>
+                <a:latin typeface="Inter" pitchFamily="34" charset="0"/>
+                <a:ea typeface="Inter" pitchFamily="34" charset="-122"/>
+                <a:cs typeface="Inter" pitchFamily="34" charset="-120"/>
+              </a:rPr>
+              <a:t>SHE TYPES, ONE AT A TIME</a:t>
+            </a:r>
+            <a:endParaRPr lang="en-US" sz="1000" dirty="0"/>
+          </a:p>
+        </p:txBody>
+      </p:sp>
+      <p:sp>
+        <p:nvSpPr>
+          <p:cNvPr id="30" name="Text 27"/>
+          <p:cNvSpPr/>
+          <p:nvPr/>
+        </p:nvSpPr>
+        <p:spPr>
+          <a:xfrm>
+            <a:off x="6172200" y="2048256"/>
+            <a:ext cx="5166360" cy="310896"/>
+          </a:xfrm>
+          <a:prstGeom prst="rect">
+            <a:avLst/>
+          </a:prstGeom>
+          <a:noFill/>
+          <a:ln/>
+        </p:spPr>
+        <p:txBody>
+          <a:bodyPr wrap="square" lIns="0" tIns="0" rIns="0" bIns="0" rtlCol="0" anchor="t"/>
+          <a:lstStyle/>
+          <a:p>
+            <a:pPr indent="0" marL="0">
+              <a:buNone/>
+            </a:pPr>
+            <a:r>
+              <a:rPr lang="en-US" sz="1550" b="1" dirty="0">
+                <a:solidFill>
+                  <a:srgbClr val="13293D"/>
+                </a:solidFill>
+                <a:latin typeface="Inter" pitchFamily="34" charset="0"/>
+                <a:ea typeface="Inter" pitchFamily="34" charset="-122"/>
+                <a:cs typeface="Inter" pitchFamily="34" charset="-120"/>
+              </a:rPr>
+              <a:t>“Warmer.”   then   “Shorter.”</a:t>
+            </a:r>
+            <a:endParaRPr lang="en-US" sz="1550" dirty="0"/>
+          </a:p>
+        </p:txBody>
+      </p:sp>
+      <p:sp>
+        <p:nvSpPr>
+          <p:cNvPr id="31" name="Text 28"/>
+          <p:cNvSpPr/>
+          <p:nvPr/>
+        </p:nvSpPr>
+        <p:spPr>
+          <a:xfrm>
+            <a:off x="6172200" y="2468880"/>
+            <a:ext cx="5166360" cy="256032"/>
+          </a:xfrm>
+          <a:prstGeom prst="rect">
+            <a:avLst/>
+          </a:prstGeom>
+          <a:noFill/>
+          <a:ln/>
+        </p:spPr>
+        <p:txBody>
+          <a:bodyPr wrap="square" lIns="0" tIns="0" rIns="0" bIns="0" rtlCol="0" anchor="ctr"/>
+          <a:lstStyle/>
+          <a:p>
+            <a:pPr indent="0" marL="0">
+              <a:buNone/>
+            </a:pPr>
+            <a:r>
+              <a:rPr lang="en-US" sz="1000" b="1" spc="150" kern="0" dirty="0">
                 <a:solidFill>
                   <a:srgbClr val="5B6B7A"/>
                 </a:solidFill>
@@ -14467,15 +15172,177 @@
                 <a:ea typeface="Inter" pitchFamily="34" charset="-122"/>
                 <a:cs typeface="Inter" pitchFamily="34" charset="-120"/>
               </a:rPr>
-              <a:t>she types →</a:t>
-            </a:r>
-            <a:endParaRPr lang="en-US" sz="1200" dirty="0"/>
-          </a:p>
-        </p:txBody>
-      </p:sp>
-      <p:sp>
-        <p:nvSpPr>
-          <p:cNvPr id="20" name="Text 17"/>
+              <a:t>THE BLURB, TWO ROUNDS LATER</a:t>
+            </a:r>
+            <a:endParaRPr lang="en-US" sz="1000" dirty="0"/>
+          </a:p>
+        </p:txBody>
+      </p:sp>
+      <p:sp>
+        <p:nvSpPr>
+          <p:cNvPr id="32" name="Text 29"/>
+          <p:cNvSpPr/>
+          <p:nvPr/>
+        </p:nvSpPr>
+        <p:spPr>
+          <a:xfrm>
+            <a:off x="6172200" y="2724912"/>
+            <a:ext cx="5166360" cy="868680"/>
+          </a:xfrm>
+          <a:prstGeom prst="rect">
+            <a:avLst/>
+          </a:prstGeom>
+          <a:noFill/>
+          <a:ln/>
+        </p:spPr>
+        <p:txBody>
+          <a:bodyPr wrap="square" lIns="0" tIns="0" rIns="0" bIns="0" rtlCol="0" anchor="t"/>
+          <a:lstStyle/>
+          <a:p>
+            <a:pPr indent="0" marL="0">
+              <a:lnSpc>
+                <a:spcPct val="112000"/>
+              </a:lnSpc>
+              <a:buNone/>
+            </a:pPr>
+            <a:r>
+              <a:rPr lang="en-US" sz="1400" dirty="0">
+                <a:solidFill>
+                  <a:srgbClr val="1B1F24"/>
+                </a:solidFill>
+                <a:latin typeface="Inter" pitchFamily="34" charset="0"/>
+                <a:ea typeface="Inter" pitchFamily="34" charset="-122"/>
+                <a:cs typeface="Inter" pitchFamily="34" charset="-120"/>
+              </a:rPr>
+              <a:t>“Families, our fall book fair is almost here! Stop by the library with your reader and help them pick a book they’ll actually love. Happy reading!”</a:t>
+            </a:r>
+            <a:endParaRPr lang="en-US" sz="1400" dirty="0"/>
+          </a:p>
+        </p:txBody>
+      </p:sp>
+      <p:sp>
+        <p:nvSpPr>
+          <p:cNvPr id="33" name="Text 30"/>
+          <p:cNvSpPr/>
+          <p:nvPr/>
+        </p:nvSpPr>
+        <p:spPr>
+          <a:xfrm>
+            <a:off x="6172200" y="3675888"/>
+            <a:ext cx="5166360" cy="256032"/>
+          </a:xfrm>
+          <a:prstGeom prst="rect">
+            <a:avLst/>
+          </a:prstGeom>
+          <a:noFill/>
+          <a:ln/>
+        </p:spPr>
+        <p:txBody>
+          <a:bodyPr wrap="square" lIns="0" tIns="0" rIns="0" bIns="0" rtlCol="0" anchor="ctr"/>
+          <a:lstStyle/>
+          <a:p>
+            <a:pPr indent="0" marL="0">
+              <a:buNone/>
+            </a:pPr>
+            <a:r>
+              <a:rPr lang="en-US" sz="1000" b="1" spc="150" kern="0" dirty="0">
+                <a:solidFill>
+                  <a:srgbClr val="B4453A"/>
+                </a:solidFill>
+                <a:latin typeface="Inter" pitchFamily="34" charset="0"/>
+                <a:ea typeface="Inter" pitchFamily="34" charset="-122"/>
+                <a:cs typeface="Inter" pitchFamily="34" charset="-120"/>
+              </a:rPr>
+              <a:t>ONE ERROR, CAUGHT ON THE READ-THROUGH</a:t>
+            </a:r>
+            <a:endParaRPr lang="en-US" sz="1000" dirty="0"/>
+          </a:p>
+        </p:txBody>
+      </p:sp>
+      <p:sp>
+        <p:nvSpPr>
+          <p:cNvPr id="34" name="Text 31"/>
+          <p:cNvSpPr/>
+          <p:nvPr/>
+        </p:nvSpPr>
+        <p:spPr>
+          <a:xfrm>
+            <a:off x="6172200" y="3931920"/>
+            <a:ext cx="5166360" cy="868680"/>
+          </a:xfrm>
+          <a:prstGeom prst="rect">
+            <a:avLst/>
+          </a:prstGeom>
+          <a:noFill/>
+          <a:ln/>
+        </p:spPr>
+        <p:txBody>
+          <a:bodyPr wrap="square" lIns="0" tIns="0" rIns="0" bIns="0" rtlCol="0" anchor="t"/>
+          <a:lstStyle/>
+          <a:p>
+            <a:pPr indent="0" marL="0">
+              <a:lnSpc>
+                <a:spcPct val="110000"/>
+              </a:lnSpc>
+              <a:buNone/>
+            </a:pPr>
+            <a:r>
+              <a:rPr lang="en-US" sz="1250" dirty="0">
+                <a:solidFill>
+                  <a:srgbClr val="1B1F24"/>
+                </a:solidFill>
+                <a:latin typeface="Inter" pitchFamily="34" charset="0"/>
+                <a:ea typeface="Inter" pitchFamily="34" charset="-122"/>
+                <a:cs typeface="Inter" pitchFamily="34" charset="-120"/>
+              </a:rPr>
+              <a:t>The draft claimed the fair “runs all week, 8:00 to 3:00.” She never typed a schedule; the intern invented one. She cut it and checked the real flyer.</a:t>
+            </a:r>
+            <a:endParaRPr lang="en-US" sz="1250" dirty="0"/>
+          </a:p>
+        </p:txBody>
+      </p:sp>
+      <p:sp>
+        <p:nvSpPr>
+          <p:cNvPr id="35" name="Text 32"/>
+          <p:cNvSpPr/>
+          <p:nvPr/>
+        </p:nvSpPr>
+        <p:spPr>
+          <a:xfrm>
+            <a:off x="6172200" y="4892040"/>
+            <a:ext cx="5166360" cy="594360"/>
+          </a:xfrm>
+          <a:prstGeom prst="rect">
+            <a:avLst/>
+          </a:prstGeom>
+          <a:noFill/>
+          <a:ln/>
+        </p:spPr>
+        <p:txBody>
+          <a:bodyPr wrap="square" lIns="0" tIns="0" rIns="0" bIns="0" rtlCol="0" anchor="t"/>
+          <a:lstStyle/>
+          <a:p>
+            <a:pPr indent="0" marL="0">
+              <a:buNone/>
+            </a:pPr>
+            <a:r>
+              <a:rPr lang="en-US" sz="1150" i="1" dirty="0">
+                <a:solidFill>
+                  <a:srgbClr val="5B6B7A"/>
+                </a:solidFill>
+                <a:latin typeface="Inter" pitchFamily="34" charset="0"/>
+                <a:ea typeface="Inter" pitchFamily="34" charset="-122"/>
+                <a:cs typeface="Inter" pitchFamily="34" charset="-120"/>
+              </a:rPr>
+              <a:t>Usable now, with nothing in it she didn’t verify. Copy her arc: draft, push back twice, read it before it goes anywhere.</a:t>
+            </a:r>
+            <a:endParaRPr lang="en-US" sz="1150" dirty="0"/>
+          </a:p>
+        </p:txBody>
+      </p:sp>
+      <p:sp>
+        <p:nvSpPr>
+          <p:cNvPr id="36" name="Text 33"/>
           <p:cNvSpPr/>
           <p:nvPr/>
         </p:nvSpPr>
@@ -14861,7 +15728,7 @@
                 <a:ea typeface="Inter" pitchFamily="34" charset="-122"/>
                 <a:cs typeface="Inter" pitchFamily="34" charset="-120"/>
               </a:rPr>
-              <a:t>Her lab notes: draft one beige; two pushbacks later, usable. One error caught.</a:t>
+              <a:t>Her newsletter blurb's arc: beige v1, two pushbacks, usable. One error caught.</a:t>
             </a:r>
             <a:endParaRPr lang="en-US" sz="1000" dirty="0"/>
           </a:p>

--- a/kits/kit01-tpt/Kit01_PresentationDeck.pptx
+++ b/kits/kit01-tpt/Kit01_PresentationDeck.pptx
@@ -4590,7 +4590,7 @@
         <p:spPr>
           <a:xfrm>
             <a:off x="566928" y="128016"/>
-            <a:ext cx="11055096" cy="274320"/>
+            <a:ext cx="7955280" cy="274320"/>
           </a:xfrm>
           <a:prstGeom prst="rect">
             <a:avLst/>
@@ -4629,7 +4629,7 @@
         <p:spPr>
           <a:xfrm>
             <a:off x="548640" y="384048"/>
-            <a:ext cx="11091672" cy="777240"/>
+            <a:ext cx="7955280" cy="777240"/>
           </a:xfrm>
           <a:prstGeom prst="rect">
             <a:avLst/>
@@ -5367,7 +5367,7 @@
         <p:spPr>
           <a:xfrm>
             <a:off x="566928" y="128016"/>
-            <a:ext cx="11055096" cy="274320"/>
+            <a:ext cx="7955280" cy="274320"/>
           </a:xfrm>
           <a:prstGeom prst="rect">
             <a:avLst/>
@@ -5406,7 +5406,7 @@
         <p:spPr>
           <a:xfrm>
             <a:off x="548640" y="384048"/>
-            <a:ext cx="11091672" cy="777240"/>
+            <a:ext cx="7955280" cy="777240"/>
           </a:xfrm>
           <a:prstGeom prst="rect">
             <a:avLst/>
@@ -6181,7 +6181,7 @@
         <p:spPr>
           <a:xfrm>
             <a:off x="566928" y="128016"/>
-            <a:ext cx="11055096" cy="274320"/>
+            <a:ext cx="7955280" cy="274320"/>
           </a:xfrm>
           <a:prstGeom prst="rect">
             <a:avLst/>
@@ -6220,7 +6220,7 @@
         <p:spPr>
           <a:xfrm>
             <a:off x="548640" y="384048"/>
-            <a:ext cx="11091672" cy="777240"/>
+            <a:ext cx="7955280" cy="777240"/>
           </a:xfrm>
           <a:prstGeom prst="rect">
             <a:avLst/>
@@ -6863,7 +6863,7 @@
         <p:spPr>
           <a:xfrm>
             <a:off x="566928" y="128016"/>
-            <a:ext cx="11055096" cy="274320"/>
+            <a:ext cx="7955280" cy="274320"/>
           </a:xfrm>
           <a:prstGeom prst="rect">
             <a:avLst/>
@@ -6902,23 +6902,23 @@
         <p:spPr>
           <a:xfrm>
             <a:off x="548640" y="384048"/>
-            <a:ext cx="11091672" cy="777240"/>
-          </a:xfrm>
-          <a:prstGeom prst="rect">
-            <a:avLst/>
-          </a:prstGeom>
-          <a:noFill/>
-          <a:ln/>
-        </p:spPr>
-        <p:txBody>
-          <a:bodyPr wrap="square" lIns="0" tIns="0" rIns="0" bIns="0" rtlCol="0" anchor="ctr"/>
-          <a:lstStyle/>
-          <a:p>
-            <a:pPr indent="0" marL="0">
-              <a:buNone/>
-            </a:pPr>
-            <a:r>
-              <a:rPr lang="en-US" sz="3200" b="1" dirty="0">
+            <a:ext cx="7955280" cy="777240"/>
+          </a:xfrm>
+          <a:prstGeom prst="rect">
+            <a:avLst/>
+          </a:prstGeom>
+          <a:noFill/>
+          <a:ln/>
+        </p:spPr>
+        <p:txBody>
+          <a:bodyPr wrap="square" lIns="0" tIns="0" rIns="0" bIns="0" rtlCol="0" anchor="ctr"/>
+          <a:lstStyle/>
+          <a:p>
+            <a:pPr indent="0" marL="0">
+              <a:buNone/>
+            </a:pPr>
+            <a:r>
+              <a:rPr lang="en-US" sz="2800" b="1" dirty="0">
                 <a:solidFill>
                   <a:srgbClr val="13293D"/>
                 </a:solidFill>
@@ -6928,7 +6928,7 @@
               </a:rPr>
               <a:t>“Public tool” vs. district-approved tool</a:t>
             </a:r>
-            <a:endParaRPr lang="en-US" sz="3200" dirty="0"/>
+            <a:endParaRPr lang="en-US" sz="2800" dirty="0"/>
           </a:p>
         </p:txBody>
       </p:sp>
@@ -7552,7 +7552,7 @@
         <p:spPr>
           <a:xfrm>
             <a:off x="566928" y="128016"/>
-            <a:ext cx="11055096" cy="274320"/>
+            <a:ext cx="7955280" cy="274320"/>
           </a:xfrm>
           <a:prstGeom prst="rect">
             <a:avLst/>
@@ -7591,7 +7591,7 @@
         <p:spPr>
           <a:xfrm>
             <a:off x="548640" y="384048"/>
-            <a:ext cx="11091672" cy="777240"/>
+            <a:ext cx="7955280" cy="777240"/>
           </a:xfrm>
           <a:prstGeom prst="rect">
             <a:avLst/>
@@ -8827,7 +8827,7 @@
         <p:spPr>
           <a:xfrm>
             <a:off x="566928" y="128016"/>
-            <a:ext cx="11055096" cy="274320"/>
+            <a:ext cx="7955280" cy="274320"/>
           </a:xfrm>
           <a:prstGeom prst="rect">
             <a:avLst/>
@@ -8866,7 +8866,7 @@
         <p:spPr>
           <a:xfrm>
             <a:off x="548640" y="384048"/>
-            <a:ext cx="11091672" cy="777240"/>
+            <a:ext cx="7955280" cy="777240"/>
           </a:xfrm>
           <a:prstGeom prst="rect">
             <a:avLst/>
@@ -9509,7 +9509,7 @@
         <p:spPr>
           <a:xfrm>
             <a:off x="566928" y="128016"/>
-            <a:ext cx="11055096" cy="274320"/>
+            <a:ext cx="7955280" cy="274320"/>
           </a:xfrm>
           <a:prstGeom prst="rect">
             <a:avLst/>
@@ -9548,23 +9548,23 @@
         <p:spPr>
           <a:xfrm>
             <a:off x="548640" y="384048"/>
-            <a:ext cx="11091672" cy="777240"/>
-          </a:xfrm>
-          <a:prstGeom prst="rect">
-            <a:avLst/>
-          </a:prstGeom>
-          <a:noFill/>
-          <a:ln/>
-        </p:spPr>
-        <p:txBody>
-          <a:bodyPr wrap="square" lIns="0" tIns="0" rIns="0" bIns="0" rtlCol="0" anchor="ctr"/>
-          <a:lstStyle/>
-          <a:p>
-            <a:pPr indent="0" marL="0">
-              <a:buNone/>
-            </a:pPr>
-            <a:r>
-              <a:rPr lang="en-US" sz="3200" b="1" dirty="0">
+            <a:ext cx="7955280" cy="777240"/>
+          </a:xfrm>
+          <a:prstGeom prst="rect">
+            <a:avLst/>
+          </a:prstGeom>
+          <a:noFill/>
+          <a:ln/>
+        </p:spPr>
+        <p:txBody>
+          <a:bodyPr wrap="square" lIns="0" tIns="0" rIns="0" bIns="0" rtlCol="0" anchor="ctr"/>
+          <a:lstStyle/>
+          <a:p>
+            <a:pPr indent="0" marL="0">
+              <a:buNone/>
+            </a:pPr>
+            <a:r>
+              <a:rPr lang="en-US" sz="2800" b="1" dirty="0">
                 <a:solidFill>
                   <a:srgbClr val="13293D"/>
                 </a:solidFill>
@@ -9574,7 +9574,7 @@
               </a:rPr>
               <a:t>De-identify like a pro: the 3 moves</a:t>
             </a:r>
-            <a:endParaRPr lang="en-US" sz="3200" dirty="0"/>
+            <a:endParaRPr lang="en-US" sz="2800" dirty="0"/>
           </a:p>
         </p:txBody>
       </p:sp>
@@ -10488,7 +10488,7 @@
         <p:spPr>
           <a:xfrm>
             <a:off x="566928" y="128016"/>
-            <a:ext cx="11055096" cy="274320"/>
+            <a:ext cx="7955280" cy="274320"/>
           </a:xfrm>
           <a:prstGeom prst="rect">
             <a:avLst/>
@@ -10527,7 +10527,7 @@
         <p:spPr>
           <a:xfrm>
             <a:off x="548640" y="384048"/>
-            <a:ext cx="11091672" cy="777240"/>
+            <a:ext cx="7955280" cy="777240"/>
           </a:xfrm>
           <a:prstGeom prst="rect">
             <a:avLst/>
@@ -11488,7 +11488,7 @@
         <p:spPr>
           <a:xfrm>
             <a:off x="566928" y="128016"/>
-            <a:ext cx="11055096" cy="274320"/>
+            <a:ext cx="7955280" cy="274320"/>
           </a:xfrm>
           <a:prstGeom prst="rect">
             <a:avLst/>
@@ -11527,7 +11527,7 @@
         <p:spPr>
           <a:xfrm>
             <a:off x="548640" y="384048"/>
-            <a:ext cx="11091672" cy="777240"/>
+            <a:ext cx="7955280" cy="777240"/>
           </a:xfrm>
           <a:prstGeom prst="rect">
             <a:avLst/>
@@ -12223,7 +12223,7 @@
         <p:spPr>
           <a:xfrm>
             <a:off x="566928" y="128016"/>
-            <a:ext cx="11055096" cy="274320"/>
+            <a:ext cx="7955280" cy="274320"/>
           </a:xfrm>
           <a:prstGeom prst="rect">
             <a:avLst/>
@@ -13004,7 +13004,7 @@
         <p:spPr>
           <a:xfrm>
             <a:off x="566928" y="128016"/>
-            <a:ext cx="11055096" cy="274320"/>
+            <a:ext cx="7955280" cy="274320"/>
           </a:xfrm>
           <a:prstGeom prst="rect">
             <a:avLst/>
@@ -14521,7 +14521,7 @@
         <p:spPr>
           <a:xfrm>
             <a:off x="566928" y="128016"/>
-            <a:ext cx="11055096" cy="274320"/>
+            <a:ext cx="7955280" cy="274320"/>
           </a:xfrm>
           <a:prstGeom prst="rect">
             <a:avLst/>
@@ -15743,7 +15743,7 @@
         <p:spPr>
           <a:xfrm>
             <a:off x="566928" y="128016"/>
-            <a:ext cx="11055096" cy="274320"/>
+            <a:ext cx="7955280" cy="274320"/>
           </a:xfrm>
           <a:prstGeom prst="rect">
             <a:avLst/>
@@ -15782,7 +15782,7 @@
         <p:spPr>
           <a:xfrm>
             <a:off x="548640" y="384048"/>
-            <a:ext cx="11091672" cy="777240"/>
+            <a:ext cx="7955280" cy="777240"/>
           </a:xfrm>
           <a:prstGeom prst="rect">
             <a:avLst/>
@@ -16341,7 +16341,7 @@
         <p:spPr>
           <a:xfrm>
             <a:off x="566928" y="128016"/>
-            <a:ext cx="11055096" cy="274320"/>
+            <a:ext cx="7955280" cy="274320"/>
           </a:xfrm>
           <a:prstGeom prst="rect">
             <a:avLst/>
@@ -16380,7 +16380,7 @@
         <p:spPr>
           <a:xfrm>
             <a:off x="548640" y="384048"/>
-            <a:ext cx="11091672" cy="777240"/>
+            <a:ext cx="7955280" cy="777240"/>
           </a:xfrm>
           <a:prstGeom prst="rect">
             <a:avLst/>
@@ -16925,7 +16925,7 @@
         <p:spPr>
           <a:xfrm>
             <a:off x="566928" y="128016"/>
-            <a:ext cx="11055096" cy="274320"/>
+            <a:ext cx="7955280" cy="274320"/>
           </a:xfrm>
           <a:prstGeom prst="rect">
             <a:avLst/>
@@ -16964,7 +16964,7 @@
         <p:spPr>
           <a:xfrm>
             <a:off x="548640" y="384048"/>
-            <a:ext cx="11091672" cy="777240"/>
+            <a:ext cx="7955280" cy="777240"/>
           </a:xfrm>
           <a:prstGeom prst="rect">
             <a:avLst/>
@@ -17712,7 +17712,7 @@
         <p:spPr>
           <a:xfrm>
             <a:off x="566928" y="128016"/>
-            <a:ext cx="11055096" cy="274320"/>
+            <a:ext cx="7955280" cy="274320"/>
           </a:xfrm>
           <a:prstGeom prst="rect">
             <a:avLst/>
@@ -17751,7 +17751,7 @@
         <p:spPr>
           <a:xfrm>
             <a:off x="548640" y="384048"/>
-            <a:ext cx="11091672" cy="777240"/>
+            <a:ext cx="7955280" cy="777240"/>
           </a:xfrm>
           <a:prstGeom prst="rect">
             <a:avLst/>
@@ -18296,7 +18296,7 @@
         <p:spPr>
           <a:xfrm>
             <a:off x="566928" y="128016"/>
-            <a:ext cx="11055096" cy="274320"/>
+            <a:ext cx="7955280" cy="274320"/>
           </a:xfrm>
           <a:prstGeom prst="rect">
             <a:avLst/>
@@ -19077,7 +19077,7 @@
         <p:spPr>
           <a:xfrm>
             <a:off x="566928" y="128016"/>
-            <a:ext cx="11055096" cy="274320"/>
+            <a:ext cx="7955280" cy="274320"/>
           </a:xfrm>
           <a:prstGeom prst="rect">
             <a:avLst/>
@@ -19116,23 +19116,23 @@
         <p:spPr>
           <a:xfrm>
             <a:off x="548640" y="384048"/>
-            <a:ext cx="11091672" cy="777240"/>
-          </a:xfrm>
-          <a:prstGeom prst="rect">
-            <a:avLst/>
-          </a:prstGeom>
-          <a:noFill/>
-          <a:ln/>
-        </p:spPr>
-        <p:txBody>
-          <a:bodyPr wrap="square" lIns="0" tIns="0" rIns="0" bIns="0" rtlCol="0" anchor="ctr"/>
-          <a:lstStyle/>
-          <a:p>
-            <a:pPr indent="0" marL="0">
-              <a:buNone/>
-            </a:pPr>
-            <a:r>
-              <a:rPr lang="en-US" sz="3200" b="1" dirty="0">
+            <a:ext cx="7955280" cy="777240"/>
+          </a:xfrm>
+          <a:prstGeom prst="rect">
+            <a:avLst/>
+          </a:prstGeom>
+          <a:noFill/>
+          <a:ln/>
+        </p:spPr>
+        <p:txBody>
+          <a:bodyPr wrap="square" lIns="0" tIns="0" rIns="0" bIns="0" rtlCol="0" anchor="ctr"/>
+          <a:lstStyle/>
+          <a:p>
+            <a:pPr indent="0" marL="0">
+              <a:buNone/>
+            </a:pPr>
+            <a:r>
+              <a:rPr lang="en-US" sz="2800" b="1" dirty="0">
                 <a:solidFill>
                   <a:srgbClr val="13293D"/>
                 </a:solidFill>
@@ -19142,7 +19142,7 @@
               </a:rPr>
               <a:t>Your first 48 hours: three small things</a:t>
             </a:r>
-            <a:endParaRPr lang="en-US" sz="3200" dirty="0"/>
+            <a:endParaRPr lang="en-US" sz="2800" dirty="0"/>
           </a:p>
         </p:txBody>
       </p:sp>
@@ -19981,7 +19981,7 @@
         <p:spPr>
           <a:xfrm>
             <a:off x="566928" y="128016"/>
-            <a:ext cx="11055096" cy="274320"/>
+            <a:ext cx="7955280" cy="274320"/>
           </a:xfrm>
           <a:prstGeom prst="rect">
             <a:avLst/>
@@ -20020,7 +20020,7 @@
         <p:spPr>
           <a:xfrm>
             <a:off x="548640" y="384048"/>
-            <a:ext cx="11091672" cy="777240"/>
+            <a:ext cx="7955280" cy="777240"/>
           </a:xfrm>
           <a:prstGeom prst="rect">
             <a:avLst/>
@@ -21022,7 +21022,7 @@
         <p:spPr>
           <a:xfrm>
             <a:off x="566928" y="128016"/>
-            <a:ext cx="11055096" cy="274320"/>
+            <a:ext cx="7955280" cy="274320"/>
           </a:xfrm>
           <a:prstGeom prst="rect">
             <a:avLst/>
@@ -22311,7 +22311,7 @@
         <p:spPr>
           <a:xfrm>
             <a:off x="566928" y="128016"/>
-            <a:ext cx="11055096" cy="274320"/>
+            <a:ext cx="7955280" cy="274320"/>
           </a:xfrm>
           <a:prstGeom prst="rect">
             <a:avLst/>
@@ -22350,7 +22350,7 @@
         <p:spPr>
           <a:xfrm>
             <a:off x="548640" y="384048"/>
-            <a:ext cx="11091672" cy="777240"/>
+            <a:ext cx="7955280" cy="777240"/>
           </a:xfrm>
           <a:prstGeom prst="rect">
             <a:avLst/>
@@ -23395,7 +23395,7 @@
         <p:spPr>
           <a:xfrm>
             <a:off x="566928" y="128016"/>
-            <a:ext cx="11055096" cy="274320"/>
+            <a:ext cx="7955280" cy="274320"/>
           </a:xfrm>
           <a:prstGeom prst="rect">
             <a:avLst/>
@@ -23434,7 +23434,7 @@
         <p:spPr>
           <a:xfrm>
             <a:off x="548640" y="384048"/>
-            <a:ext cx="11091672" cy="777240"/>
+            <a:ext cx="7955280" cy="777240"/>
           </a:xfrm>
           <a:prstGeom prst="rect">
             <a:avLst/>
@@ -23993,7 +23993,7 @@
         <p:spPr>
           <a:xfrm>
             <a:off x="566928" y="128016"/>
-            <a:ext cx="11055096" cy="274320"/>
+            <a:ext cx="7955280" cy="274320"/>
           </a:xfrm>
           <a:prstGeom prst="rect">
             <a:avLst/>
@@ -24032,7 +24032,7 @@
         <p:spPr>
           <a:xfrm>
             <a:off x="548640" y="384048"/>
-            <a:ext cx="11091672" cy="777240"/>
+            <a:ext cx="7955280" cy="777240"/>
           </a:xfrm>
           <a:prstGeom prst="rect">
             <a:avLst/>
@@ -24675,7 +24675,7 @@
         <p:spPr>
           <a:xfrm>
             <a:off x="566928" y="128016"/>
-            <a:ext cx="11055096" cy="274320"/>
+            <a:ext cx="7955280" cy="274320"/>
           </a:xfrm>
           <a:prstGeom prst="rect">
             <a:avLst/>
@@ -25232,7 +25232,7 @@
         <p:spPr>
           <a:xfrm>
             <a:off x="566928" y="128016"/>
-            <a:ext cx="11055096" cy="274320"/>
+            <a:ext cx="7955280" cy="274320"/>
           </a:xfrm>
           <a:prstGeom prst="rect">
             <a:avLst/>
@@ -25271,7 +25271,7 @@
         <p:spPr>
           <a:xfrm>
             <a:off x="548640" y="384048"/>
-            <a:ext cx="11091672" cy="777240"/>
+            <a:ext cx="7955280" cy="777240"/>
           </a:xfrm>
           <a:prstGeom prst="rect">
             <a:avLst/>
@@ -26124,7 +26124,7 @@
         <p:spPr>
           <a:xfrm>
             <a:off x="566928" y="128016"/>
-            <a:ext cx="11055096" cy="274320"/>
+            <a:ext cx="7955280" cy="274320"/>
           </a:xfrm>
           <a:prstGeom prst="rect">
             <a:avLst/>
@@ -26163,7 +26163,7 @@
         <p:spPr>
           <a:xfrm>
             <a:off x="548640" y="384048"/>
-            <a:ext cx="11091672" cy="777240"/>
+            <a:ext cx="7955280" cy="777240"/>
           </a:xfrm>
           <a:prstGeom prst="rect">
             <a:avLst/>

--- a/kits/kit01-tpt/Kit01_PresentationDeck.pptx
+++ b/kits/kit01-tpt/Kit01_PresentationDeck.pptx
@@ -7257,17 +7257,17 @@
         </p:nvSpPr>
         <p:spPr>
           <a:xfrm>
-            <a:off x="548640" y="384048"/>
-            <a:ext cx="7955280" cy="777240"/>
-          </a:xfrm>
-          <a:prstGeom prst="rect">
-            <a:avLst/>
-          </a:prstGeom>
-          <a:noFill/>
-          <a:ln/>
-        </p:spPr>
-        <p:txBody>
-          <a:bodyPr wrap="square" lIns="0" tIns="0" rIns="0" bIns="0" rtlCol="0" anchor="ctr"/>
+            <a:off x="548640" y="457200"/>
+            <a:ext cx="7955280" cy="914400"/>
+          </a:xfrm>
+          <a:prstGeom prst="rect">
+            <a:avLst/>
+          </a:prstGeom>
+          <a:noFill/>
+          <a:ln/>
+        </p:spPr>
+        <p:txBody>
+          <a:bodyPr wrap="square" lIns="0" tIns="0" rIns="0" bIns="0" rtlCol="0" anchor="t"/>
           <a:lstStyle/>
           <a:p>
             <a:pPr indent="0" marL="0">
@@ -7946,24 +7946,24 @@
         </p:nvSpPr>
         <p:spPr>
           <a:xfrm>
-            <a:off x="548640" y="384048"/>
-            <a:ext cx="7955280" cy="777240"/>
-          </a:xfrm>
-          <a:prstGeom prst="rect">
-            <a:avLst/>
-          </a:prstGeom>
-          <a:noFill/>
-          <a:ln/>
-        </p:spPr>
-        <p:txBody>
-          <a:bodyPr wrap="square" lIns="0" tIns="0" rIns="0" bIns="0" rtlCol="0" anchor="ctr"/>
-          <a:lstStyle/>
-          <a:p>
-            <a:pPr indent="0" marL="0">
-              <a:buNone/>
-            </a:pPr>
-            <a:r>
-              <a:rPr lang="en-US" sz="3200" b="1" dirty="0">
+            <a:off x="548640" y="457200"/>
+            <a:ext cx="7955280" cy="914400"/>
+          </a:xfrm>
+          <a:prstGeom prst="rect">
+            <a:avLst/>
+          </a:prstGeom>
+          <a:noFill/>
+          <a:ln/>
+        </p:spPr>
+        <p:txBody>
+          <a:bodyPr wrap="square" lIns="0" tIns="0" rIns="0" bIns="0" rtlCol="0" anchor="t"/>
+          <a:lstStyle/>
+          <a:p>
+            <a:pPr indent="0" marL="0">
+              <a:buNone/>
+            </a:pPr>
+            <a:r>
+              <a:rPr lang="en-US" sz="2800" b="1" dirty="0">
                 <a:solidFill>
                   <a:srgbClr val="13293D"/>
                 </a:solidFill>
@@ -7973,7 +7973,7 @@
               </a:rPr>
               <a:t>The rule barely costs you anything</a:t>
             </a:r>
-            <a:endParaRPr lang="en-US" sz="3200" dirty="0"/>
+            <a:endParaRPr lang="en-US" sz="2800" dirty="0"/>
           </a:p>
         </p:txBody>
       </p:sp>
@@ -9903,17 +9903,17 @@
         </p:nvSpPr>
         <p:spPr>
           <a:xfrm>
-            <a:off x="548640" y="384048"/>
-            <a:ext cx="7955280" cy="777240"/>
-          </a:xfrm>
-          <a:prstGeom prst="rect">
-            <a:avLst/>
-          </a:prstGeom>
-          <a:noFill/>
-          <a:ln/>
-        </p:spPr>
-        <p:txBody>
-          <a:bodyPr wrap="square" lIns="0" tIns="0" rIns="0" bIns="0" rtlCol="0" anchor="ctr"/>
+            <a:off x="548640" y="457200"/>
+            <a:ext cx="7955280" cy="914400"/>
+          </a:xfrm>
+          <a:prstGeom prst="rect">
+            <a:avLst/>
+          </a:prstGeom>
+          <a:noFill/>
+          <a:ln/>
+        </p:spPr>
+        <p:txBody>
+          <a:bodyPr wrap="square" lIns="0" tIns="0" rIns="0" bIns="0" rtlCol="0" anchor="t"/>
           <a:lstStyle/>
           <a:p>
             <a:pPr indent="0" marL="0">
@@ -13398,24 +13398,24 @@
         </p:nvSpPr>
         <p:spPr>
           <a:xfrm>
-            <a:off x="548640" y="384048"/>
-            <a:ext cx="7955280" cy="777240"/>
-          </a:xfrm>
-          <a:prstGeom prst="rect">
-            <a:avLst/>
-          </a:prstGeom>
-          <a:noFill/>
-          <a:ln/>
-        </p:spPr>
-        <p:txBody>
-          <a:bodyPr wrap="square" lIns="0" tIns="0" rIns="0" bIns="0" rtlCol="0" anchor="ctr"/>
-          <a:lstStyle/>
-          <a:p>
-            <a:pPr indent="0" marL="0">
-              <a:buNone/>
-            </a:pPr>
-            <a:r>
-              <a:rPr lang="en-US" sz="3200" b="1" dirty="0">
+            <a:off x="548640" y="457200"/>
+            <a:ext cx="7955280" cy="914400"/>
+          </a:xfrm>
+          <a:prstGeom prst="rect">
+            <a:avLst/>
+          </a:prstGeom>
+          <a:noFill/>
+          <a:ln/>
+        </p:spPr>
+        <p:txBody>
+          <a:bodyPr wrap="square" lIns="0" tIns="0" rIns="0" bIns="0" rtlCol="0" anchor="t"/>
+          <a:lstStyle/>
+          <a:p>
+            <a:pPr indent="0" marL="0">
+              <a:buNone/>
+            </a:pPr>
+            <a:r>
+              <a:rPr lang="en-US" sz="2800" b="1" dirty="0">
                 <a:solidFill>
                   <a:srgbClr val="13293D"/>
                 </a:solidFill>
@@ -13425,7 +13425,7 @@
               </a:rPr>
               <a:t>Your first useful prompt: pick one</a:t>
             </a:r>
-            <a:endParaRPr lang="en-US" sz="3200" dirty="0"/>
+            <a:endParaRPr lang="en-US" sz="2800" dirty="0"/>
           </a:p>
         </p:txBody>
       </p:sp>
@@ -19377,24 +19377,24 @@
         </p:nvSpPr>
         <p:spPr>
           <a:xfrm>
-            <a:off x="548640" y="384048"/>
-            <a:ext cx="7955280" cy="777240"/>
-          </a:xfrm>
-          <a:prstGeom prst="rect">
-            <a:avLst/>
-          </a:prstGeom>
-          <a:noFill/>
-          <a:ln/>
-        </p:spPr>
-        <p:txBody>
-          <a:bodyPr wrap="square" lIns="0" tIns="0" rIns="0" bIns="0" rtlCol="0" anchor="ctr"/>
-          <a:lstStyle/>
-          <a:p>
-            <a:pPr indent="0" marL="0">
-              <a:buNone/>
-            </a:pPr>
-            <a:r>
-              <a:rPr lang="en-US" sz="3200" b="1" dirty="0">
+            <a:off x="548640" y="457200"/>
+            <a:ext cx="7955280" cy="914400"/>
+          </a:xfrm>
+          <a:prstGeom prst="rect">
+            <a:avLst/>
+          </a:prstGeom>
+          <a:noFill/>
+          <a:ln/>
+        </p:spPr>
+        <p:txBody>
+          <a:bodyPr wrap="square" lIns="0" tIns="0" rIns="0" bIns="0" rtlCol="0" anchor="t"/>
+          <a:lstStyle/>
+          <a:p>
+            <a:pPr indent="0" marL="0">
+              <a:buNone/>
+            </a:pPr>
+            <a:r>
+              <a:rPr lang="en-US" sz="2800" b="1" dirty="0">
                 <a:solidFill>
                   <a:srgbClr val="13293D"/>
                 </a:solidFill>
@@ -19404,7 +19404,7 @@
               </a:rPr>
               <a:t>Honest limits: the risks are real</a:t>
             </a:r>
-            <a:endParaRPr lang="en-US" sz="3200" dirty="0"/>
+            <a:endParaRPr lang="en-US" sz="2800" dirty="0"/>
           </a:p>
         </p:txBody>
       </p:sp>
@@ -20164,17 +20164,17 @@
         </p:nvSpPr>
         <p:spPr>
           <a:xfrm>
-            <a:off x="548640" y="384048"/>
-            <a:ext cx="7955280" cy="777240"/>
-          </a:xfrm>
-          <a:prstGeom prst="rect">
-            <a:avLst/>
-          </a:prstGeom>
-          <a:noFill/>
-          <a:ln/>
-        </p:spPr>
-        <p:txBody>
-          <a:bodyPr wrap="square" lIns="0" tIns="0" rIns="0" bIns="0" rtlCol="0" anchor="ctr"/>
+            <a:off x="548640" y="457200"/>
+            <a:ext cx="7955280" cy="914400"/>
+          </a:xfrm>
+          <a:prstGeom prst="rect">
+            <a:avLst/>
+          </a:prstGeom>
+          <a:noFill/>
+          <a:ln/>
+        </p:spPr>
+        <p:txBody>
+          <a:bodyPr wrap="square" lIns="0" tIns="0" rIns="0" bIns="0" rtlCol="0" anchor="t"/>
           <a:lstStyle/>
           <a:p>
             <a:pPr indent="0" marL="0">
@@ -22429,17 +22429,17 @@
         </p:nvSpPr>
         <p:spPr>
           <a:xfrm>
-            <a:off x="548640" y="384048"/>
-            <a:ext cx="7955280" cy="777240"/>
-          </a:xfrm>
-          <a:prstGeom prst="rect">
-            <a:avLst/>
-          </a:prstGeom>
-          <a:noFill/>
-          <a:ln/>
-        </p:spPr>
-        <p:txBody>
-          <a:bodyPr wrap="square" lIns="0" tIns="0" rIns="0" bIns="0" rtlCol="0" anchor="ctr"/>
+            <a:off x="548640" y="457200"/>
+            <a:ext cx="7955280" cy="914400"/>
+          </a:xfrm>
+          <a:prstGeom prst="rect">
+            <a:avLst/>
+          </a:prstGeom>
+          <a:noFill/>
+          <a:ln/>
+        </p:spPr>
+        <p:txBody>
+          <a:bodyPr wrap="square" lIns="0" tIns="0" rIns="0" bIns="0" rtlCol="0" anchor="t"/>
           <a:lstStyle/>
           <a:p>
             <a:pPr indent="0" marL="0">
@@ -28593,24 +28593,24 @@
         </p:nvSpPr>
         <p:spPr>
           <a:xfrm>
-            <a:off x="548640" y="384048"/>
-            <a:ext cx="7955280" cy="777240"/>
-          </a:xfrm>
-          <a:prstGeom prst="rect">
-            <a:avLst/>
-          </a:prstGeom>
-          <a:noFill/>
-          <a:ln/>
-        </p:spPr>
-        <p:txBody>
-          <a:bodyPr wrap="square" lIns="0" tIns="0" rIns="0" bIns="0" rtlCol="0" anchor="ctr"/>
-          <a:lstStyle/>
-          <a:p>
-            <a:pPr indent="0" marL="0">
-              <a:buNone/>
-            </a:pPr>
-            <a:r>
-              <a:rPr lang="en-US" sz="3200" b="1" dirty="0">
+            <a:off x="548640" y="457200"/>
+            <a:ext cx="7955280" cy="914400"/>
+          </a:xfrm>
+          <a:prstGeom prst="rect">
+            <a:avLst/>
+          </a:prstGeom>
+          <a:noFill/>
+          <a:ln/>
+        </p:spPr>
+        <p:txBody>
+          <a:bodyPr wrap="square" lIns="0" tIns="0" rIns="0" bIns="0" rtlCol="0" anchor="t"/>
+          <a:lstStyle/>
+          <a:p>
+            <a:pPr indent="0" marL="0">
+              <a:buNone/>
+            </a:pPr>
+            <a:r>
+              <a:rPr lang="en-US" sz="2800" b="1" dirty="0">
                 <a:solidFill>
                   <a:srgbClr val="13293D"/>
                 </a:solidFill>
@@ -28620,7 +28620,7 @@
               </a:rPr>
               <a:t>What it can’t do, at any price</a:t>
             </a:r>
-            <a:endParaRPr lang="en-US" sz="3200" dirty="0"/>
+            <a:endParaRPr lang="en-US" sz="2800" dirty="0"/>
           </a:p>
         </p:txBody>
       </p:sp>

--- a/kits/kit01-tpt/Kit01_PresentationDeck.pptx
+++ b/kits/kit01-tpt/Kit01_PresentationDeck.pptx
@@ -2823,7 +2823,7 @@
           <a:p>
             <a:r>
               <a:rPr lang="en-US" dirty="0"/>
-              <a:t>Next up is Kit 2, Prompting Basics: consistently useful results instead of occasionally lucky ones. Progress tracking and the certificate run through an AI-Ready School membership (ai-readyschool.com). Certificate language is exactly "Certificate of Completion"; check with your district whether it qualifies for local credit.</a:t>
+              <a:t>Next up is Kit 2, Prompting Basics: consistently useful results instead of occasionally lucky ones. The rest of the series is in our TpT store whenever this staff is ready. The exit ticket doubles as documentation of this hour; check with your district whether it qualifies for local credit.</a:t>
             </a:r>
             <a:endParaRPr lang="en-US" dirty="0"/>
           </a:p>
@@ -23952,7 +23952,7 @@
                 <a:ea typeface="Inter" pitchFamily="34" charset="-122"/>
                 <a:cs typeface="Inter" pitchFamily="34" charset="-120"/>
               </a:rPr>
-              <a:t>Finish all eight → the AI-Ready Educator Certificate of Completion (school membership).</a:t>
+              <a:t>All eight sessions are available in our TpT store, individually or bundled.</a:t>
             </a:r>
             <a:pPr indent="0" marL="0">
               <a:buNone/>

--- a/kits/kit01-tpt/Kit01_PresentationDeck.pptx
+++ b/kits/kit01-tpt/Kit01_PresentationDeck.pptx
@@ -1591,7 +1591,7 @@
           <a:p>
             <a:r>
               <a:rPr lang="en-US" dirty="0"/>
-              <a:t>Say: this is the moment the session exists for; everything so far was preparation for you actually typing. Nothing has to be good, it's a sandbox, and we practice like we play: zero student information. Ms. Rivera builds ONE artifact all the way through this lab on screen: her family newsletter blurb, option A. The next six slides are her whole arc, in order: the prompt she types, the draft that comes back, the pushbacks, the invented detail she catches, and the version she actually sends. Tell the room: if you ever feel lost, copy her structure. Announce the tool by name. Energy up; pairs formed inside two minutes.</a:t>
+              <a:t>Say: this is the moment the session exists for, and the lab IS the rule in practice: fifteen minutes of real tasks with zero student information, because if a prompt only works with a child's identity in it, it isn't ready. Ms. Rivera takes the parent email from slide 16, the one she almost typed the unsafe way, and runs it safely end to end on screen: the three moves, the draft that comes back, and the step where the name goes back in. Tell the room: if you ever feel lost, copy her. Announce the tool by name. Energy up; pairs formed inside two minutes.</a:t>
             </a:r>
             <a:endParaRPr lang="en-US" dirty="0"/>
           </a:p>
@@ -1679,7 +1679,7 @@
           <a:p>
             <a:r>
               <a:rPr lang="en-US" dirty="0"/>
-              <a:t>Say: pick whichever prompt is closest to your real job, type it, and read what comes back. Option A works for every role in the building, so point stuck pairs there. Ms. Rivera picks A and fills it in with her fall book fair; her screen is the next three slides, so anyone who feels lost can copy her structure exactly. Circulate. Deputize power users to float. Option D comes from a real carpentry classroom; invite electives staff to swap in their station or lab.</a:t>
+              <a:t>Say: pick the task closest to your real job. First say the prompt in your head the way you would naturally say it, with the student in it. Then strip it with the three moves from slide 18 and type only the safe version. Option A is Ms. Rivera's pick and works for every role in the building, so point stuck pairs there; her rewrite is the next slide. Option D comes from a real carpentry classroom; invite electives staff to swap in their own station or lab. Circulate. Deputize power users to float. The point pairs should feel: the safe version does the whole job.</a:t>
             </a:r>
             <a:endParaRPr lang="en-US" dirty="0"/>
           </a:p>
@@ -1767,7 +1767,7 @@
           <a:p>
             <a:r>
               <a:rPr lang="en-US" dirty="0"/>
-              <a:t>Say: this is Ms. Rivera's screen, our running composite example, and this is what she typed instead of "write something for the book fair." Read the colors off the slide: who the AI should be (role, teal), the job (task, navy), everything about her room and her families (context, amber), and the shape she wants back (format, green). Nobody has to memorize that today; Kit 2 turns it into a formula. Today it is just a picture: at worst, copy what is on this screen and swap in your own event, and your task 1 is done.</a:t>
+              <a:t>Say: this is Ms. Rivera's screen, and this is slide 16 happening for real. The unsafe version named Jayden, his missing assignments, and Tuesday's outburst. Watch the three moves land, and read the colors off the slide: the name becomes "a parent" and "a middle schooler" (strip identity, teal), the specifics become "several missing assignments and a recent difficult day" (generalize, amber), and the rest describes exactly what she needs back (describe the need, green). Ten seconds of editing, and nothing the email needed was lost. At worst, copy her shape and swap in your own task.</a:t>
             </a:r>
             <a:endParaRPr lang="en-US" dirty="0"/>
           </a:p>
@@ -1855,7 +1855,7 @@
           <a:p>
             <a:r>
               <a:rPr lang="en-US" dirty="0"/>
-              <a:t>Say: four seconds later, this comes back. It is polished, it is grammatical, and it sounds like nobody: that beige is what a first draft always sounds like. Read the last line of the slide out loud and stop there; do not point at the invented hours yet, because catching it is the payoff on slide 26. Everyone should have their own draft 1 on screen before you move on.</a:t>
+              <a:t>Say: four seconds later, this comes back. Warm, specific, usable, and look at what is NOT in it: no name, no identity, and nothing missing. The tool needed the situation, never the child. Read the last line of the slide out loud and stop there; do not point at the invented conference yet, because catching it is the payoff on slide 26. Everyone should have their own safe draft on screen before you move on.</a:t>
             </a:r>
             <a:endParaRPr lang="en-US" dirty="0"/>
           </a:p>
@@ -1943,7 +1943,7 @@
           <a:p>
             <a:r>
               <a:rPr lang="en-US" dirty="0"/>
-              <a:t>Say: don't accept the first draft. Tell it what's wrong, like you would an intern: short and blunt, one instruction at a time, because the tool has no feelings and vague feedback gets a vague draft. Two rounds minimum on your own draft 1, right now. Ms. Rivera types the first two on this slide; her screen is next. 45-minute version: skip this task and go straight to the debrief. This is the move that separates people who get real value from people who quit in a week.</a:t>
+              <a:t>Say: task two. Remember the sneaky ones from slide 12? Here are four fresh ones, and this time you fix them. None uses a name, and every one still identifies a child: initials plus a detail, a one-of-a-kind detail, a rare combination, a pasted document. Pick one, run the ten-second test, fix it with the three moves, and type the safe version to check the draft still does the job. The IEP recording is a trap on purpose: pasting or uploading counts as typing. 45-minute version: skip this task and go straight to the debrief. Ms. Rivera's next step, the one everyone asks about, is on the next slide.</a:t>
             </a:r>
             <a:endParaRPr lang="en-US" dirty="0"/>
           </a:p>
@@ -2031,7 +2031,7 @@
           <a:p>
             <a:r>
               <a:rPr lang="en-US" dirty="0"/>
-              <a:t>Say: here is the same blurb after two pushbacks. Warmer, then shorter, one word at a time, and it finally sounds like a person who knows these families. That took her about forty seconds. Point out that she changed nothing by hand yet; she only told it what was wrong. Then hold the room here: the sentence that matters is still hiding in this draft, and the next slide is where she finds it.</a:t>
+              <a:t>Say: and here is the answer to the question half of you are holding: "but the email needs Jayden's name." It does. So watch where it goes in. She pastes the safe draft into her own school email, and there, and only there, she adds his name, the real assignments, and what actually happened Tuesday. Identity goes in last, in your tools, never in theirs; the AI never met Jayden. Then hold the room: one sentence in this draft is still riding along from the AI, and the next slide is where she finds it.</a:t>
             </a:r>
             <a:endParaRPr lang="en-US" dirty="0"/>
           </a:p>
@@ -2119,7 +2119,7 @@
           <a:p>
             <a:r>
               <a:rPr lang="en-US" dirty="0"/>
-              <a:t>Say: before she sent it, she read it once, slowly, and found the sentence she never typed: the fair "runs all week, 8:00 to 3:00." She checked the real flyer, fixed the hours to Tuesday and Thursday, 3:00 to 6:30, and sent it. This is slide 6 happening in a real classroom task: the tool predicts likely words, so it fills a gap with something plausible, and two rounds of pushback will not catch that for you. Tell the room to read their own draft the same way before the debrief, and to say "got one" out loud if they find something.</a:t>
+              <a:t>Say: before she sent it, she read it once, slowly, and found the sentence she never typed: "as we discussed at last week's conference." There was no conference. This is slide 6 happening in a real family email: the tool predicts likely words, fills gaps with something plausible, and neither the three moves nor the personalization will catch that for you. She cut it, checked every remaining detail, and sent it. Tell the room to read their own draft the same way before the debrief, and to say "got one" out loud if they find something.</a:t>
             </a:r>
             <a:endParaRPr lang="en-US" dirty="0"/>
           </a:p>
@@ -2207,7 +2207,7 @@
           <a:p>
             <a:r>
               <a:rPr lang="en-US" dirty="0"/>
-              <a:t>Say: what surprised you, what was better than you expected, what was worse, and did anyone catch it being wrong? If the room saw an AI mistake, spotlight it warmly; it’s the best possible outcome of the lab. If nobody caught one, point back at Ms. Rivera’s invented book-fair hours on slide 26; the read-through is where errors surface. Take 3–4 voices, a minute each.</a:t>
+              <a:t>Say: what did the safe version cost you (usually nothing), what surprised you about how little the tool needed to know, and did anyone catch a detail it invented? If the room caught one, spotlight it warmly; it's the best possible outcome of the lab. If nobody did, point back at Ms. Rivera's invented conference on slide 26; the read-through is where inventions surface. Take 3–4 voices, a minute each.</a:t>
             </a:r>
             <a:endParaRPr lang="en-US" dirty="0"/>
           </a:p>
@@ -12564,7 +12564,7 @@
                 <a:ea typeface="Inter" pitchFamily="34" charset="-122"/>
                 <a:cs typeface="Inter" pitchFamily="34" charset="-120"/>
               </a:rPr>
-              <a:t>Her lab pick, one artifact all the way through: the family newsletter blurb.</a:t>
+              <a:t>Her lab artifact: the slide-16 parent email, run safely end to end.</a:t>
             </a:r>
             <a:endParaRPr lang="en-US" sz="1000" dirty="0"/>
           </a:p>
@@ -12784,7 +12784,7 @@
                 <a:ea typeface="Inter" pitchFamily="34" charset="-122"/>
                 <a:cs typeface="Inter" pitchFamily="34" charset="-120"/>
               </a:rPr>
-              <a:t>No student information: we practice like we play</a:t>
+              <a:t>The rule is live: zero student information, real tasks anyway</a:t>
             </a:r>
             <a:endParaRPr lang="en-US" sz="2100" dirty="0"/>
           </a:p>
@@ -12990,7 +12990,7 @@
                 <a:ea typeface="Inter" pitchFamily="34" charset="-122"/>
                 <a:cs typeface="Inter" pitchFamily="34" charset="-120"/>
               </a:rPr>
-              <a:t>When it gives you something mediocre, don’t settle</a:t>
+              <a:t>If a prompt only works with a child’s identity in it, it isn’t ready</a:t>
             </a:r>
             <a:endParaRPr lang="en-US" sz="2100" dirty="0"/>
           </a:p>
@@ -13345,7 +13345,7 @@
                 <a:ea typeface="Inter" pitchFamily="34" charset="-122"/>
                 <a:cs typeface="Inter" pitchFamily="34" charset="-120"/>
               </a:rPr>
-              <a:t>Her pick: option A, filled in with her fall book fair. Her screen is next.</a:t>
+              <a:t>Her pick: option A, the parent email. Her three moves are next.</a:t>
             </a:r>
             <a:endParaRPr lang="en-US" sz="1000" dirty="0"/>
           </a:p>
@@ -13423,7 +13423,7 @@
                 <a:ea typeface="Inter" pitchFamily="34" charset="-122"/>
                 <a:cs typeface="Inter" pitchFamily="34" charset="-120"/>
               </a:rPr>
-              <a:t>Your first useful prompt: pick one</a:t>
+              <a:t>Make it safe, then make it work</a:t>
             </a:r>
             <a:endParaRPr lang="en-US" sz="2800" dirty="0"/>
           </a:p>
@@ -13437,12 +13437,12 @@
         </p:nvSpPr>
         <p:spPr>
           <a:xfrm>
-            <a:off x="640080" y="1371600"/>
-            <a:ext cx="10972800" cy="960120"/>
+            <a:off x="640080" y="1325880"/>
+            <a:ext cx="10972800" cy="1024128"/>
           </a:xfrm>
           <a:prstGeom prst="roundRect">
             <a:avLst>
-              <a:gd name="adj" fmla="val 8571"/>
+              <a:gd name="adj" fmla="val 8036"/>
             </a:avLst>
           </a:prstGeom>
           <a:solidFill>
@@ -13464,7 +13464,7 @@
         </p:nvSpPr>
         <p:spPr>
           <a:xfrm>
-            <a:off x="868680" y="1645920"/>
+            <a:off x="868680" y="1627632"/>
             <a:ext cx="411480" cy="411480"/>
           </a:xfrm>
           <a:prstGeom prst="ellipse">
@@ -13489,7 +13489,7 @@
         </p:nvSpPr>
         <p:spPr>
           <a:xfrm>
-            <a:off x="868680" y="1645920"/>
+            <a:off x="868680" y="1627632"/>
             <a:ext cx="411480" cy="411480"/>
           </a:xfrm>
           <a:prstGeom prst="rect">
@@ -13528,8 +13528,8 @@
         </p:nvSpPr>
         <p:spPr>
           <a:xfrm>
-            <a:off x="1463040" y="1463040"/>
-            <a:ext cx="3657600" cy="237744"/>
+            <a:off x="1463040" y="1399032"/>
+            <a:ext cx="9966960" cy="237744"/>
           </a:xfrm>
           <a:prstGeom prst="rect">
             <a:avLst/>
@@ -13553,7 +13553,21 @@
                 <a:ea typeface="Inter" pitchFamily="34" charset="-122"/>
                 <a:cs typeface="Inter" pitchFamily="34" charset="-120"/>
               </a:rPr>
-              <a:t>FAMILIES</a:t>
+              <a:t>FAMILIES   </a:t>
+            </a:r>
+            <a:pPr indent="0" marL="0">
+              <a:buNone/>
+            </a:pPr>
+            <a:r>
+              <a:rPr lang="en-US" sz="1050" i="1" dirty="0">
+                <a:solidFill>
+                  <a:srgbClr val="B4453A"/>
+                </a:solidFill>
+                <a:latin typeface="Inter" pitchFamily="34" charset="0"/>
+                <a:ea typeface="Inter" pitchFamily="34" charset="-122"/>
+                <a:cs typeface="Inter" pitchFamily="34" charset="-120"/>
+              </a:rPr>
+              <a:t>instead of: an email about [name]’s missing work and rough day</a:t>
             </a:r>
             <a:endParaRPr lang="en-US" sz="1000" dirty="0"/>
           </a:p>
@@ -13567,8 +13581,8 @@
         </p:nvSpPr>
         <p:spPr>
           <a:xfrm>
-            <a:off x="1463040" y="1719072"/>
-            <a:ext cx="9646920" cy="548640"/>
+            <a:off x="1463040" y="1655064"/>
+            <a:ext cx="9966960" cy="658368"/>
           </a:xfrm>
           <a:prstGeom prst="rect">
             <a:avLst/>
@@ -13584,7 +13598,7 @@
               <a:buNone/>
             </a:pPr>
             <a:r>
-              <a:rPr lang="en-US" sz="1600" dirty="0">
+              <a:rPr lang="en-US" sz="1350" dirty="0">
                 <a:solidFill>
                   <a:srgbClr val="1B1F24"/>
                 </a:solidFill>
@@ -13592,9 +13606,9 @@
                 <a:ea typeface="Inter" pitchFamily="34" charset="-122"/>
                 <a:cs typeface="Inter" pitchFamily="34" charset="-120"/>
               </a:rPr>
-              <a:t>“Write a warm, professional newsletter blurb for families about [any upcoming school event], under 120 words.”</a:t>
-            </a:r>
-            <a:endParaRPr lang="en-US" sz="1600" dirty="0"/>
+              <a:t>“Write a warm, professional email to a parent about a middle schooler with several missing assignments and a recent difficult day. Firm but supportive; end by inviting a conversation.”</a:t>
+            </a:r>
+            <a:endParaRPr lang="en-US" sz="1350" dirty="0"/>
           </a:p>
         </p:txBody>
       </p:sp>
@@ -13607,11 +13621,11 @@
         <p:spPr>
           <a:xfrm>
             <a:off x="640080" y="2441448"/>
-            <a:ext cx="10972800" cy="960120"/>
+            <a:ext cx="10972800" cy="1024128"/>
           </a:xfrm>
           <a:prstGeom prst="roundRect">
             <a:avLst>
-              <a:gd name="adj" fmla="val 8571"/>
+              <a:gd name="adj" fmla="val 8036"/>
             </a:avLst>
           </a:prstGeom>
           <a:solidFill>
@@ -13633,7 +13647,7 @@
         </p:nvSpPr>
         <p:spPr>
           <a:xfrm>
-            <a:off x="868680" y="2715768"/>
+            <a:off x="868680" y="2743200"/>
             <a:ext cx="411480" cy="411480"/>
           </a:xfrm>
           <a:prstGeom prst="ellipse">
@@ -13658,7 +13672,7 @@
         </p:nvSpPr>
         <p:spPr>
           <a:xfrm>
-            <a:off x="868680" y="2715768"/>
+            <a:off x="868680" y="2743200"/>
             <a:ext cx="411480" cy="411480"/>
           </a:xfrm>
           <a:prstGeom prst="rect">
@@ -13697,8 +13711,8 @@
         </p:nvSpPr>
         <p:spPr>
           <a:xfrm>
-            <a:off x="1463040" y="2532888"/>
-            <a:ext cx="3657600" cy="237744"/>
+            <a:off x="1463040" y="2514600"/>
+            <a:ext cx="9966960" cy="237744"/>
           </a:xfrm>
           <a:prstGeom prst="rect">
             <a:avLst/>
@@ -13722,7 +13736,21 @@
                 <a:ea typeface="Inter" pitchFamily="34" charset="-122"/>
                 <a:cs typeface="Inter" pitchFamily="34" charset="-120"/>
               </a:rPr>
-              <a:t>ASSESSMENT</a:t>
+              <a:t>SUPPORT   </a:t>
+            </a:r>
+            <a:pPr indent="0" marL="0">
+              <a:buNone/>
+            </a:pPr>
+            <a:r>
+              <a:rPr lang="en-US" sz="1050" i="1" dirty="0">
+                <a:solidFill>
+                  <a:srgbClr val="B4453A"/>
+                </a:solidFill>
+                <a:latin typeface="Inter" pitchFamily="34" charset="0"/>
+                <a:ea typeface="Inter" pitchFamily="34" charset="-122"/>
+                <a:cs typeface="Inter" pitchFamily="34" charset="-120"/>
+              </a:rPr>
+              <a:t>instead of: what to do about [name], who has shut down in class</a:t>
             </a:r>
             <a:endParaRPr lang="en-US" sz="1000" dirty="0"/>
           </a:p>
@@ -13736,8 +13764,8 @@
         </p:nvSpPr>
         <p:spPr>
           <a:xfrm>
-            <a:off x="1463040" y="2788920"/>
-            <a:ext cx="9646920" cy="548640"/>
+            <a:off x="1463040" y="2770632"/>
+            <a:ext cx="9966960" cy="658368"/>
           </a:xfrm>
           <a:prstGeom prst="rect">
             <a:avLst/>
@@ -13753,7 +13781,7 @@
               <a:buNone/>
             </a:pPr>
             <a:r>
-              <a:rPr lang="en-US" sz="1600" dirty="0">
+              <a:rPr lang="en-US" sz="1350" dirty="0">
                 <a:solidFill>
                   <a:srgbClr val="1B1F24"/>
                 </a:solidFill>
@@ -13761,9 +13789,9 @@
                 <a:ea typeface="Inter" pitchFamily="34" charset="-122"/>
                 <a:cs typeface="Inter" pitchFamily="34" charset="-120"/>
               </a:rPr>
-              <a:t>“Create a five-question review quiz on [any topic you teach], mixed difficulty, with an answer key.”</a:t>
-            </a:r>
-            <a:endParaRPr lang="en-US" sz="1600" dirty="0"/>
+              <a:t>“Give me five re-engagement strategies for a student who has stopped participating in class, each under two sentences, usable this week.”</a:t>
+            </a:r>
+            <a:endParaRPr lang="en-US" sz="1350" dirty="0"/>
           </a:p>
         </p:txBody>
       </p:sp>
@@ -13775,12 +13803,12 @@
         </p:nvSpPr>
         <p:spPr>
           <a:xfrm>
-            <a:off x="640080" y="3511296"/>
-            <a:ext cx="10972800" cy="960120"/>
+            <a:off x="640080" y="3557016"/>
+            <a:ext cx="10972800" cy="1024128"/>
           </a:xfrm>
           <a:prstGeom prst="roundRect">
             <a:avLst>
-              <a:gd name="adj" fmla="val 8571"/>
+              <a:gd name="adj" fmla="val 8036"/>
             </a:avLst>
           </a:prstGeom>
           <a:solidFill>
@@ -13802,7 +13830,7 @@
         </p:nvSpPr>
         <p:spPr>
           <a:xfrm>
-            <a:off x="868680" y="3785616"/>
+            <a:off x="868680" y="3858768"/>
             <a:ext cx="411480" cy="411480"/>
           </a:xfrm>
           <a:prstGeom prst="ellipse">
@@ -13827,7 +13855,7 @@
         </p:nvSpPr>
         <p:spPr>
           <a:xfrm>
-            <a:off x="868680" y="3785616"/>
+            <a:off x="868680" y="3858768"/>
             <a:ext cx="411480" cy="411480"/>
           </a:xfrm>
           <a:prstGeom prst="rect">
@@ -13866,8 +13894,8 @@
         </p:nvSpPr>
         <p:spPr>
           <a:xfrm>
-            <a:off x="1463040" y="3602736"/>
-            <a:ext cx="3657600" cy="237744"/>
+            <a:off x="1463040" y="3630168"/>
+            <a:ext cx="9966960" cy="237744"/>
           </a:xfrm>
           <a:prstGeom prst="rect">
             <a:avLst/>
@@ -13891,7 +13919,21 @@
                 <a:ea typeface="Inter" pitchFamily="34" charset="-122"/>
                 <a:cs typeface="Inter" pitchFamily="34" charset="-120"/>
               </a:rPr>
-              <a:t>DIFFERENTIATION</a:t>
+              <a:t>DIFFERENTIATION   </a:t>
+            </a:r>
+            <a:pPr indent="0" marL="0">
+              <a:buNone/>
+            </a:pPr>
+            <a:r>
+              <a:rPr lang="en-US" sz="1050" i="1" dirty="0">
+                <a:solidFill>
+                  <a:srgbClr val="B4453A"/>
+                </a:solidFill>
+                <a:latin typeface="Inter" pitchFamily="34" charset="0"/>
+                <a:ea typeface="Inter" pitchFamily="34" charset="-122"/>
+                <a:cs typeface="Inter" pitchFamily="34" charset="-120"/>
+              </a:rPr>
+              <a:t>instead of: rewrite this for [name]’s IEP</a:t>
             </a:r>
             <a:endParaRPr lang="en-US" sz="1000" dirty="0"/>
           </a:p>
@@ -13905,8 +13947,8 @@
         </p:nvSpPr>
         <p:spPr>
           <a:xfrm>
-            <a:off x="1463040" y="3858768"/>
-            <a:ext cx="9646920" cy="548640"/>
+            <a:off x="1463040" y="3886200"/>
+            <a:ext cx="9966960" cy="658368"/>
           </a:xfrm>
           <a:prstGeom prst="rect">
             <a:avLst/>
@@ -13922,7 +13964,7 @@
               <a:buNone/>
             </a:pPr>
             <a:r>
-              <a:rPr lang="en-US" sz="1600" dirty="0">
+              <a:rPr lang="en-US" sz="1350" dirty="0">
                 <a:solidFill>
                   <a:srgbClr val="1B1F24"/>
                 </a:solidFill>
@@ -13930,9 +13972,9 @@
                 <a:ea typeface="Inter" pitchFamily="34" charset="-122"/>
                 <a:cs typeface="Inter" pitchFamily="34" charset="-120"/>
               </a:rPr>
-              <a:t>“Rewrite this paragraph at three different reading levels.” Then paste any paragraph you already have.</a:t>
-            </a:r>
-            <a:endParaRPr lang="en-US" sz="1600" dirty="0"/>
+              <a:t>“Rewrite this passage at a 2nd-grade reading level, same key ideas, and add a five-word picture-supported vocabulary list: [paste].”</a:t>
+            </a:r>
+            <a:endParaRPr lang="en-US" sz="1350" dirty="0"/>
           </a:p>
         </p:txBody>
       </p:sp>
@@ -13944,12 +13986,12 @@
         </p:nvSpPr>
         <p:spPr>
           <a:xfrm>
-            <a:off x="640080" y="4581144"/>
-            <a:ext cx="10972800" cy="960120"/>
+            <a:off x="640080" y="4672584"/>
+            <a:ext cx="10972800" cy="1024128"/>
           </a:xfrm>
           <a:prstGeom prst="roundRect">
             <a:avLst>
-              <a:gd name="adj" fmla="val 8571"/>
+              <a:gd name="adj" fmla="val 8036"/>
             </a:avLst>
           </a:prstGeom>
           <a:solidFill>
@@ -13971,7 +14013,7 @@
         </p:nvSpPr>
         <p:spPr>
           <a:xfrm>
-            <a:off x="868680" y="4855464"/>
+            <a:off x="868680" y="4974336"/>
             <a:ext cx="411480" cy="411480"/>
           </a:xfrm>
           <a:prstGeom prst="ellipse">
@@ -13996,7 +14038,7 @@
         </p:nvSpPr>
         <p:spPr>
           <a:xfrm>
-            <a:off x="868680" y="4855464"/>
+            <a:off x="868680" y="4974336"/>
             <a:ext cx="411480" cy="411480"/>
           </a:xfrm>
           <a:prstGeom prst="rect">
@@ -14035,8 +14077,8 @@
         </p:nvSpPr>
         <p:spPr>
           <a:xfrm>
-            <a:off x="1463040" y="4672584"/>
-            <a:ext cx="3657600" cy="237744"/>
+            <a:off x="1463040" y="4745736"/>
+            <a:ext cx="9966960" cy="237744"/>
           </a:xfrm>
           <a:prstGeom prst="rect">
             <a:avLst/>
@@ -14060,7 +14102,21 @@
                 <a:ea typeface="Inter" pitchFamily="34" charset="-122"/>
                 <a:cs typeface="Inter" pitchFamily="34" charset="-120"/>
               </a:rPr>
-              <a:t>CTE &amp; ELECTIVES</a:t>
+              <a:t>CTE &amp; ELECTIVES   </a:t>
+            </a:r>
+            <a:pPr indent="0" marL="0">
+              <a:buNone/>
+            </a:pPr>
+            <a:r>
+              <a:rPr lang="en-US" sz="1050" i="1" dirty="0">
+                <a:solidFill>
+                  <a:srgbClr val="B4453A"/>
+                </a:solidFill>
+                <a:latin typeface="Inter" pitchFamily="34" charset="0"/>
+                <a:ea typeface="Inter" pitchFamily="34" charset="-122"/>
+                <a:cs typeface="Inter" pitchFamily="34" charset="-120"/>
+              </a:rPr>
+              <a:t>instead of: a write-up about [name]’s close call at the saw</a:t>
             </a:r>
             <a:endParaRPr lang="en-US" sz="1000" dirty="0"/>
           </a:p>
@@ -14074,8 +14130,8 @@
         </p:nvSpPr>
         <p:spPr>
           <a:xfrm>
-            <a:off x="1463040" y="4928616"/>
-            <a:ext cx="9646920" cy="548640"/>
+            <a:off x="1463040" y="5001768"/>
+            <a:ext cx="9966960" cy="658368"/>
           </a:xfrm>
           <a:prstGeom prst="rect">
             <a:avLst/>
@@ -14091,7 +14147,7 @@
               <a:buNone/>
             </a:pPr>
             <a:r>
-              <a:rPr lang="en-US" sz="1600" dirty="0">
+              <a:rPr lang="en-US" sz="1350" dirty="0">
                 <a:solidFill>
                   <a:srgbClr val="1B1F24"/>
                 </a:solidFill>
@@ -14099,9 +14155,9 @@
                 <a:ea typeface="Inter" pitchFamily="34" charset="-122"/>
                 <a:cs typeface="Inter" pitchFamily="34" charset="-120"/>
               </a:rPr>
-              <a:t>“Create a five-question tool safety check for the miter saw station, mixed question formats, with an answer key.” Swap in any station, lab, kitchen, or instrument.</a:t>
-            </a:r>
-            <a:endParaRPr lang="en-US" sz="1600" dirty="0"/>
+              <a:t>“Draft a two-minute safety refresher for the miter saw station after a close call. No blame; three checks students repeat back. Swap in any station or lab.”</a:t>
+            </a:r>
+            <a:endParaRPr lang="en-US" sz="1350" dirty="0"/>
           </a:p>
         </p:txBody>
       </p:sp>
@@ -14113,8 +14169,8 @@
         </p:nvSpPr>
         <p:spPr>
           <a:xfrm>
-            <a:off x="640080" y="5715000"/>
-            <a:ext cx="10972800" cy="411480"/>
+            <a:off x="640080" y="5806440"/>
+            <a:ext cx="10972800" cy="365760"/>
           </a:xfrm>
           <a:prstGeom prst="rect">
             <a:avLst/>
@@ -14130,7 +14186,7 @@
               <a:buNone/>
             </a:pPr>
             <a:r>
-              <a:rPr lang="en-US" sz="1600" i="1" dirty="0">
+              <a:rPr lang="en-US" sz="1500" i="1" dirty="0">
                 <a:solidFill>
                   <a:srgbClr val="5B6B7A"/>
                 </a:solidFill>
@@ -14138,9 +14194,9 @@
                 <a:ea typeface="Inter" pitchFamily="34" charset="-122"/>
                 <a:cs typeface="Inter" pitchFamily="34" charset="-120"/>
               </a:rPr>
-              <a:t>Pick whichever is closest to your real job. Type it. Read what comes back.</a:t>
-            </a:r>
-            <a:endParaRPr lang="en-US" sz="1600" dirty="0"/>
+              <a:t>Say the unsafe version in your head. Strip it with the 3 moves. Type only the safe version.</a:t>
+            </a:r>
+            <a:endParaRPr lang="en-US" sz="1500" dirty="0"/>
           </a:p>
         </p:txBody>
       </p:sp>
@@ -14364,7 +14420,7 @@
                 <a:ea typeface="Inter" pitchFamily="34" charset="-122"/>
                 <a:cs typeface="Inter" pitchFamily="34" charset="-120"/>
               </a:rPr>
-              <a:t>The prompt she actually types</a:t>
+              <a:t>The rewrite she does in ten seconds</a:t>
             </a:r>
             <a:endParaRPr lang="en-US" sz="3200" dirty="0"/>
           </a:p>
@@ -14379,23 +14435,23 @@
         <p:spPr>
           <a:xfrm>
             <a:off x="640080" y="1298448"/>
-            <a:ext cx="10972800" cy="365760"/>
-          </a:xfrm>
-          <a:prstGeom prst="rect">
-            <a:avLst/>
-          </a:prstGeom>
-          <a:noFill/>
-          <a:ln/>
-        </p:spPr>
-        <p:txBody>
-          <a:bodyPr wrap="square" lIns="0" tIns="0" rIns="0" bIns="0" rtlCol="0" anchor="ctr"/>
-          <a:lstStyle/>
-          <a:p>
-            <a:pPr indent="0" marL="0">
-              <a:buNone/>
-            </a:pPr>
-            <a:r>
-              <a:rPr lang="en-US" sz="1600" b="1" dirty="0">
+            <a:ext cx="10972800" cy="566928"/>
+          </a:xfrm>
+          <a:prstGeom prst="rect">
+            <a:avLst/>
+          </a:prstGeom>
+          <a:noFill/>
+          <a:ln/>
+        </p:spPr>
+        <p:txBody>
+          <a:bodyPr wrap="square" lIns="0" tIns="0" rIns="0" bIns="0" rtlCol="0" anchor="t"/>
+          <a:lstStyle/>
+          <a:p>
+            <a:pPr indent="0" marL="0">
+              <a:buNone/>
+            </a:pPr>
+            <a:r>
+              <a:rPr lang="en-US" sz="1100" b="1" spc="150" kern="0" dirty="0">
                 <a:solidFill>
                   <a:srgbClr val="B4453A"/>
                 </a:solidFill>
@@ -14403,13 +14459,13 @@
                 <a:ea typeface="Inter" pitchFamily="34" charset="-122"/>
                 <a:cs typeface="Inter" pitchFamily="34" charset="-120"/>
               </a:rPr>
-              <a:t>BEFORE   </a:t>
-            </a:r>
-            <a:pPr indent="0" marL="0">
-              <a:buNone/>
-            </a:pPr>
-            <a:r>
-              <a:rPr lang="en-US" sz="1600" i="1" dirty="0">
+              <a:t>WHAT SHE ALMOST TYPED   </a:t>
+            </a:r>
+            <a:pPr indent="0" marL="0">
+              <a:buNone/>
+            </a:pPr>
+            <a:r>
+              <a:rPr lang="en-US" sz="1500" i="1" dirty="0">
                 <a:solidFill>
                   <a:srgbClr val="5B6B7A"/>
                 </a:solidFill>
@@ -14417,9 +14473,9 @@
                 <a:ea typeface="Inter" pitchFamily="34" charset="-122"/>
                 <a:cs typeface="Inter" pitchFamily="34" charset="-120"/>
               </a:rPr>
-              <a:t>“Write something for the book fair.”</a:t>
-            </a:r>
-            <a:endParaRPr lang="en-US" sz="1600" dirty="0"/>
+              <a:t>“Write an email to Jayden Miller’s mom about his three missing assignments and his outburst in class Tuesday.”</a:t>
+            </a:r>
+            <a:endParaRPr lang="en-US" sz="1100" dirty="0"/>
           </a:p>
         </p:txBody>
       </p:sp>
@@ -14431,12 +14487,12 @@
         </p:nvSpPr>
         <p:spPr>
           <a:xfrm>
-            <a:off x="640080" y="1783080"/>
-            <a:ext cx="10972800" cy="3108960"/>
+            <a:off x="640080" y="1965960"/>
+            <a:ext cx="10972800" cy="2880360"/>
           </a:xfrm>
           <a:prstGeom prst="roundRect">
             <a:avLst>
-              <a:gd name="adj" fmla="val 2941"/>
+              <a:gd name="adj" fmla="val 3175"/>
             </a:avLst>
           </a:prstGeom>
           <a:solidFill>
@@ -14458,7 +14514,7 @@
         </p:nvSpPr>
         <p:spPr>
           <a:xfrm>
-            <a:off x="640080" y="1783080"/>
+            <a:off x="640080" y="1965960"/>
             <a:ext cx="10972800" cy="384048"/>
           </a:xfrm>
           <a:prstGeom prst="roundRect">
@@ -14485,7 +14541,7 @@
         </p:nvSpPr>
         <p:spPr>
           <a:xfrm>
-            <a:off x="868680" y="1901952"/>
+            <a:off x="868680" y="2084832"/>
             <a:ext cx="146304" cy="146304"/>
           </a:xfrm>
           <a:prstGeom prst="ellipse">
@@ -14510,7 +14566,7 @@
         </p:nvSpPr>
         <p:spPr>
           <a:xfrm>
-            <a:off x="1115568" y="1901952"/>
+            <a:off x="1115568" y="2084832"/>
             <a:ext cx="146304" cy="146304"/>
           </a:xfrm>
           <a:prstGeom prst="ellipse">
@@ -14535,7 +14591,7 @@
         </p:nvSpPr>
         <p:spPr>
           <a:xfrm>
-            <a:off x="1362456" y="1901952"/>
+            <a:off x="1362456" y="2084832"/>
             <a:ext cx="146304" cy="146304"/>
           </a:xfrm>
           <a:prstGeom prst="ellipse">
@@ -14560,7 +14616,7 @@
         </p:nvSpPr>
         <p:spPr>
           <a:xfrm>
-            <a:off x="1783080" y="1783080"/>
+            <a:off x="1783080" y="1965960"/>
             <a:ext cx="9692640" cy="384048"/>
           </a:xfrm>
           <a:prstGeom prst="rect">
@@ -14599,12 +14655,12 @@
         </p:nvSpPr>
         <p:spPr>
           <a:xfrm>
-            <a:off x="1554480" y="2331720"/>
-            <a:ext cx="9646920" cy="2423160"/>
+            <a:off x="1554480" y="2514600"/>
+            <a:ext cx="9646920" cy="2148840"/>
           </a:xfrm>
           <a:prstGeom prst="roundRect">
             <a:avLst>
-              <a:gd name="adj" fmla="val 4528"/>
+              <a:gd name="adj" fmla="val 5106"/>
             </a:avLst>
           </a:prstGeom>
           <a:solidFill>
@@ -14626,8 +14682,8 @@
         </p:nvSpPr>
         <p:spPr>
           <a:xfrm>
-            <a:off x="1783080" y="2395728"/>
-            <a:ext cx="9189720" cy="2286000"/>
+            <a:off x="1783080" y="2578608"/>
+            <a:ext cx="9189720" cy="2011680"/>
           </a:xfrm>
           <a:prstGeom prst="rect">
             <a:avLst/>
@@ -14641,12 +14697,12 @@
           <a:p>
             <a:pPr indent="0" marL="0">
               <a:lnSpc>
-                <a:spcPct val="110000"/>
+                <a:spcPct val="112000"/>
               </a:lnSpc>
               <a:buNone/>
             </a:pPr>
             <a:r>
-              <a:rPr lang="en-US" sz="1700" b="1" dirty="0">
+              <a:rPr lang="en-US" sz="1800" b="1" dirty="0">
                 <a:solidFill>
                   <a:srgbClr val="2A9D8F"/>
                 </a:solidFill>
@@ -14654,16 +14710,72 @@
                 <a:ea typeface="Inter" pitchFamily="34" charset="-122"/>
                 <a:cs typeface="Inter" pitchFamily="34" charset="-120"/>
               </a:rPr>
-              <a:t>“You are a warm, experienced 4th grade teacher writing to families. </a:t>
+              <a:t>“Write a warm, professional email to a parent </a:t>
             </a:r>
             <a:pPr indent="0" marL="0">
               <a:lnSpc>
-                <a:spcPct val="110000"/>
+                <a:spcPct val="112000"/>
               </a:lnSpc>
               <a:buNone/>
             </a:pPr>
             <a:r>
-              <a:rPr lang="en-US" sz="1700" b="1" dirty="0">
+              <a:rPr lang="en-US" sz="1800" b="1" dirty="0">
+                <a:solidFill>
+                  <a:srgbClr val="B07914"/>
+                </a:solidFill>
+                <a:latin typeface="Inter" pitchFamily="34" charset="0"/>
+                <a:ea typeface="Inter" pitchFamily="34" charset="-122"/>
+                <a:cs typeface="Inter" pitchFamily="34" charset="-120"/>
+              </a:rPr>
+              <a:t>about a middle schooler with several missing assignments and a recent difficult day in class. </a:t>
+            </a:r>
+            <a:pPr indent="0" marL="0">
+              <a:lnSpc>
+                <a:spcPct val="112000"/>
+              </a:lnSpc>
+              <a:buNone/>
+            </a:pPr>
+            <a:r>
+              <a:rPr lang="en-US" sz="1800" b="1" dirty="0">
+                <a:solidFill>
+                  <a:srgbClr val="2E7D5B"/>
+                </a:solidFill>
+                <a:latin typeface="Inter" pitchFamily="34" charset="0"/>
+                <a:ea typeface="Inter" pitchFamily="34" charset="-122"/>
+                <a:cs typeface="Inter" pitchFamily="34" charset="-120"/>
+              </a:rPr>
+              <a:t>Firm but supportive; end by inviting a conversation.”</a:t>
+            </a:r>
+            <a:endParaRPr lang="en-US" sz="1800" dirty="0"/>
+          </a:p>
+        </p:txBody>
+      </p:sp>
+      <p:sp>
+        <p:nvSpPr>
+          <p:cNvPr id="16" name="Text 13"/>
+          <p:cNvSpPr/>
+          <p:nvPr/>
+        </p:nvSpPr>
+        <p:spPr>
+          <a:xfrm>
+            <a:off x="640080" y="5047488"/>
+            <a:ext cx="10972800" cy="384048"/>
+          </a:xfrm>
+          <a:prstGeom prst="rect">
+            <a:avLst/>
+          </a:prstGeom>
+          <a:noFill/>
+          <a:ln/>
+        </p:spPr>
+        <p:txBody>
+          <a:bodyPr wrap="square" lIns="0" tIns="0" rIns="0" bIns="0" rtlCol="0" anchor="ctr"/>
+          <a:lstStyle/>
+          <a:p>
+            <a:pPr algn="ctr" indent="0" marL="0">
+              <a:buNone/>
+            </a:pPr>
+            <a:r>
+              <a:rPr lang="en-US" sz="1800" b="1" dirty="0">
                 <a:solidFill>
                   <a:srgbClr val="13293D"/>
                 </a:solidFill>
@@ -14671,80 +14783,7 @@
                 <a:ea typeface="Inter" pitchFamily="34" charset="-122"/>
                 <a:cs typeface="Inter" pitchFamily="34" charset="-120"/>
               </a:rPr>
-              <a:t>Write a newsletter blurb about our fall book fair. </a:t>
-            </a:r>
-            <a:pPr indent="0" marL="0">
-              <a:lnSpc>
-                <a:spcPct val="110000"/>
-              </a:lnSpc>
-              <a:buNone/>
-            </a:pPr>
-            <a:r>
-              <a:rPr lang="en-US" sz="1700" b="1" dirty="0">
-                <a:solidFill>
-                  <a:srgbClr val="B07914"/>
-                </a:solidFill>
-                <a:latin typeface="Inter" pitchFamily="34" charset="0"/>
-                <a:ea typeface="Inter" pitchFamily="34" charset="-122"/>
-                <a:cs typeface="Inter" pitchFamily="34" charset="-120"/>
-              </a:rPr>
-              <a:t>It is in the school library, families come with their readers and pick books together, our theme is “find your next favorite,” and our families are busy, so plain and friendly beats fancy. </a:t>
-            </a:r>
-            <a:pPr indent="0" marL="0">
-              <a:lnSpc>
-                <a:spcPct val="110000"/>
-              </a:lnSpc>
-              <a:buNone/>
-            </a:pPr>
-            <a:r>
-              <a:rPr lang="en-US" sz="1700" b="1" dirty="0">
-                <a:solidFill>
-                  <a:srgbClr val="2E7D5B"/>
-                </a:solidFill>
-                <a:latin typeface="Inter" pitchFamily="34" charset="0"/>
-                <a:ea typeface="Inter" pitchFamily="34" charset="-122"/>
-                <a:cs typeface="Inter" pitchFamily="34" charset="-120"/>
-              </a:rPr>
-              <a:t>Under 120 words, one paragraph, no bullet points, ending with a line that invites families to stop by.”</a:t>
-            </a:r>
-            <a:endParaRPr lang="en-US" sz="1700" dirty="0"/>
-          </a:p>
-        </p:txBody>
-      </p:sp>
-      <p:sp>
-        <p:nvSpPr>
-          <p:cNvPr id="16" name="Text 13"/>
-          <p:cNvSpPr/>
-          <p:nvPr/>
-        </p:nvSpPr>
-        <p:spPr>
-          <a:xfrm>
-            <a:off x="640080" y="5029200"/>
-            <a:ext cx="10972800" cy="411480"/>
-          </a:xfrm>
-          <a:prstGeom prst="rect">
-            <a:avLst/>
-          </a:prstGeom>
-          <a:noFill/>
-          <a:ln/>
-        </p:spPr>
-        <p:txBody>
-          <a:bodyPr wrap="square" lIns="0" tIns="0" rIns="0" bIns="0" rtlCol="0" anchor="ctr"/>
-          <a:lstStyle/>
-          <a:p>
-            <a:pPr algn="ctr" indent="0" marL="0">
-              <a:buNone/>
-            </a:pPr>
-            <a:r>
-              <a:rPr lang="en-US" sz="1800" b="1" dirty="0">
-                <a:solidFill>
-                  <a:srgbClr val="13293D"/>
-                </a:solidFill>
-                <a:latin typeface="Inter" pitchFamily="34" charset="0"/>
-                <a:ea typeface="Inter" pitchFamily="34" charset="-122"/>
-                <a:cs typeface="Inter" pitchFamily="34" charset="-120"/>
-              </a:rPr>
-              <a:t>Four parts, and the middle two are the ones only you can supply.</a:t>
+              <a:t>Three moves, ten seconds, and nothing the email needed was lost.</a:t>
             </a:r>
             <a:endParaRPr lang="en-US" sz="1800" dirty="0"/>
           </a:p>
@@ -14758,8 +14797,8 @@
         </p:nvSpPr>
         <p:spPr>
           <a:xfrm>
-            <a:off x="640080" y="5532120"/>
-            <a:ext cx="2606040" cy="457200"/>
+            <a:off x="640080" y="5559552"/>
+            <a:ext cx="3520440" cy="457200"/>
           </a:xfrm>
           <a:prstGeom prst="roundRect">
             <a:avLst>
@@ -14785,8 +14824,8 @@
         </p:nvSpPr>
         <p:spPr>
           <a:xfrm>
-            <a:off x="640080" y="5532120"/>
-            <a:ext cx="2606040" cy="457200"/>
+            <a:off x="640080" y="5559552"/>
+            <a:ext cx="3520440" cy="457200"/>
           </a:xfrm>
           <a:prstGeom prst="rect">
             <a:avLst/>
@@ -14810,7 +14849,7 @@
                 <a:ea typeface="Inter" pitchFamily="34" charset="-122"/>
                 <a:cs typeface="Inter" pitchFamily="34" charset="-120"/>
               </a:rPr>
-              <a:t>ROLE</a:t>
+              <a:t>STRIP IDENTITY</a:t>
             </a:r>
             <a:endParaRPr lang="en-US" sz="1400" dirty="0"/>
           </a:p>
@@ -14824,74 +14863,8 @@
         </p:nvSpPr>
         <p:spPr>
           <a:xfrm>
-            <a:off x="3456432" y="5532120"/>
-            <a:ext cx="2606040" cy="457200"/>
-          </a:xfrm>
-          <a:prstGeom prst="roundRect">
-            <a:avLst>
-              <a:gd name="adj" fmla="val 50000"/>
-            </a:avLst>
-          </a:prstGeom>
-          <a:solidFill>
-            <a:srgbClr val="13293D"/>
-          </a:solidFill>
-          <a:ln w="12700">
-            <a:solidFill>
-              <a:srgbClr val="13293D"/>
-            </a:solidFill>
-            <a:prstDash val="solid"/>
-          </a:ln>
-        </p:spPr>
-      </p:sp>
-      <p:sp>
-        <p:nvSpPr>
-          <p:cNvPr id="20" name="Text 17"/>
-          <p:cNvSpPr/>
-          <p:nvPr/>
-        </p:nvSpPr>
-        <p:spPr>
-          <a:xfrm>
-            <a:off x="3456432" y="5532120"/>
-            <a:ext cx="2606040" cy="457200"/>
-          </a:xfrm>
-          <a:prstGeom prst="rect">
-            <a:avLst/>
-          </a:prstGeom>
-          <a:noFill/>
-          <a:ln/>
-        </p:spPr>
-        <p:txBody>
-          <a:bodyPr wrap="square" lIns="0" tIns="0" rIns="0" bIns="0" rtlCol="0" anchor="ctr"/>
-          <a:lstStyle/>
-          <a:p>
-            <a:pPr algn="ctr" indent="0" marL="0">
-              <a:buNone/>
-            </a:pPr>
-            <a:r>
-              <a:rPr lang="en-US" sz="1400" b="1" spc="200" kern="0" dirty="0">
-                <a:solidFill>
-                  <a:srgbClr val="FFFFFF"/>
-                </a:solidFill>
-                <a:latin typeface="Inter" pitchFamily="34" charset="0"/>
-                <a:ea typeface="Inter" pitchFamily="34" charset="-122"/>
-                <a:cs typeface="Inter" pitchFamily="34" charset="-120"/>
-              </a:rPr>
-              <a:t>TASK</a:t>
-            </a:r>
-            <a:endParaRPr lang="en-US" sz="1400" dirty="0"/>
-          </a:p>
-        </p:txBody>
-      </p:sp>
-      <p:sp>
-        <p:nvSpPr>
-          <p:cNvPr id="21" name="Shape 18"/>
-          <p:cNvSpPr/>
-          <p:nvPr/>
-        </p:nvSpPr>
-        <p:spPr>
-          <a:xfrm>
-            <a:off x="6272784" y="5532120"/>
-            <a:ext cx="2606040" cy="457200"/>
+            <a:off x="4407408" y="5559552"/>
+            <a:ext cx="3520440" cy="457200"/>
           </a:xfrm>
           <a:prstGeom prst="roundRect">
             <a:avLst>
@@ -14911,14 +14884,14 @@
       </p:sp>
       <p:sp>
         <p:nvSpPr>
-          <p:cNvPr id="22" name="Text 19"/>
-          <p:cNvSpPr/>
-          <p:nvPr/>
-        </p:nvSpPr>
-        <p:spPr>
-          <a:xfrm>
-            <a:off x="6272784" y="5532120"/>
-            <a:ext cx="2606040" cy="457200"/>
+          <p:cNvPr id="20" name="Text 17"/>
+          <p:cNvSpPr/>
+          <p:nvPr/>
+        </p:nvSpPr>
+        <p:spPr>
+          <a:xfrm>
+            <a:off x="4407408" y="5559552"/>
+            <a:ext cx="3520440" cy="457200"/>
           </a:xfrm>
           <a:prstGeom prst="rect">
             <a:avLst/>
@@ -14942,7 +14915,7 @@
                 <a:ea typeface="Inter" pitchFamily="34" charset="-122"/>
                 <a:cs typeface="Inter" pitchFamily="34" charset="-120"/>
               </a:rPr>
-              <a:t>CONTEXT</a:t>
+              <a:t>GENERALIZE</a:t>
             </a:r>
             <a:endParaRPr lang="en-US" sz="1400" dirty="0"/>
           </a:p>
@@ -14950,14 +14923,14 @@
       </p:sp>
       <p:sp>
         <p:nvSpPr>
-          <p:cNvPr id="23" name="Shape 20"/>
-          <p:cNvSpPr/>
-          <p:nvPr/>
-        </p:nvSpPr>
-        <p:spPr>
-          <a:xfrm>
-            <a:off x="9089136" y="5532120"/>
-            <a:ext cx="2606040" cy="457200"/>
+          <p:cNvPr id="21" name="Shape 18"/>
+          <p:cNvSpPr/>
+          <p:nvPr/>
+        </p:nvSpPr>
+        <p:spPr>
+          <a:xfrm>
+            <a:off x="8174736" y="5559552"/>
+            <a:ext cx="3520440" cy="457200"/>
           </a:xfrm>
           <a:prstGeom prst="roundRect">
             <a:avLst>
@@ -14977,14 +14950,14 @@
       </p:sp>
       <p:sp>
         <p:nvSpPr>
-          <p:cNvPr id="24" name="Text 21"/>
-          <p:cNvSpPr/>
-          <p:nvPr/>
-        </p:nvSpPr>
-        <p:spPr>
-          <a:xfrm>
-            <a:off x="9089136" y="5532120"/>
-            <a:ext cx="2606040" cy="457200"/>
+          <p:cNvPr id="22" name="Text 19"/>
+          <p:cNvSpPr/>
+          <p:nvPr/>
+        </p:nvSpPr>
+        <p:spPr>
+          <a:xfrm>
+            <a:off x="8174736" y="5559552"/>
+            <a:ext cx="3520440" cy="457200"/>
           </a:xfrm>
           <a:prstGeom prst="rect">
             <a:avLst/>
@@ -15008,7 +14981,7 @@
                 <a:ea typeface="Inter" pitchFamily="34" charset="-122"/>
                 <a:cs typeface="Inter" pitchFamily="34" charset="-120"/>
               </a:rPr>
-              <a:t>FORMAT</a:t>
+              <a:t>DESCRIBE THE NEED</a:t>
             </a:r>
             <a:endParaRPr lang="en-US" sz="1400" dirty="0"/>
           </a:p>
@@ -15497,12 +15470,12 @@
           <a:p>
             <a:pPr indent="0" marL="0">
               <a:lnSpc>
-                <a:spcPct val="115000"/>
+                <a:spcPct val="112000"/>
               </a:lnSpc>
               <a:buNone/>
             </a:pPr>
             <a:r>
-              <a:rPr lang="en-US" sz="2000" dirty="0">
+              <a:rPr lang="en-US" sz="1700" dirty="0">
                 <a:solidFill>
                   <a:srgbClr val="1B1F24"/>
                 </a:solidFill>
@@ -15510,9 +15483,9 @@
                 <a:ea typeface="Inter" pitchFamily="34" charset="-122"/>
                 <a:cs typeface="Inter" pitchFamily="34" charset="-120"/>
               </a:rPr>
-              <a:t>“Dear Families, we are thrilled to announce our upcoming Book Fair! This wonderful event promises something for every reader in our school community. The fair runs all week, 8:00 to 3:00, in the library. We sincerely appreciate your continued support of our reading program!”</a:t>
-            </a:r>
-            <a:endParaRPr lang="en-US" sz="2000" dirty="0"/>
+              <a:t>“Dear Parent, I wanted to reach out about your child’s missing assignments and a difficult day we had in class recently. As we discussed at last week’s conference, steady homework routines make a real difference. I know stretches like this can be hard, and I’d welcome the chance to talk about how we can support your child together. Please let me know a time that works for you.”</a:t>
+            </a:r>
+            <a:endParaRPr lang="en-US" sz="1700" dirty="0"/>
           </a:p>
         </p:txBody>
       </p:sp>
@@ -15549,7 +15522,7 @@
                 <a:ea typeface="Inter" pitchFamily="34" charset="-122"/>
                 <a:cs typeface="Inter" pitchFamily="34" charset="-120"/>
               </a:rPr>
-              <a:t>Beige, and it sounds like nobody. Keep your own draft 1 on screen: task 2 works on this exact text.</a:t>
+              <a:t>Warm, specific, usable. And notice what is NOT in it: no name, no identity, nothing missing.</a:t>
             </a:r>
             <a:endParaRPr lang="en-US" sz="1600" dirty="0"/>
           </a:p>
@@ -15588,7 +15561,7 @@
                 <a:ea typeface="Inter" pitchFamily="34" charset="-122"/>
                 <a:cs typeface="Inter" pitchFamily="34" charset="-120"/>
               </a:rPr>
-              <a:t>One detail in this draft came from nowhere. Nobody has spotted it yet.</a:t>
+              <a:t>One sentence in this draft came from nowhere. Nobody has spotted it yet.</a:t>
             </a:r>
             <a:endParaRPr lang="en-US" sz="1800" dirty="0"/>
           </a:p>
@@ -15943,7 +15916,7 @@
                 <a:ea typeface="Inter" pitchFamily="34" charset="-122"/>
                 <a:cs typeface="Inter" pitchFamily="34" charset="-120"/>
               </a:rPr>
-              <a:t>Her blurb, draft 1: beige. She pushes back twice, one word at a time.</a:t>
+              <a:t>Her safe draft is back, no name in sight. Now the sneaky ones.</a:t>
             </a:r>
             <a:endParaRPr lang="en-US" sz="1000" dirty="0"/>
           </a:p>
@@ -16021,7 +15994,7 @@
                 <a:ea typeface="Inter" pitchFamily="34" charset="-122"/>
                 <a:cs typeface="Inter" pitchFamily="34" charset="-120"/>
               </a:rPr>
-              <a:t>Now push back: twice, minimum</a:t>
+              <a:t>The sneaky ones, live</a:t>
             </a:r>
             <a:endParaRPr lang="en-US" sz="3200" dirty="0"/>
           </a:p>
@@ -16052,7 +16025,7 @@
               <a:buNone/>
             </a:pPr>
             <a:r>
-              <a:rPr lang="en-US" sz="1900" dirty="0">
+              <a:rPr lang="en-US" sz="1600" dirty="0">
                 <a:solidFill>
                   <a:srgbClr val="1B1F24"/>
                 </a:solidFill>
@@ -16060,9 +16033,9 @@
                 <a:ea typeface="Inter" pitchFamily="34" charset="-122"/>
                 <a:cs typeface="Inter" pitchFamily="34" charset="-120"/>
               </a:rPr>
-              <a:t>Don’t accept the first draft. Tell it what’s wrong, the way you would tell an intern:</a:t>
-            </a:r>
-            <a:endParaRPr lang="en-US" sz="1900" dirty="0"/>
+              <a:t>Each one identifies a child without a name. Pick one, fix it with the 3 moves, type the safe version:</a:t>
+            </a:r>
+            <a:endParaRPr lang="en-US" sz="1600" dirty="0"/>
           </a:p>
         </p:txBody>
       </p:sp>
@@ -16074,12 +16047,540 @@
         </p:nvSpPr>
         <p:spPr>
           <a:xfrm>
-            <a:off x="640080" y="1874520"/>
-            <a:ext cx="5349240" cy="914400"/>
+            <a:off x="640080" y="1810512"/>
+            <a:ext cx="685800" cy="749808"/>
           </a:xfrm>
           <a:prstGeom prst="roundRect">
             <a:avLst>
-              <a:gd name="adj" fmla="val 12000"/>
+              <a:gd name="adj" fmla="val 10667"/>
+            </a:avLst>
+          </a:prstGeom>
+          <a:solidFill>
+            <a:srgbClr val="13293D"/>
+          </a:solidFill>
+          <a:ln w="12700">
+            <a:solidFill>
+              <a:srgbClr val="13293D"/>
+            </a:solidFill>
+            <a:prstDash val="solid"/>
+          </a:ln>
+        </p:spPr>
+      </p:sp>
+      <p:sp>
+        <p:nvSpPr>
+          <p:cNvPr id="16" name="Text 13"/>
+          <p:cNvSpPr/>
+          <p:nvPr/>
+        </p:nvSpPr>
+        <p:spPr>
+          <a:xfrm>
+            <a:off x="640080" y="1810512"/>
+            <a:ext cx="685800" cy="749808"/>
+          </a:xfrm>
+          <a:prstGeom prst="rect">
+            <a:avLst/>
+          </a:prstGeom>
+          <a:noFill/>
+          <a:ln/>
+        </p:spPr>
+        <p:txBody>
+          <a:bodyPr wrap="square" lIns="0" tIns="0" rIns="0" bIns="0" rtlCol="0" anchor="ctr"/>
+          <a:lstStyle/>
+          <a:p>
+            <a:pPr algn="ctr" indent="0" marL="0">
+              <a:buNone/>
+            </a:pPr>
+            <a:r>
+              <a:rPr lang="en-US" sz="2400" b="1" dirty="0">
+                <a:solidFill>
+                  <a:srgbClr val="FFFFFF"/>
+                </a:solidFill>
+                <a:latin typeface="Inter" pitchFamily="34" charset="0"/>
+                <a:ea typeface="Inter" pitchFamily="34" charset="-122"/>
+                <a:cs typeface="Inter" pitchFamily="34" charset="-120"/>
+              </a:rPr>
+              <a:t>A</a:t>
+            </a:r>
+            <a:endParaRPr lang="en-US" sz="2400" dirty="0"/>
+          </a:p>
+        </p:txBody>
+      </p:sp>
+      <p:sp>
+        <p:nvSpPr>
+          <p:cNvPr id="17" name="Shape 14"/>
+          <p:cNvSpPr/>
+          <p:nvPr/>
+        </p:nvSpPr>
+        <p:spPr>
+          <a:xfrm>
+            <a:off x="1463040" y="1810512"/>
+            <a:ext cx="10149840" cy="749808"/>
+          </a:xfrm>
+          <a:prstGeom prst="roundRect">
+            <a:avLst>
+              <a:gd name="adj" fmla="val 10976"/>
+            </a:avLst>
+          </a:prstGeom>
+          <a:solidFill>
+            <a:srgbClr val="F7F5F0"/>
+          </a:solidFill>
+          <a:ln w="12700">
+            <a:solidFill>
+              <a:srgbClr val="F7F5F0"/>
+            </a:solidFill>
+            <a:prstDash val="solid"/>
+          </a:ln>
+        </p:spPr>
+      </p:sp>
+      <p:sp>
+        <p:nvSpPr>
+          <p:cNvPr id="18" name="Text 15"/>
+          <p:cNvSpPr/>
+          <p:nvPr/>
+        </p:nvSpPr>
+        <p:spPr>
+          <a:xfrm>
+            <a:off x="1737360" y="1847088"/>
+            <a:ext cx="9601200" cy="676656"/>
+          </a:xfrm>
+          <a:prstGeom prst="rect">
+            <a:avLst/>
+          </a:prstGeom>
+          <a:noFill/>
+          <a:ln/>
+        </p:spPr>
+        <p:txBody>
+          <a:bodyPr wrap="square" lIns="0" tIns="0" rIns="0" bIns="0" rtlCol="0" anchor="ctr"/>
+          <a:lstStyle/>
+          <a:p>
+            <a:pPr indent="0" marL="0">
+              <a:buNone/>
+            </a:pPr>
+            <a:r>
+              <a:rPr lang="en-US" sz="1650" i="1" dirty="0">
+                <a:solidFill>
+                  <a:srgbClr val="1B1F24"/>
+                </a:solidFill>
+                <a:latin typeface="Inter" pitchFamily="34" charset="0"/>
+                <a:ea typeface="Inter" pitchFamily="34" charset="-122"/>
+                <a:cs typeface="Inter" pitchFamily="34" charset="-120"/>
+              </a:rPr>
+              <a:t>“Draft an apology note to K.R.’s dad about the mix-up with her medication schedule.”</a:t>
+            </a:r>
+            <a:endParaRPr lang="en-US" sz="1650" dirty="0"/>
+          </a:p>
+        </p:txBody>
+      </p:sp>
+      <p:sp>
+        <p:nvSpPr>
+          <p:cNvPr id="19" name="Shape 16"/>
+          <p:cNvSpPr/>
+          <p:nvPr/>
+        </p:nvSpPr>
+        <p:spPr>
+          <a:xfrm>
+            <a:off x="640080" y="2697480"/>
+            <a:ext cx="685800" cy="749808"/>
+          </a:xfrm>
+          <a:prstGeom prst="roundRect">
+            <a:avLst>
+              <a:gd name="adj" fmla="val 10667"/>
+            </a:avLst>
+          </a:prstGeom>
+          <a:solidFill>
+            <a:srgbClr val="13293D"/>
+          </a:solidFill>
+          <a:ln w="12700">
+            <a:solidFill>
+              <a:srgbClr val="13293D"/>
+            </a:solidFill>
+            <a:prstDash val="solid"/>
+          </a:ln>
+        </p:spPr>
+      </p:sp>
+      <p:sp>
+        <p:nvSpPr>
+          <p:cNvPr id="20" name="Text 17"/>
+          <p:cNvSpPr/>
+          <p:nvPr/>
+        </p:nvSpPr>
+        <p:spPr>
+          <a:xfrm>
+            <a:off x="640080" y="2697480"/>
+            <a:ext cx="685800" cy="749808"/>
+          </a:xfrm>
+          <a:prstGeom prst="rect">
+            <a:avLst/>
+          </a:prstGeom>
+          <a:noFill/>
+          <a:ln/>
+        </p:spPr>
+        <p:txBody>
+          <a:bodyPr wrap="square" lIns="0" tIns="0" rIns="0" bIns="0" rtlCol="0" anchor="ctr"/>
+          <a:lstStyle/>
+          <a:p>
+            <a:pPr algn="ctr" indent="0" marL="0">
+              <a:buNone/>
+            </a:pPr>
+            <a:r>
+              <a:rPr lang="en-US" sz="2400" b="1" dirty="0">
+                <a:solidFill>
+                  <a:srgbClr val="FFFFFF"/>
+                </a:solidFill>
+                <a:latin typeface="Inter" pitchFamily="34" charset="0"/>
+                <a:ea typeface="Inter" pitchFamily="34" charset="-122"/>
+                <a:cs typeface="Inter" pitchFamily="34" charset="-120"/>
+              </a:rPr>
+              <a:t>B</a:t>
+            </a:r>
+            <a:endParaRPr lang="en-US" sz="2400" dirty="0"/>
+          </a:p>
+        </p:txBody>
+      </p:sp>
+      <p:sp>
+        <p:nvSpPr>
+          <p:cNvPr id="21" name="Shape 18"/>
+          <p:cNvSpPr/>
+          <p:nvPr/>
+        </p:nvSpPr>
+        <p:spPr>
+          <a:xfrm>
+            <a:off x="1463040" y="2697480"/>
+            <a:ext cx="10149840" cy="749808"/>
+          </a:xfrm>
+          <a:prstGeom prst="roundRect">
+            <a:avLst>
+              <a:gd name="adj" fmla="val 10976"/>
+            </a:avLst>
+          </a:prstGeom>
+          <a:solidFill>
+            <a:srgbClr val="F7F5F0"/>
+          </a:solidFill>
+          <a:ln w="12700">
+            <a:solidFill>
+              <a:srgbClr val="F7F5F0"/>
+            </a:solidFill>
+            <a:prstDash val="solid"/>
+          </a:ln>
+        </p:spPr>
+      </p:sp>
+      <p:sp>
+        <p:nvSpPr>
+          <p:cNvPr id="22" name="Text 19"/>
+          <p:cNvSpPr/>
+          <p:nvPr/>
+        </p:nvSpPr>
+        <p:spPr>
+          <a:xfrm>
+            <a:off x="1737360" y="2734056"/>
+            <a:ext cx="9601200" cy="676656"/>
+          </a:xfrm>
+          <a:prstGeom prst="rect">
+            <a:avLst/>
+          </a:prstGeom>
+          <a:noFill/>
+          <a:ln/>
+        </p:spPr>
+        <p:txBody>
+          <a:bodyPr wrap="square" lIns="0" tIns="0" rIns="0" bIns="0" rtlCol="0" anchor="ctr"/>
+          <a:lstStyle/>
+          <a:p>
+            <a:pPr indent="0" marL="0">
+              <a:buNone/>
+            </a:pPr>
+            <a:r>
+              <a:rPr lang="en-US" sz="1650" i="1" dirty="0">
+                <a:solidFill>
+                  <a:srgbClr val="1B1F24"/>
+                </a:solidFill>
+                <a:latin typeface="Inter" pitchFamily="34" charset="0"/>
+                <a:ea typeface="Inter" pitchFamily="34" charset="-122"/>
+                <a:cs typeface="Inter" pitchFamily="34" charset="-120"/>
+              </a:rPr>
+              <a:t>“Write a welcome-back note for the family of the student returning from a six-week hospital stay.”</a:t>
+            </a:r>
+            <a:endParaRPr lang="en-US" sz="1650" dirty="0"/>
+          </a:p>
+        </p:txBody>
+      </p:sp>
+      <p:sp>
+        <p:nvSpPr>
+          <p:cNvPr id="23" name="Shape 20"/>
+          <p:cNvSpPr/>
+          <p:nvPr/>
+        </p:nvSpPr>
+        <p:spPr>
+          <a:xfrm>
+            <a:off x="640080" y="3584448"/>
+            <a:ext cx="685800" cy="749808"/>
+          </a:xfrm>
+          <a:prstGeom prst="roundRect">
+            <a:avLst>
+              <a:gd name="adj" fmla="val 10667"/>
+            </a:avLst>
+          </a:prstGeom>
+          <a:solidFill>
+            <a:srgbClr val="13293D"/>
+          </a:solidFill>
+          <a:ln w="12700">
+            <a:solidFill>
+              <a:srgbClr val="13293D"/>
+            </a:solidFill>
+            <a:prstDash val="solid"/>
+          </a:ln>
+        </p:spPr>
+      </p:sp>
+      <p:sp>
+        <p:nvSpPr>
+          <p:cNvPr id="24" name="Text 21"/>
+          <p:cNvSpPr/>
+          <p:nvPr/>
+        </p:nvSpPr>
+        <p:spPr>
+          <a:xfrm>
+            <a:off x="640080" y="3584448"/>
+            <a:ext cx="685800" cy="749808"/>
+          </a:xfrm>
+          <a:prstGeom prst="rect">
+            <a:avLst/>
+          </a:prstGeom>
+          <a:noFill/>
+          <a:ln/>
+        </p:spPr>
+        <p:txBody>
+          <a:bodyPr wrap="square" lIns="0" tIns="0" rIns="0" bIns="0" rtlCol="0" anchor="ctr"/>
+          <a:lstStyle/>
+          <a:p>
+            <a:pPr algn="ctr" indent="0" marL="0">
+              <a:buNone/>
+            </a:pPr>
+            <a:r>
+              <a:rPr lang="en-US" sz="2400" b="1" dirty="0">
+                <a:solidFill>
+                  <a:srgbClr val="FFFFFF"/>
+                </a:solidFill>
+                <a:latin typeface="Inter" pitchFamily="34" charset="0"/>
+                <a:ea typeface="Inter" pitchFamily="34" charset="-122"/>
+                <a:cs typeface="Inter" pitchFamily="34" charset="-120"/>
+              </a:rPr>
+              <a:t>C</a:t>
+            </a:r>
+            <a:endParaRPr lang="en-US" sz="2400" dirty="0"/>
+          </a:p>
+        </p:txBody>
+      </p:sp>
+      <p:sp>
+        <p:nvSpPr>
+          <p:cNvPr id="25" name="Shape 22"/>
+          <p:cNvSpPr/>
+          <p:nvPr/>
+        </p:nvSpPr>
+        <p:spPr>
+          <a:xfrm>
+            <a:off x="1463040" y="3584448"/>
+            <a:ext cx="10149840" cy="749808"/>
+          </a:xfrm>
+          <a:prstGeom prst="roundRect">
+            <a:avLst>
+              <a:gd name="adj" fmla="val 10976"/>
+            </a:avLst>
+          </a:prstGeom>
+          <a:solidFill>
+            <a:srgbClr val="F7F5F0"/>
+          </a:solidFill>
+          <a:ln w="12700">
+            <a:solidFill>
+              <a:srgbClr val="F7F5F0"/>
+            </a:solidFill>
+            <a:prstDash val="solid"/>
+          </a:ln>
+        </p:spPr>
+      </p:sp>
+      <p:sp>
+        <p:nvSpPr>
+          <p:cNvPr id="26" name="Text 23"/>
+          <p:cNvSpPr/>
+          <p:nvPr/>
+        </p:nvSpPr>
+        <p:spPr>
+          <a:xfrm>
+            <a:off x="1737360" y="3621024"/>
+            <a:ext cx="9601200" cy="676656"/>
+          </a:xfrm>
+          <a:prstGeom prst="rect">
+            <a:avLst/>
+          </a:prstGeom>
+          <a:noFill/>
+          <a:ln/>
+        </p:spPr>
+        <p:txBody>
+          <a:bodyPr wrap="square" lIns="0" tIns="0" rIns="0" bIns="0" rtlCol="0" anchor="ctr"/>
+          <a:lstStyle/>
+          <a:p>
+            <a:pPr indent="0" marL="0">
+              <a:buNone/>
+            </a:pPr>
+            <a:r>
+              <a:rPr lang="en-US" sz="1650" i="1" dirty="0">
+                <a:solidFill>
+                  <a:srgbClr val="1B1F24"/>
+                </a:solidFill>
+                <a:latin typeface="Inter" pitchFamily="34" charset="0"/>
+                <a:ea typeface="Inter" pitchFamily="34" charset="-122"/>
+                <a:cs typeface="Inter" pitchFamily="34" charset="-120"/>
+              </a:rPr>
+              <a:t>“Draft a behavior plan for the twins in 3rd period whose parents are separating.”</a:t>
+            </a:r>
+            <a:endParaRPr lang="en-US" sz="1650" dirty="0"/>
+          </a:p>
+        </p:txBody>
+      </p:sp>
+      <p:sp>
+        <p:nvSpPr>
+          <p:cNvPr id="27" name="Shape 24"/>
+          <p:cNvSpPr/>
+          <p:nvPr/>
+        </p:nvSpPr>
+        <p:spPr>
+          <a:xfrm>
+            <a:off x="640080" y="4471416"/>
+            <a:ext cx="685800" cy="749808"/>
+          </a:xfrm>
+          <a:prstGeom prst="roundRect">
+            <a:avLst>
+              <a:gd name="adj" fmla="val 10667"/>
+            </a:avLst>
+          </a:prstGeom>
+          <a:solidFill>
+            <a:srgbClr val="13293D"/>
+          </a:solidFill>
+          <a:ln w="12700">
+            <a:solidFill>
+              <a:srgbClr val="13293D"/>
+            </a:solidFill>
+            <a:prstDash val="solid"/>
+          </a:ln>
+        </p:spPr>
+      </p:sp>
+      <p:sp>
+        <p:nvSpPr>
+          <p:cNvPr id="28" name="Text 25"/>
+          <p:cNvSpPr/>
+          <p:nvPr/>
+        </p:nvSpPr>
+        <p:spPr>
+          <a:xfrm>
+            <a:off x="640080" y="4471416"/>
+            <a:ext cx="685800" cy="749808"/>
+          </a:xfrm>
+          <a:prstGeom prst="rect">
+            <a:avLst/>
+          </a:prstGeom>
+          <a:noFill/>
+          <a:ln/>
+        </p:spPr>
+        <p:txBody>
+          <a:bodyPr wrap="square" lIns="0" tIns="0" rIns="0" bIns="0" rtlCol="0" anchor="ctr"/>
+          <a:lstStyle/>
+          <a:p>
+            <a:pPr algn="ctr" indent="0" marL="0">
+              <a:buNone/>
+            </a:pPr>
+            <a:r>
+              <a:rPr lang="en-US" sz="2400" b="1" dirty="0">
+                <a:solidFill>
+                  <a:srgbClr val="FFFFFF"/>
+                </a:solidFill>
+                <a:latin typeface="Inter" pitchFamily="34" charset="0"/>
+                <a:ea typeface="Inter" pitchFamily="34" charset="-122"/>
+                <a:cs typeface="Inter" pitchFamily="34" charset="-120"/>
+              </a:rPr>
+              <a:t>D</a:t>
+            </a:r>
+            <a:endParaRPr lang="en-US" sz="2400" dirty="0"/>
+          </a:p>
+        </p:txBody>
+      </p:sp>
+      <p:sp>
+        <p:nvSpPr>
+          <p:cNvPr id="29" name="Shape 26"/>
+          <p:cNvSpPr/>
+          <p:nvPr/>
+        </p:nvSpPr>
+        <p:spPr>
+          <a:xfrm>
+            <a:off x="1463040" y="4471416"/>
+            <a:ext cx="10149840" cy="749808"/>
+          </a:xfrm>
+          <a:prstGeom prst="roundRect">
+            <a:avLst>
+              <a:gd name="adj" fmla="val 10976"/>
+            </a:avLst>
+          </a:prstGeom>
+          <a:solidFill>
+            <a:srgbClr val="F7F5F0"/>
+          </a:solidFill>
+          <a:ln w="12700">
+            <a:solidFill>
+              <a:srgbClr val="F7F5F0"/>
+            </a:solidFill>
+            <a:prstDash val="solid"/>
+          </a:ln>
+        </p:spPr>
+      </p:sp>
+      <p:sp>
+        <p:nvSpPr>
+          <p:cNvPr id="30" name="Text 27"/>
+          <p:cNvSpPr/>
+          <p:nvPr/>
+        </p:nvSpPr>
+        <p:spPr>
+          <a:xfrm>
+            <a:off x="1737360" y="4507992"/>
+            <a:ext cx="9601200" cy="676656"/>
+          </a:xfrm>
+          <a:prstGeom prst="rect">
+            <a:avLst/>
+          </a:prstGeom>
+          <a:noFill/>
+          <a:ln/>
+        </p:spPr>
+        <p:txBody>
+          <a:bodyPr wrap="square" lIns="0" tIns="0" rIns="0" bIns="0" rtlCol="0" anchor="ctr"/>
+          <a:lstStyle/>
+          <a:p>
+            <a:pPr indent="0" marL="0">
+              <a:buNone/>
+            </a:pPr>
+            <a:r>
+              <a:rPr lang="en-US" sz="1650" i="1" dirty="0">
+                <a:solidFill>
+                  <a:srgbClr val="1B1F24"/>
+                </a:solidFill>
+                <a:latin typeface="Inter" pitchFamily="34" charset="0"/>
+                <a:ea typeface="Inter" pitchFamily="34" charset="-122"/>
+                <a:cs typeface="Inter" pitchFamily="34" charset="-120"/>
+              </a:rPr>
+              <a:t>“Summarize this IEP meeting recording for my files.”  — pasting a document counts as typing it</a:t>
+            </a:r>
+            <a:endParaRPr lang="en-US" sz="1650" dirty="0"/>
+          </a:p>
+        </p:txBody>
+      </p:sp>
+      <p:sp>
+        <p:nvSpPr>
+          <p:cNvPr id="31" name="Shape 28"/>
+          <p:cNvSpPr/>
+          <p:nvPr/>
+        </p:nvSpPr>
+        <p:spPr>
+          <a:xfrm>
+            <a:off x="640080" y="5440680"/>
+            <a:ext cx="10972800" cy="777240"/>
+          </a:xfrm>
+          <a:prstGeom prst="roundRect">
+            <a:avLst>
+              <a:gd name="adj" fmla="val 10588"/>
             </a:avLst>
           </a:prstGeom>
           <a:solidFill>
@@ -16095,30 +16596,30 @@
       </p:sp>
       <p:sp>
         <p:nvSpPr>
-          <p:cNvPr id="16" name="Text 13"/>
-          <p:cNvSpPr/>
-          <p:nvPr/>
-        </p:nvSpPr>
-        <p:spPr>
-          <a:xfrm>
-            <a:off x="914400" y="1874520"/>
-            <a:ext cx="4800600" cy="914400"/>
-          </a:xfrm>
-          <a:prstGeom prst="rect">
-            <a:avLst/>
-          </a:prstGeom>
-          <a:noFill/>
-          <a:ln/>
-        </p:spPr>
-        <p:txBody>
-          <a:bodyPr wrap="square" lIns="0" tIns="0" rIns="0" bIns="0" rtlCol="0" anchor="ctr"/>
-          <a:lstStyle/>
-          <a:p>
-            <a:pPr indent="0" marL="0">
-              <a:buNone/>
-            </a:pPr>
-            <a:r>
-              <a:rPr lang="en-US" sz="1700" b="1" dirty="0">
+          <p:cNvPr id="32" name="Text 29"/>
+          <p:cNvSpPr/>
+          <p:nvPr/>
+        </p:nvSpPr>
+        <p:spPr>
+          <a:xfrm>
+            <a:off x="960120" y="5440680"/>
+            <a:ext cx="10332720" cy="777240"/>
+          </a:xfrm>
+          <a:prstGeom prst="rect">
+            <a:avLst/>
+          </a:prstGeom>
+          <a:noFill/>
+          <a:ln/>
+        </p:spPr>
+        <p:txBody>
+          <a:bodyPr wrap="square" lIns="0" tIns="0" rIns="0" bIns="0" rtlCol="0" anchor="ctr"/>
+          <a:lstStyle/>
+          <a:p>
+            <a:pPr indent="0" marL="0">
+              <a:buNone/>
+            </a:pPr>
+            <a:r>
+              <a:rPr lang="en-US" sz="1550" b="1" dirty="0">
                 <a:solidFill>
                   <a:srgbClr val="13293D"/>
                 </a:solidFill>
@@ -16126,263 +16627,13 @@
                 <a:ea typeface="Inter" pitchFamily="34" charset="-122"/>
                 <a:cs typeface="Inter" pitchFamily="34" charset="-120"/>
               </a:rPr>
-              <a:t>“Warmer.”</a:t>
-            </a:r>
-            <a:endParaRPr lang="en-US" sz="1700" dirty="0"/>
-          </a:p>
-        </p:txBody>
-      </p:sp>
-      <p:sp>
-        <p:nvSpPr>
-          <p:cNvPr id="17" name="Shape 14"/>
-          <p:cNvSpPr/>
-          <p:nvPr/>
-        </p:nvSpPr>
-        <p:spPr>
-          <a:xfrm>
-            <a:off x="6263640" y="1874520"/>
-            <a:ext cx="5349240" cy="914400"/>
-          </a:xfrm>
-          <a:prstGeom prst="roundRect">
-            <a:avLst>
-              <a:gd name="adj" fmla="val 12000"/>
-            </a:avLst>
-          </a:prstGeom>
-          <a:solidFill>
-            <a:srgbClr val="EAF5F3"/>
-          </a:solidFill>
-          <a:ln w="12700">
-            <a:solidFill>
-              <a:srgbClr val="EAF5F3"/>
-            </a:solidFill>
-            <a:prstDash val="solid"/>
-          </a:ln>
-        </p:spPr>
-      </p:sp>
-      <p:sp>
-        <p:nvSpPr>
-          <p:cNvPr id="18" name="Text 15"/>
-          <p:cNvSpPr/>
-          <p:nvPr/>
-        </p:nvSpPr>
-        <p:spPr>
-          <a:xfrm>
-            <a:off x="6537960" y="1874520"/>
-            <a:ext cx="4800600" cy="914400"/>
-          </a:xfrm>
-          <a:prstGeom prst="rect">
-            <a:avLst/>
-          </a:prstGeom>
-          <a:noFill/>
-          <a:ln/>
-        </p:spPr>
-        <p:txBody>
-          <a:bodyPr wrap="square" lIns="0" tIns="0" rIns="0" bIns="0" rtlCol="0" anchor="ctr"/>
-          <a:lstStyle/>
-          <a:p>
-            <a:pPr indent="0" marL="0">
-              <a:buNone/>
-            </a:pPr>
-            <a:r>
-              <a:rPr lang="en-US" sz="1700" b="1" dirty="0">
-                <a:solidFill>
-                  <a:srgbClr val="13293D"/>
-                </a:solidFill>
-                <a:latin typeface="Inter" pitchFamily="34" charset="0"/>
-                <a:ea typeface="Inter" pitchFamily="34" charset="-122"/>
-                <a:cs typeface="Inter" pitchFamily="34" charset="-120"/>
-              </a:rPr>
-              <a:t>“Shorter.”</a:t>
-            </a:r>
-            <a:endParaRPr lang="en-US" sz="1700" dirty="0"/>
-          </a:p>
-        </p:txBody>
-      </p:sp>
-      <p:sp>
-        <p:nvSpPr>
-          <p:cNvPr id="19" name="Shape 16"/>
-          <p:cNvSpPr/>
-          <p:nvPr/>
-        </p:nvSpPr>
-        <p:spPr>
-          <a:xfrm>
-            <a:off x="640080" y="2971800"/>
-            <a:ext cx="5349240" cy="914400"/>
-          </a:xfrm>
-          <a:prstGeom prst="roundRect">
-            <a:avLst>
-              <a:gd name="adj" fmla="val 12000"/>
-            </a:avLst>
-          </a:prstGeom>
-          <a:solidFill>
-            <a:srgbClr val="EAF5F3"/>
-          </a:solidFill>
-          <a:ln w="12700">
-            <a:solidFill>
-              <a:srgbClr val="EAF5F3"/>
-            </a:solidFill>
-            <a:prstDash val="solid"/>
-          </a:ln>
-        </p:spPr>
-      </p:sp>
-      <p:sp>
-        <p:nvSpPr>
-          <p:cNvPr id="20" name="Text 17"/>
-          <p:cNvSpPr/>
-          <p:nvPr/>
-        </p:nvSpPr>
-        <p:spPr>
-          <a:xfrm>
-            <a:off x="914400" y="2971800"/>
-            <a:ext cx="4800600" cy="914400"/>
-          </a:xfrm>
-          <a:prstGeom prst="rect">
-            <a:avLst/>
-          </a:prstGeom>
-          <a:noFill/>
-          <a:ln/>
-        </p:spPr>
-        <p:txBody>
-          <a:bodyPr wrap="square" lIns="0" tIns="0" rIns="0" bIns="0" rtlCol="0" anchor="ctr"/>
-          <a:lstStyle/>
-          <a:p>
-            <a:pPr indent="0" marL="0">
-              <a:buNone/>
-            </a:pPr>
-            <a:r>
-              <a:rPr lang="en-US" sz="1700" b="1" dirty="0">
-                <a:solidFill>
-                  <a:srgbClr val="13293D"/>
-                </a:solidFill>
-                <a:latin typeface="Inter" pitchFamily="34" charset="0"/>
-                <a:ea typeface="Inter" pitchFamily="34" charset="-122"/>
-                <a:cs typeface="Inter" pitchFamily="34" charset="-120"/>
-              </a:rPr>
-              <a:t>“A 5th grader wouldn’t know three of these words. Fix that.”</a:t>
-            </a:r>
-            <a:endParaRPr lang="en-US" sz="1700" dirty="0"/>
-          </a:p>
-        </p:txBody>
-      </p:sp>
-      <p:sp>
-        <p:nvSpPr>
-          <p:cNvPr id="21" name="Shape 18"/>
-          <p:cNvSpPr/>
-          <p:nvPr/>
-        </p:nvSpPr>
-        <p:spPr>
-          <a:xfrm>
-            <a:off x="6263640" y="2971800"/>
-            <a:ext cx="5349240" cy="914400"/>
-          </a:xfrm>
-          <a:prstGeom prst="roundRect">
-            <a:avLst>
-              <a:gd name="adj" fmla="val 12000"/>
-            </a:avLst>
-          </a:prstGeom>
-          <a:solidFill>
-            <a:srgbClr val="EAF5F3"/>
-          </a:solidFill>
-          <a:ln w="12700">
-            <a:solidFill>
-              <a:srgbClr val="EAF5F3"/>
-            </a:solidFill>
-            <a:prstDash val="solid"/>
-          </a:ln>
-        </p:spPr>
-      </p:sp>
-      <p:sp>
-        <p:nvSpPr>
-          <p:cNvPr id="22" name="Text 19"/>
-          <p:cNvSpPr/>
-          <p:nvPr/>
-        </p:nvSpPr>
-        <p:spPr>
-          <a:xfrm>
-            <a:off x="6537960" y="2971800"/>
-            <a:ext cx="4800600" cy="914400"/>
-          </a:xfrm>
-          <a:prstGeom prst="rect">
-            <a:avLst/>
-          </a:prstGeom>
-          <a:noFill/>
-          <a:ln/>
-        </p:spPr>
-        <p:txBody>
-          <a:bodyPr wrap="square" lIns="0" tIns="0" rIns="0" bIns="0" rtlCol="0" anchor="ctr"/>
-          <a:lstStyle/>
-          <a:p>
-            <a:pPr indent="0" marL="0">
-              <a:buNone/>
-            </a:pPr>
-            <a:r>
-              <a:rPr lang="en-US" sz="1700" b="1" dirty="0">
-                <a:solidFill>
-                  <a:srgbClr val="13293D"/>
-                </a:solidFill>
-                <a:latin typeface="Inter" pitchFamily="34" charset="0"/>
-                <a:ea typeface="Inter" pitchFamily="34" charset="-122"/>
-                <a:cs typeface="Inter" pitchFamily="34" charset="-120"/>
-              </a:rPr>
-              <a:t>“Make question four harder and add a diagram question.”</a:t>
-            </a:r>
-            <a:endParaRPr lang="en-US" sz="1700" dirty="0"/>
-          </a:p>
-        </p:txBody>
-      </p:sp>
-      <p:sp>
-        <p:nvSpPr>
-          <p:cNvPr id="23" name="Shape 20"/>
-          <p:cNvSpPr/>
-          <p:nvPr/>
-        </p:nvSpPr>
-        <p:spPr>
-          <a:xfrm>
-            <a:off x="640080" y="4251960"/>
-            <a:ext cx="10972800" cy="1234440"/>
-          </a:xfrm>
-          <a:prstGeom prst="roundRect">
-            <a:avLst>
-              <a:gd name="adj" fmla="val 6667"/>
-            </a:avLst>
-          </a:prstGeom>
-          <a:solidFill>
-            <a:srgbClr val="F7F5F0"/>
-          </a:solidFill>
-          <a:ln w="12700">
-            <a:solidFill>
-              <a:srgbClr val="F7F5F0"/>
-            </a:solidFill>
-            <a:prstDash val="solid"/>
-          </a:ln>
-        </p:spPr>
-      </p:sp>
-      <p:sp>
-        <p:nvSpPr>
-          <p:cNvPr id="24" name="Text 21"/>
-          <p:cNvSpPr/>
-          <p:nvPr/>
-        </p:nvSpPr>
-        <p:spPr>
-          <a:xfrm>
-            <a:off x="960120" y="4251960"/>
-            <a:ext cx="10332720" cy="1234440"/>
-          </a:xfrm>
-          <a:prstGeom prst="rect">
-            <a:avLst/>
-          </a:prstGeom>
-          <a:noFill/>
-          <a:ln/>
-        </p:spPr>
-        <p:txBody>
-          <a:bodyPr wrap="square" lIns="0" tIns="0" rIns="0" bIns="0" rtlCol="0" anchor="ctr"/>
-          <a:lstStyle/>
-          <a:p>
-            <a:pPr indent="0" marL="0">
-              <a:buNone/>
-            </a:pPr>
-            <a:r>
-              <a:rPr lang="en-US" sz="1800" dirty="0">
+              <a:t>The ten-second test:  </a:t>
+            </a:r>
+            <a:pPr indent="0" marL="0">
+              <a:buNone/>
+            </a:pPr>
+            <a:r>
+              <a:rPr lang="en-US" sz="1550" dirty="0">
                 <a:solidFill>
                   <a:srgbClr val="1B1F24"/>
                 </a:solidFill>
@@ -16390,48 +16641,9 @@
                 <a:ea typeface="Inter" pitchFamily="34" charset="-122"/>
                 <a:cs typeface="Inter" pitchFamily="34" charset="-120"/>
               </a:rPr>
-              <a:t>Short and blunt is fine: the tool has no feelings, and vague feedback gets you a vague draft. Two rounds minimum, one instruction at a time.</a:t>
-            </a:r>
-            <a:endParaRPr lang="en-US" sz="1800" dirty="0"/>
-          </a:p>
-        </p:txBody>
-      </p:sp>
-      <p:sp>
-        <p:nvSpPr>
-          <p:cNvPr id="25" name="Text 22"/>
-          <p:cNvSpPr/>
-          <p:nvPr/>
-        </p:nvSpPr>
-        <p:spPr>
-          <a:xfrm>
-            <a:off x="640080" y="5669280"/>
-            <a:ext cx="10972800" cy="411480"/>
-          </a:xfrm>
-          <a:prstGeom prst="rect">
-            <a:avLst/>
-          </a:prstGeom>
-          <a:noFill/>
-          <a:ln/>
-        </p:spPr>
-        <p:txBody>
-          <a:bodyPr wrap="square" lIns="0" tIns="0" rIns="0" bIns="0" rtlCol="0" anchor="ctr"/>
-          <a:lstStyle/>
-          <a:p>
-            <a:pPr algn="ctr" indent="0" marL="0">
-              <a:buNone/>
-            </a:pPr>
-            <a:r>
-              <a:rPr lang="en-US" sz="1900" i="1" dirty="0">
-                <a:solidFill>
-                  <a:srgbClr val="5B6B7A"/>
-                </a:solidFill>
-                <a:latin typeface="Inter" pitchFamily="34" charset="0"/>
-                <a:ea typeface="Inter" pitchFamily="34" charset="-122"/>
-                <a:cs typeface="Inter" pitchFamily="34" charset="-120"/>
-              </a:rPr>
-              <a:t>The first draft is the intern’s. The third one is yours.</a:t>
-            </a:r>
-            <a:endParaRPr lang="en-US" sz="1900" dirty="0"/>
+              <a:t>could anyone who knows our school tell who this is? Initials, one-of-a-kind details, rare combinations, and pasted documents all fail it.</a:t>
+            </a:r>
+            <a:endParaRPr lang="en-US" sz="1550" dirty="0"/>
           </a:p>
         </p:txBody>
       </p:sp>
@@ -16655,7 +16867,7 @@
                 <a:ea typeface="Inter" pitchFamily="34" charset="-122"/>
                 <a:cs typeface="Inter" pitchFamily="34" charset="-120"/>
               </a:rPr>
-              <a:t>Two pushbacks later</a:t>
+              <a:t>Where the name goes back in</a:t>
             </a:r>
             <a:endParaRPr lang="en-US" sz="3200" dirty="0"/>
           </a:p>
@@ -16823,7 +17035,7 @@
                 <a:ea typeface="Inter" pitchFamily="34" charset="-122"/>
                 <a:cs typeface="Inter" pitchFamily="34" charset="-120"/>
               </a:rPr>
-              <a:t>AI chat tool (any of them) · Ms. Rivera, our running example teacher (a composite, not a real person)</a:t>
+              <a:t>Her school email account · drafts folder · not the AI tool</a:t>
             </a:r>
             <a:endParaRPr lang="en-US" sz="1100" dirty="0"/>
           </a:p>
@@ -16837,7 +17049,7 @@
         </p:nvSpPr>
         <p:spPr>
           <a:xfrm>
-            <a:off x="1554480" y="1828800"/>
+            <a:off x="1554480" y="1847088"/>
             <a:ext cx="9646920" cy="256032"/>
           </a:xfrm>
           <a:prstGeom prst="rect">
@@ -16862,7 +17074,7 @@
                 <a:ea typeface="Inter" pitchFamily="34" charset="-122"/>
                 <a:cs typeface="Inter" pitchFamily="34" charset="-120"/>
               </a:rPr>
-              <a:t>SHE TYPES, ONE AT A TIME</a:t>
+              <a:t>PASTED FROM THE AI TOOL, THEN EDITED IN HER OWN INBOX</a:t>
             </a:r>
             <a:endParaRPr lang="en-US" sz="1100" dirty="0"/>
           </a:p>
@@ -16876,183 +17088,12 @@
         </p:nvSpPr>
         <p:spPr>
           <a:xfrm>
-            <a:off x="1554480" y="2139696"/>
-            <a:ext cx="2468880" cy="548640"/>
+            <a:off x="1554480" y="2148840"/>
+            <a:ext cx="9646920" cy="2834640"/>
           </a:xfrm>
           <a:prstGeom prst="roundRect">
             <a:avLst>
-              <a:gd name="adj" fmla="val 23333"/>
-            </a:avLst>
-          </a:prstGeom>
-          <a:solidFill>
-            <a:srgbClr val="EAF5F3"/>
-          </a:solidFill>
-          <a:ln w="12700">
-            <a:solidFill>
-              <a:srgbClr val="EAF5F3"/>
-            </a:solidFill>
-            <a:prstDash val="solid"/>
-          </a:ln>
-        </p:spPr>
-      </p:sp>
-      <p:sp>
-        <p:nvSpPr>
-          <p:cNvPr id="15" name="Text 12"/>
-          <p:cNvSpPr/>
-          <p:nvPr/>
-        </p:nvSpPr>
-        <p:spPr>
-          <a:xfrm>
-            <a:off x="1554480" y="2139696"/>
-            <a:ext cx="2468880" cy="548640"/>
-          </a:xfrm>
-          <a:prstGeom prst="rect">
-            <a:avLst/>
-          </a:prstGeom>
-          <a:noFill/>
-          <a:ln/>
-        </p:spPr>
-        <p:txBody>
-          <a:bodyPr wrap="square" lIns="0" tIns="0" rIns="0" bIns="0" rtlCol="0" anchor="ctr"/>
-          <a:lstStyle/>
-          <a:p>
-            <a:pPr algn="ctr" indent="0" marL="0">
-              <a:buNone/>
-            </a:pPr>
-            <a:r>
-              <a:rPr lang="en-US" sz="1700" b="1" dirty="0">
-                <a:solidFill>
-                  <a:srgbClr val="13293D"/>
-                </a:solidFill>
-                <a:latin typeface="Inter" pitchFamily="34" charset="0"/>
-                <a:ea typeface="Inter" pitchFamily="34" charset="-122"/>
-                <a:cs typeface="Inter" pitchFamily="34" charset="-120"/>
-              </a:rPr>
-              <a:t>“Warmer.”</a:t>
-            </a:r>
-            <a:endParaRPr lang="en-US" sz="1700" dirty="0"/>
-          </a:p>
-        </p:txBody>
-      </p:sp>
-      <p:sp>
-        <p:nvSpPr>
-          <p:cNvPr id="16" name="Shape 13"/>
-          <p:cNvSpPr/>
-          <p:nvPr/>
-        </p:nvSpPr>
-        <p:spPr>
-          <a:xfrm>
-            <a:off x="4206240" y="2139696"/>
-            <a:ext cx="2468880" cy="548640"/>
-          </a:xfrm>
-          <a:prstGeom prst="roundRect">
-            <a:avLst>
-              <a:gd name="adj" fmla="val 23333"/>
-            </a:avLst>
-          </a:prstGeom>
-          <a:solidFill>
-            <a:srgbClr val="EAF5F3"/>
-          </a:solidFill>
-          <a:ln w="12700">
-            <a:solidFill>
-              <a:srgbClr val="EAF5F3"/>
-            </a:solidFill>
-            <a:prstDash val="solid"/>
-          </a:ln>
-        </p:spPr>
-      </p:sp>
-      <p:sp>
-        <p:nvSpPr>
-          <p:cNvPr id="17" name="Text 14"/>
-          <p:cNvSpPr/>
-          <p:nvPr/>
-        </p:nvSpPr>
-        <p:spPr>
-          <a:xfrm>
-            <a:off x="4206240" y="2139696"/>
-            <a:ext cx="2468880" cy="548640"/>
-          </a:xfrm>
-          <a:prstGeom prst="rect">
-            <a:avLst/>
-          </a:prstGeom>
-          <a:noFill/>
-          <a:ln/>
-        </p:spPr>
-        <p:txBody>
-          <a:bodyPr wrap="square" lIns="0" tIns="0" rIns="0" bIns="0" rtlCol="0" anchor="ctr"/>
-          <a:lstStyle/>
-          <a:p>
-            <a:pPr algn="ctr" indent="0" marL="0">
-              <a:buNone/>
-            </a:pPr>
-            <a:r>
-              <a:rPr lang="en-US" sz="1700" b="1" dirty="0">
-                <a:solidFill>
-                  <a:srgbClr val="13293D"/>
-                </a:solidFill>
-                <a:latin typeface="Inter" pitchFamily="34" charset="0"/>
-                <a:ea typeface="Inter" pitchFamily="34" charset="-122"/>
-                <a:cs typeface="Inter" pitchFamily="34" charset="-120"/>
-              </a:rPr>
-              <a:t>“Shorter.”</a:t>
-            </a:r>
-            <a:endParaRPr lang="en-US" sz="1700" dirty="0"/>
-          </a:p>
-        </p:txBody>
-      </p:sp>
-      <p:sp>
-        <p:nvSpPr>
-          <p:cNvPr id="18" name="Text 15"/>
-          <p:cNvSpPr/>
-          <p:nvPr/>
-        </p:nvSpPr>
-        <p:spPr>
-          <a:xfrm>
-            <a:off x="1554480" y="2816352"/>
-            <a:ext cx="9646920" cy="256032"/>
-          </a:xfrm>
-          <a:prstGeom prst="rect">
-            <a:avLst/>
-          </a:prstGeom>
-          <a:noFill/>
-          <a:ln/>
-        </p:spPr>
-        <p:txBody>
-          <a:bodyPr wrap="square" lIns="0" tIns="0" rIns="0" bIns="0" rtlCol="0" anchor="ctr"/>
-          <a:lstStyle/>
-          <a:p>
-            <a:pPr indent="0" marL="0">
-              <a:buNone/>
-            </a:pPr>
-            <a:r>
-              <a:rPr lang="en-US" sz="1100" b="1" spc="150" kern="0" dirty="0">
-                <a:solidFill>
-                  <a:srgbClr val="5B6B7A"/>
-                </a:solidFill>
-                <a:latin typeface="Inter" pitchFamily="34" charset="0"/>
-                <a:ea typeface="Inter" pitchFamily="34" charset="-122"/>
-                <a:cs typeface="Inter" pitchFamily="34" charset="-120"/>
-              </a:rPr>
-              <a:t>THE BLURB, TWO ROUNDS LATER</a:t>
-            </a:r>
-            <a:endParaRPr lang="en-US" sz="1100" dirty="0"/>
-          </a:p>
-        </p:txBody>
-      </p:sp>
-      <p:sp>
-        <p:nvSpPr>
-          <p:cNvPr id="19" name="Shape 16"/>
-          <p:cNvSpPr/>
-          <p:nvPr/>
-        </p:nvSpPr>
-        <p:spPr>
-          <a:xfrm>
-            <a:off x="1554480" y="3108960"/>
-            <a:ext cx="9646920" cy="1874520"/>
-          </a:xfrm>
-          <a:prstGeom prst="roundRect">
-            <a:avLst>
-              <a:gd name="adj" fmla="val 5854"/>
+              <a:gd name="adj" fmla="val 3871"/>
             </a:avLst>
           </a:prstGeom>
           <a:solidFill>
@@ -17068,14 +17109,14 @@
       </p:sp>
       <p:sp>
         <p:nvSpPr>
-          <p:cNvPr id="20" name="Text 17"/>
-          <p:cNvSpPr/>
-          <p:nvPr/>
-        </p:nvSpPr>
-        <p:spPr>
-          <a:xfrm>
-            <a:off x="1783080" y="3182112"/>
-            <a:ext cx="9189720" cy="1719072"/>
+          <p:cNvPr id="15" name="Text 12"/>
+          <p:cNvSpPr/>
+          <p:nvPr/>
+        </p:nvSpPr>
+        <p:spPr>
+          <a:xfrm>
+            <a:off x="1783080" y="2240280"/>
+            <a:ext cx="9189720" cy="2651760"/>
           </a:xfrm>
           <a:prstGeom prst="rect">
             <a:avLst/>
@@ -17089,12 +17130,12 @@
           <a:p>
             <a:pPr indent="0" marL="0">
               <a:lnSpc>
-                <a:spcPct val="115000"/>
+                <a:spcPct val="112000"/>
               </a:lnSpc>
               <a:buNone/>
             </a:pPr>
             <a:r>
-              <a:rPr lang="en-US" sz="1900" dirty="0">
+              <a:rPr lang="en-US" sz="1650" dirty="0">
                 <a:solidFill>
                   <a:srgbClr val="1B1F24"/>
                 </a:solidFill>
@@ -17102,21 +17143,21 @@
                 <a:ea typeface="Inter" pitchFamily="34" charset="-122"/>
                 <a:cs typeface="Inter" pitchFamily="34" charset="-120"/>
               </a:rPr>
-              <a:t>“Families, our fall book fair is almost here. Stop by the library with your reader and help them pick a book they’ll actually love. We’re open all week, 8:00 to 3:00. Happy reading!”</a:t>
-            </a:r>
-            <a:endParaRPr lang="en-US" sz="1900" dirty="0"/>
-          </a:p>
-        </p:txBody>
-      </p:sp>
-      <p:sp>
-        <p:nvSpPr>
-          <p:cNvPr id="21" name="Text 18"/>
-          <p:cNvSpPr/>
-          <p:nvPr/>
-        </p:nvSpPr>
-        <p:spPr>
-          <a:xfrm>
-            <a:off x="640080" y="5349240"/>
+              <a:t>“Hi Ms. Miller, I wanted to reach out about Jayden’s three missing assignments and the difficult moment he had in class on Tuesday. As we discussed at last week’s conference, steady routines make a real difference. I know stretches like this can be hard, and I’d welcome the chance to talk about how we can support Jayden together. Please let me know a time that works for you.”</a:t>
+            </a:r>
+            <a:endParaRPr lang="en-US" sz="1650" dirty="0"/>
+          </a:p>
+        </p:txBody>
+      </p:sp>
+      <p:sp>
+        <p:nvSpPr>
+          <p:cNvPr id="16" name="Text 13"/>
+          <p:cNvSpPr/>
+          <p:nvPr/>
+        </p:nvSpPr>
+        <p:spPr>
+          <a:xfrm>
+            <a:off x="640080" y="5440680"/>
             <a:ext cx="10972800" cy="457200"/>
           </a:xfrm>
           <a:prstGeom prst="rect">
@@ -17141,7 +17182,7 @@
                 <a:ea typeface="Inter" pitchFamily="34" charset="-122"/>
                 <a:cs typeface="Inter" pitchFamily="34" charset="-120"/>
               </a:rPr>
-              <a:t>It finally sounds like her: two rounds of pushback, about forty seconds of typing.</a:t>
+              <a:t>Identity goes in last, in her own tools, never in theirs. The AI never met Jayden.</a:t>
             </a:r>
             <a:endParaRPr lang="en-US" sz="1800" dirty="0"/>
           </a:p>
@@ -17433,7 +17474,7 @@
                 <a:ea typeface="Inter" pitchFamily="34" charset="-122"/>
                 <a:cs typeface="Inter" pitchFamily="34" charset="-120"/>
               </a:rPr>
-              <a:t>CAUGHT ON THE READ-THROUGH · SHE NEVER TYPED A SCHEDULE</a:t>
+              <a:t>CAUGHT ON THE READ-THROUGH · A CONFERENCE THAT NEVER HAPPENED</a:t>
             </a:r>
             <a:endParaRPr lang="en-US" sz="1150" dirty="0"/>
           </a:p>
@@ -17464,7 +17505,7 @@
               <a:buNone/>
             </a:pPr>
             <a:r>
-              <a:rPr lang="en-US" sz="1650" dirty="0">
+              <a:rPr lang="en-US" sz="1550" dirty="0">
                 <a:solidFill>
                   <a:srgbClr val="1B1F24"/>
                 </a:solidFill>
@@ -17472,9 +17513,9 @@
                 <a:ea typeface="Inter" pitchFamily="34" charset="-122"/>
                 <a:cs typeface="Inter" pitchFamily="34" charset="-120"/>
               </a:rPr>
-              <a:t>Both drafts said the fair “runs all week, 8:00 to 3:00.” That was in neither her prompt nor the real flyer: the fair runs Tuesday and Thursday, 3:00 to 6:30, so working families can come after school. The intern filled a gap with something plausible, and it survived two rounds of pushback.</a:t>
-            </a:r>
-            <a:endParaRPr lang="en-US" sz="1650" dirty="0"/>
+              <a:t>Both drafts said “as we discussed at last week’s conference.” She never typed that, and there was no conference. The intern predicted likely words and filled the gap, and the invented sentence survived the three moves, the personalization, and two readings. In an email to a family, an invented shared memory costs the exact trust the email exists to build.</a:t>
+            </a:r>
+            <a:endParaRPr lang="en-US" sz="1550" dirty="0"/>
           </a:p>
         </p:txBody>
       </p:sp>
@@ -17640,7 +17681,7 @@
                 <a:ea typeface="Inter" pitchFamily="34" charset="-122"/>
                 <a:cs typeface="Inter" pitchFamily="34" charset="-120"/>
               </a:rPr>
-              <a:t>AI chat tool (any of them) · Ms. Rivera, our running example teacher (a composite, not a real person)</a:t>
+              <a:t>Her school email account · sent</a:t>
             </a:r>
             <a:endParaRPr lang="en-US" sz="1100" dirty="0"/>
           </a:p>
@@ -17735,12 +17776,12 @@
           <a:p>
             <a:pPr indent="0" marL="0">
               <a:lnSpc>
-                <a:spcPct val="115000"/>
+                <a:spcPct val="112000"/>
               </a:lnSpc>
               <a:buNone/>
             </a:pPr>
             <a:r>
-              <a:rPr lang="en-US" sz="1800" dirty="0">
+              <a:rPr lang="en-US" sz="1550" dirty="0">
                 <a:solidFill>
                   <a:srgbClr val="1B1F24"/>
                 </a:solidFill>
@@ -17748,9 +17789,9 @@
                 <a:ea typeface="Inter" pitchFamily="34" charset="-122"/>
                 <a:cs typeface="Inter" pitchFamily="34" charset="-120"/>
               </a:rPr>
-              <a:t>“Families, our fall book fair is almost here. Stop by the library with your reader and help them pick a book they’ll actually love. We’re open Tuesday and Thursday, 3:00 to 6:30, so you can come together after school. Happy reading!”</a:t>
-            </a:r>
-            <a:endParaRPr lang="en-US" sz="1800" dirty="0"/>
+              <a:t>“Hi Ms. Miller, I wanted to reach out about Jayden’s three missing assignments and the difficult moment he had in class on Tuesday. I know stretches like this can be hard, and I’d welcome the chance to talk about how we can support Jayden together. Please let me know a time that works for you.”</a:t>
+            </a:r>
+            <a:endParaRPr lang="en-US" sz="1550" dirty="0"/>
           </a:p>
         </p:txBody>
       </p:sp>
@@ -18142,7 +18183,7 @@
                 <a:ea typeface="Inter" pitchFamily="34" charset="-122"/>
                 <a:cs typeface="Inter" pitchFamily="34" charset="-120"/>
               </a:rPr>
-              <a:t>Her newsletter blurb's arc: beige v1, two pushbacks, usable. One error caught.</a:t>
+              <a:t>Her email's arc: 3 moves, safe draft, name added back in her inbox. One invented detail caught.</a:t>
             </a:r>
             <a:endParaRPr lang="en-US" sz="1000" dirty="0"/>
           </a:p>
@@ -18263,7 +18304,7 @@
                 <a:ea typeface="Inter" pitchFamily="34" charset="-122"/>
                 <a:cs typeface="Inter" pitchFamily="34" charset="-120"/>
               </a:rPr>
-              <a:t>What surprised you?</a:t>
+              <a:t>What did the safe version cost you? (Usually: nothing.)</a:t>
             </a:r>
             <a:endParaRPr lang="en-US" sz="2300" dirty="0"/>
           </a:p>
@@ -18284,7 +18325,7 @@
                 <a:ea typeface="Inter" pitchFamily="34" charset="-122"/>
                 <a:cs typeface="Inter" pitchFamily="34" charset="-120"/>
               </a:rPr>
-              <a:t>What was better than you expected, and what was worse?</a:t>
+              <a:t>What surprised you about how little the tool needed to know?</a:t>
             </a:r>
             <a:endParaRPr lang="en-US" sz="2300" dirty="0"/>
           </a:p>
@@ -18305,7 +18346,7 @@
                 <a:ea typeface="Inter" pitchFamily="34" charset="-122"/>
                 <a:cs typeface="Inter" pitchFamily="34" charset="-120"/>
               </a:rPr>
-              <a:t>Did anyone catch it being wrong?</a:t>
+              <a:t>Did anyone catch a detail it invented?</a:t>
             </a:r>
             <a:endParaRPr lang="en-US" sz="2300" dirty="0"/>
           </a:p>
@@ -18385,7 +18426,7 @@
                 <a:ea typeface="Inter" pitchFamily="34" charset="-122"/>
                 <a:cs typeface="Inter" pitchFamily="34" charset="-120"/>
               </a:rPr>
-              <a:t>the first draft is rarely the good draft; the value shows up when you push back. And everything you just made still needs your eyes: it’s fast, it’s fluent, and it’s unsigned until a professional signs it.</a:t>
+              <a:t>the work never needed the child — describe the need and the draft gets better, not worse, which is why the rule costs nothing in practice. And everything you just made still needs your eyes: it’s fast, it’s fluent, and it’s unsigned until a professional signs it.</a:t>
             </a:r>
             <a:endParaRPr lang="en-US" sz="1900" dirty="0"/>
           </a:p>
